--- a/lectures/week-06/index.pptx
+++ b/lectures/week-06/index.pptx
@@ -9,6 +9,7 @@
     <p:sldId id="257" r:id="rId3"/>
     <p:sldId id="258" r:id="rId4"/>
     <p:sldId id="259" r:id="rId5"/>
+    <p:sldId id="260" r:id="rId6"/>
   </p:sldIdLst>
   <p:sldSz cx="9144000" cy="5143500" type="screen16x9"/>
   <p:notesSz cx="6858000" cy="9144000"/>
@@ -3208,12 +3209,12 @@
       </p:grpSpPr>
       <p:sp>
         <p:nvSpPr>
-          <p:cNvPr id="2" name="Title 1"/>
-          <p:cNvSpPr>
-            <a:spLocks noGrp="1"/>
-          </p:cNvSpPr>
-          <p:nvPr>
-            <p:ph type="title"/>
+          <p:cNvPr id="3" name="Content Placeholder 2"/>
+          <p:cNvSpPr>
+            <a:spLocks noGrp="1"/>
+          </p:cNvSpPr>
+          <p:nvPr>
+            <p:ph idx="1"/>
           </p:nvPr>
         </p:nvSpPr>
         <p:spPr/>
@@ -3225,33 +3226,12 @@
               <a:buNone/>
             </a:pPr>
             <a:r>
+              <a:rPr b="1"/>
+              <a:t>Draft Material:</a:t>
+            </a:r>
+            <a:r>
               <a:rPr/>
-              <a:t>Coming Soon</a:t>
-            </a:r>
-          </a:p>
-        </p:txBody>
-      </p:sp>
-      <p:sp>
-        <p:nvSpPr>
-          <p:cNvPr id="3" name="Content Placeholder 2"/>
-          <p:cNvSpPr>
-            <a:spLocks noGrp="1"/>
-          </p:cNvSpPr>
-          <p:nvPr>
-            <p:ph idx="1"/>
-          </p:nvPr>
-        </p:nvSpPr>
-        <p:spPr/>
-        <p:txBody>
-          <a:bodyPr/>
-          <a:lstStyle/>
-          <a:p>
-            <a:pPr lvl="0" indent="0" marL="0">
-              <a:buNone/>
-            </a:pPr>
-            <a:r>
-              <a:rPr/>
-              <a:t>This lecture is under development.</a:t>
+              <a:t> This content is under development and subject to change.</a:t>
             </a:r>
           </a:p>
         </p:txBody>
@@ -3298,7 +3278,7 @@
             </a:pPr>
             <a:r>
               <a:rPr/>
-              <a:t>Preparation</a:t>
+              <a:t>Coming Soon</a:t>
             </a:r>
           </a:p>
         </p:txBody>
@@ -3323,7 +3303,7 @@
             </a:pPr>
             <a:r>
               <a:rPr/>
-              <a:t>Revisit Zarekarizi, Srikrishnan, and Keller (2020)</a:t>
+              <a:t>This lecture is under development.</a:t>
             </a:r>
           </a:p>
         </p:txBody>
@@ -3334,6 +3314,78 @@
 </file>
 
 <file path=ppt/slides/slide4.xml><?xml version="1.0" encoding="utf-8"?>
+<p:sld xmlns:a="http://schemas.openxmlformats.org/drawingml/2006/main" xmlns:r="http://schemas.openxmlformats.org/officeDocument/2006/relationships" xmlns:p="http://schemas.openxmlformats.org/presentationml/2006/main">
+  <p:cSld>
+    <p:spTree>
+      <p:nvGrpSpPr>
+        <p:cNvPr id="1" name=""/>
+        <p:cNvGrpSpPr/>
+        <p:nvPr/>
+      </p:nvGrpSpPr>
+      <p:grpSpPr>
+        <a:xfrm>
+          <a:off x="0" y="0"/>
+          <a:ext cx="0" cy="0"/>
+          <a:chOff x="0" y="0"/>
+          <a:chExt cx="0" cy="0"/>
+        </a:xfrm>
+      </p:grpSpPr>
+      <p:sp>
+        <p:nvSpPr>
+          <p:cNvPr id="2" name="Title 1"/>
+          <p:cNvSpPr>
+            <a:spLocks noGrp="1"/>
+          </p:cNvSpPr>
+          <p:nvPr>
+            <p:ph type="title"/>
+          </p:nvPr>
+        </p:nvSpPr>
+        <p:spPr/>
+        <p:txBody>
+          <a:bodyPr/>
+          <a:lstStyle/>
+          <a:p>
+            <a:pPr lvl="0" indent="0" marL="0">
+              <a:buNone/>
+            </a:pPr>
+            <a:r>
+              <a:rPr/>
+              <a:t>Preparation</a:t>
+            </a:r>
+          </a:p>
+        </p:txBody>
+      </p:sp>
+      <p:sp>
+        <p:nvSpPr>
+          <p:cNvPr id="3" name="Content Placeholder 2"/>
+          <p:cNvSpPr>
+            <a:spLocks noGrp="1"/>
+          </p:cNvSpPr>
+          <p:nvPr>
+            <p:ph idx="1"/>
+          </p:nvPr>
+        </p:nvSpPr>
+        <p:spPr/>
+        <p:txBody>
+          <a:bodyPr/>
+          <a:lstStyle/>
+          <a:p>
+            <a:pPr lvl="0" indent="0" marL="0">
+              <a:buNone/>
+            </a:pPr>
+            <a:r>
+              <a:rPr/>
+              <a:t>Revisit Zarekarizi, Srikrishnan, and Keller (2020)</a:t>
+            </a:r>
+          </a:p>
+        </p:txBody>
+      </p:sp>
+    </p:spTree>
+  </p:cSld>
+</p:sld>
+</file>
+
+<file path=ppt/slides/slide5.xml><?xml version="1.0" encoding="utf-8"?>
 <p:sld xmlns:a="http://schemas.openxmlformats.org/drawingml/2006/main" xmlns:r="http://schemas.openxmlformats.org/officeDocument/2006/relationships" xmlns:p="http://schemas.openxmlformats.org/presentationml/2006/main">
   <p:cSld>
     <p:spTree>

--- a/lectures/week-06/index.pptx
+++ b/lectures/week-06/index.pptx
@@ -3180,7 +3180,7 @@
             </a:pPr>
             <a:r>
               <a:rPr/>
-              <a:t>2026-02-16</a:t>
+              <a:t>2026-02-18</a:t>
             </a:r>
           </a:p>
         </p:txBody>

--- a/lectures/week-06/index.pptx
+++ b/lectures/week-06/index.pptx
@@ -3119,7 +3119,7 @@
             </a:pPr>
             <a:r>
               <a:rPr/>
-              <a:t>Valuation &amp; Benefit-Cost Analysis</a:t>
+              <a:t>Optimal Static Decisions</a:t>
             </a:r>
           </a:p>
         </p:txBody>
@@ -3278,7 +3278,7 @@
             </a:pPr>
             <a:r>
               <a:rPr/>
-              <a:t>Coming Soon</a:t>
+              <a:t>Preparation</a:t>
             </a:r>
           </a:p>
         </p:txBody>
@@ -3303,7 +3303,7 @@
             </a:pPr>
             <a:r>
               <a:rPr/>
-              <a:t>This lecture is under development.</a:t>
+              <a:t>Read a part of van Dantzig (1956) and then we will revisit it in the reading.</a:t>
             </a:r>
           </a:p>
         </p:txBody>
@@ -3350,7 +3350,7 @@
             </a:pPr>
             <a:r>
               <a:rPr/>
-              <a:t>Preparation</a:t>
+              <a:t>Coming Soon</a:t>
             </a:r>
           </a:p>
         </p:txBody>
@@ -3375,7 +3375,7 @@
             </a:pPr>
             <a:r>
               <a:rPr/>
-              <a:t>Revisit Zarekarizi, Srikrishnan, and Keller (2020)</a:t>
+              <a:t>This lecture is under development.</a:t>
             </a:r>
           </a:p>
         </p:txBody>
@@ -3447,21 +3447,21 @@
             </a:pPr>
             <a:r>
               <a:rPr/>
-              <a:t>Zarekarizi, Mahkameh, Vivek Srikrishnan, and Klaus Keller. 2020. “Neglecting Uncertainties Biases House-Elevation Decisions to Manage Riverine Flood Risks.” </a:t>
+              <a:t>Dantzig, D. van. 1956. “Economic Decision Problems for Flood Prevention.” </a:t>
             </a:r>
             <a:r>
               <a:rPr i="1"/>
-              <a:t>Nature Communications</a:t>
+              <a:t>Econometrica</a:t>
             </a:r>
             <a:r>
               <a:rPr/>
-              <a:t> 11 (1, 1): 5361. </a:t>
+              <a:t> 24 (3): 276–87. </a:t>
             </a:r>
             <a:r>
               <a:rPr>
                 <a:hlinkClick r:id="rId2"/>
               </a:rPr>
-              <a:t>https://doi.org/10.1038/s41467-020-19188-9</a:t>
+              <a:t>https://doi.org/10.2307/1911632</a:t>
             </a:r>
             <a:r>
               <a:rPr/>

--- a/lectures/week-06/index.pptx
+++ b/lectures/week-06/index.pptx
@@ -4,12 +4,28 @@
   <p:sldMasterIdLst>
     <p:sldMasterId id="2147483648" r:id="rId1"/>
   </p:sldMasterIdLst>
+  <p:notesMasterIdLst>
+    <p:notesMasterId r:id="rId20"/>
+  </p:notesMasterIdLst>
   <p:sldIdLst>
     <p:sldId id="256" r:id="rId2"/>
     <p:sldId id="257" r:id="rId3"/>
     <p:sldId id="258" r:id="rId4"/>
     <p:sldId id="259" r:id="rId5"/>
     <p:sldId id="260" r:id="rId6"/>
+    <p:sldId id="261" r:id="rId7"/>
+    <p:sldId id="262" r:id="rId8"/>
+    <p:sldId id="263" r:id="rId9"/>
+    <p:sldId id="264" r:id="rId10"/>
+    <p:sldId id="265" r:id="rId11"/>
+    <p:sldId id="266" r:id="rId12"/>
+    <p:sldId id="267" r:id="rId13"/>
+    <p:sldId id="268" r:id="rId14"/>
+    <p:sldId id="269" r:id="rId15"/>
+    <p:sldId id="270" r:id="rId16"/>
+    <p:sldId id="271" r:id="rId17"/>
+    <p:sldId id="272" r:id="rId18"/>
+    <p:sldId id="273" r:id="rId19"/>
   </p:sldIdLst>
   <p:sldSz cx="9144000" cy="5143500" type="screen16x9"/>
   <p:notesSz cx="6858000" cy="9144000"/>
@@ -125,6 +141,1697 @@
     </p:ext>
   </p:extLst>
 </p:presentation>
+</file>
+
+<file path=ppt/notesMasters/notesMaster1.xml><?xml version="1.0" encoding="utf-8"?>
+<p:notesMaster xmlns:a="http://schemas.openxmlformats.org/drawingml/2006/main" xmlns:r="http://schemas.openxmlformats.org/officeDocument/2006/relationships" xmlns:p="http://schemas.openxmlformats.org/presentationml/2006/main">
+  <p:cSld>
+    <p:bg>
+      <p:bgRef idx="1001">
+        <a:schemeClr val="bg1"/>
+      </p:bgRef>
+    </p:bg>
+    <p:spTree>
+      <p:nvGrpSpPr>
+        <p:cNvPr id="1" name=""/>
+        <p:cNvGrpSpPr/>
+        <p:nvPr/>
+      </p:nvGrpSpPr>
+      <p:grpSpPr>
+        <a:xfrm>
+          <a:off x="0" y="0"/>
+          <a:ext cx="0" cy="0"/>
+          <a:chOff x="0" y="0"/>
+          <a:chExt cx="0" cy="0"/>
+        </a:xfrm>
+      </p:grpSpPr>
+      <p:sp>
+        <p:nvSpPr>
+          <p:cNvPr id="2" name="Header Placeholder 1"/>
+          <p:cNvSpPr>
+            <a:spLocks noGrp="1"/>
+          </p:cNvSpPr>
+          <p:nvPr>
+            <p:ph type="hdr" sz="quarter"/>
+          </p:nvPr>
+        </p:nvSpPr>
+        <p:spPr>
+          <a:xfrm>
+            <a:off x="0" y="0"/>
+            <a:ext cx="2971800" cy="458788"/>
+          </a:xfrm>
+          <a:prstGeom prst="rect">
+            <a:avLst/>
+          </a:prstGeom>
+        </p:spPr>
+        <p:txBody>
+          <a:bodyPr vert="horz" lIns="91440" tIns="45720" rIns="91440" bIns="45720" rtlCol="0"/>
+          <a:lstStyle>
+            <a:lvl1pPr algn="l">
+              <a:defRPr sz="1200"/>
+            </a:lvl1pPr>
+          </a:lstStyle>
+          <a:p>
+            <a:endParaRPr lang="en-US"/>
+          </a:p>
+        </p:txBody>
+      </p:sp>
+      <p:sp>
+        <p:nvSpPr>
+          <p:cNvPr id="3" name="Date Placeholder 2"/>
+          <p:cNvSpPr>
+            <a:spLocks noGrp="1"/>
+          </p:cNvSpPr>
+          <p:nvPr>
+            <p:ph type="dt" idx="1"/>
+          </p:nvPr>
+        </p:nvSpPr>
+        <p:spPr>
+          <a:xfrm>
+            <a:off x="3884613" y="0"/>
+            <a:ext cx="2971800" cy="458788"/>
+          </a:xfrm>
+          <a:prstGeom prst="rect">
+            <a:avLst/>
+          </a:prstGeom>
+        </p:spPr>
+        <p:txBody>
+          <a:bodyPr vert="horz" lIns="91440" tIns="45720" rIns="91440" bIns="45720" rtlCol="0"/>
+          <a:lstStyle>
+            <a:lvl1pPr algn="r">
+              <a:defRPr sz="1200"/>
+            </a:lvl1pPr>
+          </a:lstStyle>
+          <a:p>
+            <a:fld id="{0F9C1CCF-B725-44A7-AA57-5E433BD85C9F}" type="datetimeFigureOut">
+              <a:rPr lang="en-US" smtClean="0"/>
+              <a:t>1/2/22</a:t>
+            </a:fld>
+            <a:endParaRPr lang="en-US"/>
+          </a:p>
+        </p:txBody>
+      </p:sp>
+      <p:sp>
+        <p:nvSpPr>
+          <p:cNvPr id="4" name="Slide Image Placeholder 3"/>
+          <p:cNvSpPr>
+            <a:spLocks noGrp="1" noRot="1" noChangeAspect="1"/>
+          </p:cNvSpPr>
+          <p:nvPr>
+            <p:ph type="sldImg" idx="2"/>
+          </p:nvPr>
+        </p:nvSpPr>
+        <p:spPr>
+          <a:xfrm>
+            <a:off x="685800" y="1143000"/>
+            <a:ext cx="5486400" cy="3086100"/>
+          </a:xfrm>
+          <a:prstGeom prst="rect">
+            <a:avLst/>
+          </a:prstGeom>
+          <a:noFill/>
+          <a:ln w="12700">
+            <a:solidFill>
+              <a:prstClr val="black"/>
+            </a:solidFill>
+          </a:ln>
+        </p:spPr>
+        <p:txBody>
+          <a:bodyPr vert="horz" lIns="91440" tIns="45720" rIns="91440" bIns="45720" rtlCol="0" anchor="ctr"/>
+          <a:lstStyle/>
+          <a:p>
+            <a:endParaRPr lang="en-US"/>
+          </a:p>
+        </p:txBody>
+      </p:sp>
+      <p:sp>
+        <p:nvSpPr>
+          <p:cNvPr id="5" name="Notes Placeholder 4"/>
+          <p:cNvSpPr>
+            <a:spLocks noGrp="1"/>
+          </p:cNvSpPr>
+          <p:nvPr>
+            <p:ph type="body" sz="quarter" idx="3"/>
+          </p:nvPr>
+        </p:nvSpPr>
+        <p:spPr>
+          <a:xfrm>
+            <a:off x="685800" y="4400550"/>
+            <a:ext cx="5486400" cy="3600450"/>
+          </a:xfrm>
+          <a:prstGeom prst="rect">
+            <a:avLst/>
+          </a:prstGeom>
+        </p:spPr>
+        <p:txBody>
+          <a:bodyPr vert="horz" lIns="91440" tIns="45720" rIns="91440" bIns="45720" rtlCol="0"/>
+          <a:lstStyle/>
+          <a:p>
+            <a:pPr lvl="0"/>
+            <a:r>
+              <a:rPr lang="en-US"/>
+              <a:t>Click to edit Master text styles</a:t>
+            </a:r>
+          </a:p>
+          <a:p>
+            <a:pPr lvl="1"/>
+            <a:r>
+              <a:rPr lang="en-US"/>
+              <a:t>Second level</a:t>
+            </a:r>
+          </a:p>
+          <a:p>
+            <a:pPr lvl="2"/>
+            <a:r>
+              <a:rPr lang="en-US"/>
+              <a:t>Third level</a:t>
+            </a:r>
+          </a:p>
+          <a:p>
+            <a:pPr lvl="3"/>
+            <a:r>
+              <a:rPr lang="en-US"/>
+              <a:t>Fourth level</a:t>
+            </a:r>
+          </a:p>
+          <a:p>
+            <a:pPr lvl="4"/>
+            <a:r>
+              <a:rPr lang="en-US"/>
+              <a:t>Fifth level</a:t>
+            </a:r>
+          </a:p>
+        </p:txBody>
+      </p:sp>
+      <p:sp>
+        <p:nvSpPr>
+          <p:cNvPr id="6" name="Footer Placeholder 5"/>
+          <p:cNvSpPr>
+            <a:spLocks noGrp="1"/>
+          </p:cNvSpPr>
+          <p:nvPr>
+            <p:ph type="ftr" sz="quarter" idx="4"/>
+          </p:nvPr>
+        </p:nvSpPr>
+        <p:spPr>
+          <a:xfrm>
+            <a:off x="0" y="8685213"/>
+            <a:ext cx="2971800" cy="458787"/>
+          </a:xfrm>
+          <a:prstGeom prst="rect">
+            <a:avLst/>
+          </a:prstGeom>
+        </p:spPr>
+        <p:txBody>
+          <a:bodyPr vert="horz" lIns="91440" tIns="45720" rIns="91440" bIns="45720" rtlCol="0" anchor="b"/>
+          <a:lstStyle>
+            <a:lvl1pPr algn="l">
+              <a:defRPr sz="1200"/>
+            </a:lvl1pPr>
+          </a:lstStyle>
+          <a:p>
+            <a:endParaRPr lang="en-US"/>
+          </a:p>
+        </p:txBody>
+      </p:sp>
+      <p:sp>
+        <p:nvSpPr>
+          <p:cNvPr id="7" name="Slide Number Placeholder 6"/>
+          <p:cNvSpPr>
+            <a:spLocks noGrp="1"/>
+          </p:cNvSpPr>
+          <p:nvPr>
+            <p:ph type="sldNum" sz="quarter" idx="5"/>
+          </p:nvPr>
+        </p:nvSpPr>
+        <p:spPr>
+          <a:xfrm>
+            <a:off x="3884613" y="8685213"/>
+            <a:ext cx="2971800" cy="458787"/>
+          </a:xfrm>
+          <a:prstGeom prst="rect">
+            <a:avLst/>
+          </a:prstGeom>
+        </p:spPr>
+        <p:txBody>
+          <a:bodyPr vert="horz" lIns="91440" tIns="45720" rIns="91440" bIns="45720" rtlCol="0" anchor="b"/>
+          <a:lstStyle>
+            <a:lvl1pPr algn="r">
+              <a:defRPr sz="1200"/>
+            </a:lvl1pPr>
+          </a:lstStyle>
+          <a:p>
+            <a:fld id="{18BDFEC3-8487-43E8-A154-7C12CBC1FFF2}" type="slidenum">
+              <a:rPr lang="en-US" smtClean="0"/>
+              <a:t>‹#›</a:t>
+            </a:fld>
+            <a:endParaRPr lang="en-US"/>
+          </a:p>
+        </p:txBody>
+      </p:sp>
+    </p:spTree>
+    <p:extLst>
+      <p:ext uri="{BB962C8B-B14F-4D97-AF65-F5344CB8AC3E}">
+        <p14:creationId xmlns:p14="http://schemas.microsoft.com/office/powerpoint/2010/main" val="3782709779"/>
+      </p:ext>
+    </p:extLst>
+  </p:cSld>
+  <p:clrMap bg1="lt1" tx1="dk1" bg2="lt2" tx2="dk2" accent1="accent1" accent2="accent2" accent3="accent3" accent4="accent4" accent5="accent5" accent6="accent6" hlink="hlink" folHlink="folHlink"/>
+  <p:notesStyle>
+    <a:lvl1pPr marL="0" algn="l" defTabSz="914400" rtl="0" eaLnBrk="1" latinLnBrk="0" hangingPunct="1">
+      <a:defRPr sz="1200" kern="1200">
+        <a:solidFill>
+          <a:schemeClr val="tx1"/>
+        </a:solidFill>
+        <a:latin typeface="+mn-lt"/>
+        <a:ea typeface="+mn-ea"/>
+        <a:cs typeface="+mn-cs"/>
+      </a:defRPr>
+    </a:lvl1pPr>
+    <a:lvl2pPr marL="457200" algn="l" defTabSz="914400" rtl="0" eaLnBrk="1" latinLnBrk="0" hangingPunct="1">
+      <a:defRPr sz="1200" kern="1200">
+        <a:solidFill>
+          <a:schemeClr val="tx1"/>
+        </a:solidFill>
+        <a:latin typeface="+mn-lt"/>
+        <a:ea typeface="+mn-ea"/>
+        <a:cs typeface="+mn-cs"/>
+      </a:defRPr>
+    </a:lvl2pPr>
+    <a:lvl3pPr marL="914400" algn="l" defTabSz="914400" rtl="0" eaLnBrk="1" latinLnBrk="0" hangingPunct="1">
+      <a:defRPr sz="1200" kern="1200">
+        <a:solidFill>
+          <a:schemeClr val="tx1"/>
+        </a:solidFill>
+        <a:latin typeface="+mn-lt"/>
+        <a:ea typeface="+mn-ea"/>
+        <a:cs typeface="+mn-cs"/>
+      </a:defRPr>
+    </a:lvl3pPr>
+    <a:lvl4pPr marL="1371600" algn="l" defTabSz="914400" rtl="0" eaLnBrk="1" latinLnBrk="0" hangingPunct="1">
+      <a:defRPr sz="1200" kern="1200">
+        <a:solidFill>
+          <a:schemeClr val="tx1"/>
+        </a:solidFill>
+        <a:latin typeface="+mn-lt"/>
+        <a:ea typeface="+mn-ea"/>
+        <a:cs typeface="+mn-cs"/>
+      </a:defRPr>
+    </a:lvl4pPr>
+    <a:lvl5pPr marL="1828800" algn="l" defTabSz="914400" rtl="0" eaLnBrk="1" latinLnBrk="0" hangingPunct="1">
+      <a:defRPr sz="1200" kern="1200">
+        <a:solidFill>
+          <a:schemeClr val="tx1"/>
+        </a:solidFill>
+        <a:latin typeface="+mn-lt"/>
+        <a:ea typeface="+mn-ea"/>
+        <a:cs typeface="+mn-cs"/>
+      </a:defRPr>
+    </a:lvl5pPr>
+    <a:lvl6pPr marL="2286000" algn="l" defTabSz="914400" rtl="0" eaLnBrk="1" latinLnBrk="0" hangingPunct="1">
+      <a:defRPr sz="1200" kern="1200">
+        <a:solidFill>
+          <a:schemeClr val="tx1"/>
+        </a:solidFill>
+        <a:latin typeface="+mn-lt"/>
+        <a:ea typeface="+mn-ea"/>
+        <a:cs typeface="+mn-cs"/>
+      </a:defRPr>
+    </a:lvl6pPr>
+    <a:lvl7pPr marL="2743200" algn="l" defTabSz="914400" rtl="0" eaLnBrk="1" latinLnBrk="0" hangingPunct="1">
+      <a:defRPr sz="1200" kern="1200">
+        <a:solidFill>
+          <a:schemeClr val="tx1"/>
+        </a:solidFill>
+        <a:latin typeface="+mn-lt"/>
+        <a:ea typeface="+mn-ea"/>
+        <a:cs typeface="+mn-cs"/>
+      </a:defRPr>
+    </a:lvl7pPr>
+    <a:lvl8pPr marL="3200400" algn="l" defTabSz="914400" rtl="0" eaLnBrk="1" latinLnBrk="0" hangingPunct="1">
+      <a:defRPr sz="1200" kern="1200">
+        <a:solidFill>
+          <a:schemeClr val="tx1"/>
+        </a:solidFill>
+        <a:latin typeface="+mn-lt"/>
+        <a:ea typeface="+mn-ea"/>
+        <a:cs typeface="+mn-cs"/>
+      </a:defRPr>
+    </a:lvl8pPr>
+    <a:lvl9pPr marL="3657600" algn="l" defTabSz="914400" rtl="0" eaLnBrk="1" latinLnBrk="0" hangingPunct="1">
+      <a:defRPr sz="1200" kern="1200">
+        <a:solidFill>
+          <a:schemeClr val="tx1"/>
+        </a:solidFill>
+        <a:latin typeface="+mn-lt"/>
+        <a:ea typeface="+mn-ea"/>
+        <a:cs typeface="+mn-cs"/>
+      </a:defRPr>
+    </a:lvl9pPr>
+  </p:notesStyle>
+</p:notesMaster>
+</file>
+
+<file path=ppt/notesSlides/notesSlide1.xml><?xml version="1.0" encoding="utf-8"?>
+<p:notes xmlns:a="http://schemas.openxmlformats.org/drawingml/2006/main" xmlns:r="http://schemas.openxmlformats.org/officeDocument/2006/relationships" xmlns:p="http://schemas.openxmlformats.org/presentationml/2006/main">
+  <p:cSld>
+    <p:spTree>
+      <p:nvGrpSpPr>
+        <p:cNvPr id="1" name=""/>
+        <p:cNvGrpSpPr/>
+        <p:nvPr/>
+      </p:nvGrpSpPr>
+      <p:grpSpPr>
+        <a:xfrm>
+          <a:off x="0" y="0"/>
+          <a:ext cx="0" cy="0"/>
+          <a:chOff x="0" y="0"/>
+          <a:chExt cx="0" cy="0"/>
+        </a:xfrm>
+      </p:grpSpPr>
+      <p:sp>
+        <p:nvSpPr>
+          <p:cNvPr id="2" name="Slide Image Placeholder 1"/>
+          <p:cNvSpPr>
+            <a:spLocks noGrp="1" noRot="1" noChangeAspect="1"/>
+          </p:cNvSpPr>
+          <p:nvPr>
+            <p:ph type="sldImg"/>
+          </p:nvPr>
+        </p:nvSpPr>
+        <p:spPr/>
+      </p:sp>
+      <p:sp>
+        <p:nvSpPr>
+          <p:cNvPr id="3" name="Notes Placeholder 2"/>
+          <p:cNvSpPr>
+            <a:spLocks noGrp="1"/>
+          </p:cNvSpPr>
+          <p:nvPr>
+            <p:ph type="body" idx="1"/>
+          </p:nvPr>
+        </p:nvSpPr>
+        <p:spPr/>
+        <p:txBody>
+          <a:bodyPr/>
+          <a:lstStyle/>
+          <a:p>
+            <a:pPr lvl="0" indent="0" marL="0">
+              <a:buNone/>
+            </a:pPr>
+            <a:r>
+              <a:rPr/>
+              <a:t>Target: 1:00. Open with the historical disaster. Set the scene dramatically before introducing any formalism.</a:t>
+            </a:r>
+          </a:p>
+        </p:txBody>
+      </p:sp>
+      <p:sp>
+        <p:nvSpPr>
+          <p:cNvPr id="4" name="Slide Number Placeholder 3"/>
+          <p:cNvSpPr>
+            <a:spLocks noGrp="1"/>
+          </p:cNvSpPr>
+          <p:nvPr>
+            <p:ph type="sldNum" sz="quarter" idx="10"/>
+          </p:nvPr>
+        </p:nvSpPr>
+        <p:spPr/>
+        <p:txBody>
+          <a:bodyPr/>
+          <a:lstStyle/>
+          <a:p>
+            <a:fld id="{18BDFEC3-8487-43E8-A154-7C12CBC1FFF2}" type="slidenum">
+              <a:rPr lang="en-US"/>
+              <a:t>2</a:t>
+            </a:fld>
+            <a:endParaRPr lang="en-US"/>
+          </a:p>
+        </p:txBody>
+      </p:sp>
+    </p:spTree>
+  </p:cSld>
+</p:notes>
+</file>
+
+<file path=ppt/notesSlides/notesSlide10.xml><?xml version="1.0" encoding="utf-8"?>
+<p:notes xmlns:a="http://schemas.openxmlformats.org/drawingml/2006/main" xmlns:r="http://schemas.openxmlformats.org/officeDocument/2006/relationships" xmlns:p="http://schemas.openxmlformats.org/presentationml/2006/main">
+  <p:cSld>
+    <p:spTree>
+      <p:nvGrpSpPr>
+        <p:cNvPr id="1" name=""/>
+        <p:cNvGrpSpPr/>
+        <p:nvPr/>
+      </p:nvGrpSpPr>
+      <p:grpSpPr>
+        <a:xfrm>
+          <a:off x="0" y="0"/>
+          <a:ext cx="0" cy="0"/>
+          <a:chOff x="0" y="0"/>
+          <a:chExt cx="0" cy="0"/>
+        </a:xfrm>
+      </p:grpSpPr>
+      <p:sp>
+        <p:nvSpPr>
+          <p:cNvPr id="2" name="Slide Image Placeholder 1"/>
+          <p:cNvSpPr>
+            <a:spLocks noGrp="1" noRot="1" noChangeAspect="1"/>
+          </p:cNvSpPr>
+          <p:nvPr>
+            <p:ph type="sldImg"/>
+          </p:nvPr>
+        </p:nvSpPr>
+        <p:spPr/>
+      </p:sp>
+      <p:sp>
+        <p:nvSpPr>
+          <p:cNvPr id="3" name="Notes Placeholder 2"/>
+          <p:cNvSpPr>
+            <a:spLocks noGrp="1"/>
+          </p:cNvSpPr>
+          <p:nvPr>
+            <p:ph type="body" idx="1"/>
+          </p:nvPr>
+        </p:nvSpPr>
+        <p:spPr/>
+        <p:txBody>
+          <a:bodyPr/>
+          <a:lstStyle/>
+          <a:p>
+            <a:pPr lvl="0" indent="0" marL="0">
+              <a:buNone/>
+            </a:pPr>
+            <a:r>
+              <a:rPr/>
+              <a:t>Target: 1:39. The Delta Works took 43 years and cost ~$7 billion.</a:t>
+            </a:r>
+          </a:p>
+        </p:txBody>
+      </p:sp>
+      <p:sp>
+        <p:nvSpPr>
+          <p:cNvPr id="4" name="Slide Number Placeholder 3"/>
+          <p:cNvSpPr>
+            <a:spLocks noGrp="1"/>
+          </p:cNvSpPr>
+          <p:nvPr>
+            <p:ph type="sldNum" sz="quarter" idx="10"/>
+          </p:nvPr>
+        </p:nvSpPr>
+        <p:spPr/>
+        <p:txBody>
+          <a:bodyPr/>
+          <a:lstStyle/>
+          <a:p>
+            <a:fld id="{18BDFEC3-8487-43E8-A154-7C12CBC1FFF2}" type="slidenum">
+              <a:rPr lang="en-US"/>
+              <a:t>13</a:t>
+            </a:fld>
+            <a:endParaRPr lang="en-US"/>
+          </a:p>
+        </p:txBody>
+      </p:sp>
+    </p:spTree>
+  </p:cSld>
+</p:notes>
+</file>
+
+<file path=ppt/notesSlides/notesSlide11.xml><?xml version="1.0" encoding="utf-8"?>
+<p:notes xmlns:a="http://schemas.openxmlformats.org/drawingml/2006/main" xmlns:r="http://schemas.openxmlformats.org/officeDocument/2006/relationships" xmlns:p="http://schemas.openxmlformats.org/presentationml/2006/main">
+  <p:cSld>
+    <p:spTree>
+      <p:nvGrpSpPr>
+        <p:cNvPr id="1" name=""/>
+        <p:cNvGrpSpPr/>
+        <p:nvPr/>
+      </p:nvGrpSpPr>
+      <p:grpSpPr>
+        <a:xfrm>
+          <a:off x="0" y="0"/>
+          <a:ext cx="0" cy="0"/>
+          <a:chOff x="0" y="0"/>
+          <a:chExt cx="0" cy="0"/>
+        </a:xfrm>
+      </p:grpSpPr>
+      <p:sp>
+        <p:nvSpPr>
+          <p:cNvPr id="2" name="Slide Image Placeholder 1"/>
+          <p:cNvSpPr>
+            <a:spLocks noGrp="1" noRot="1" noChangeAspect="1"/>
+          </p:cNvSpPr>
+          <p:nvPr>
+            <p:ph type="sldImg"/>
+          </p:nvPr>
+        </p:nvSpPr>
+        <p:spPr/>
+      </p:sp>
+      <p:sp>
+        <p:nvSpPr>
+          <p:cNvPr id="3" name="Notes Placeholder 2"/>
+          <p:cNvSpPr>
+            <a:spLocks noGrp="1"/>
+          </p:cNvSpPr>
+          <p:nvPr>
+            <p:ph type="body" idx="1"/>
+          </p:nvPr>
+        </p:nvSpPr>
+        <p:spPr/>
+        <p:txBody>
+          <a:bodyPr/>
+          <a:lstStyle/>
+          <a:p>
+            <a:pPr lvl="0" indent="0" marL="0">
+              <a:buNone/>
+            </a:pPr>
+            <a:r>
+              <a:rPr/>
+              <a:t>Target: 1:42. Ask: “Is it ethical to put a dollar value on human life? Is it ethical </a:t>
+            </a:r>
+            <a:r>
+              <a:rPr i="1"/>
+              <a:t>not</a:t>
+            </a:r>
+            <a:r>
+              <a:rPr/>
+              <a:t> to, when making infrastructure decisions?” The value of a statistical life is still debated today.</a:t>
+            </a:r>
+          </a:p>
+        </p:txBody>
+      </p:sp>
+      <p:sp>
+        <p:nvSpPr>
+          <p:cNvPr id="4" name="Slide Number Placeholder 3"/>
+          <p:cNvSpPr>
+            <a:spLocks noGrp="1"/>
+          </p:cNvSpPr>
+          <p:nvPr>
+            <p:ph type="sldNum" sz="quarter" idx="10"/>
+          </p:nvPr>
+        </p:nvSpPr>
+        <p:spPr/>
+        <p:txBody>
+          <a:bodyPr/>
+          <a:lstStyle/>
+          <a:p>
+            <a:fld id="{18BDFEC3-8487-43E8-A154-7C12CBC1FFF2}" type="slidenum">
+              <a:rPr lang="en-US"/>
+              <a:t>14</a:t>
+            </a:fld>
+            <a:endParaRPr lang="en-US"/>
+          </a:p>
+        </p:txBody>
+      </p:sp>
+    </p:spTree>
+  </p:cSld>
+</p:notes>
+</file>
+
+<file path=ppt/notesSlides/notesSlide12.xml><?xml version="1.0" encoding="utf-8"?>
+<p:notes xmlns:a="http://schemas.openxmlformats.org/drawingml/2006/main" xmlns:r="http://schemas.openxmlformats.org/officeDocument/2006/relationships" xmlns:p="http://schemas.openxmlformats.org/presentationml/2006/main">
+  <p:cSld>
+    <p:spTree>
+      <p:nvGrpSpPr>
+        <p:cNvPr id="1" name=""/>
+        <p:cNvGrpSpPr/>
+        <p:nvPr/>
+      </p:nvGrpSpPr>
+      <p:grpSpPr>
+        <a:xfrm>
+          <a:off x="0" y="0"/>
+          <a:ext cx="0" cy="0"/>
+          <a:chOff x="0" y="0"/>
+          <a:chExt cx="0" cy="0"/>
+        </a:xfrm>
+      </p:grpSpPr>
+      <p:sp>
+        <p:nvSpPr>
+          <p:cNvPr id="2" name="Slide Image Placeholder 1"/>
+          <p:cNvSpPr>
+            <a:spLocks noGrp="1" noRot="1" noChangeAspect="1"/>
+          </p:cNvSpPr>
+          <p:nvPr>
+            <p:ph type="sldImg"/>
+          </p:nvPr>
+        </p:nvSpPr>
+        <p:spPr/>
+      </p:sp>
+      <p:sp>
+        <p:nvSpPr>
+          <p:cNvPr id="3" name="Notes Placeholder 2"/>
+          <p:cNvSpPr>
+            <a:spLocks noGrp="1"/>
+          </p:cNvSpPr>
+          <p:nvPr>
+            <p:ph type="body" idx="1"/>
+          </p:nvPr>
+        </p:nvSpPr>
+        <p:spPr/>
+        <p:txBody>
+          <a:bodyPr/>
+          <a:lstStyle/>
+          <a:p>
+            <a:pPr lvl="0" indent="0" marL="0">
+              <a:buNone/>
+            </a:pPr>
+            <a:r>
+              <a:rPr/>
+              <a:t>Target: 1:42. “We’ve just seen one concrete example of using optimization to inform design. Now let’s name the pieces so you can recognize them in any context.”</a:t>
+            </a:r>
+          </a:p>
+          <a:p>
+            <a:pPr lvl="0" indent="0" marL="0">
+              <a:buNone/>
+            </a:pPr>
+          </a:p>
+          <a:p>
+            <a:pPr lvl="0" indent="0" marL="0">
+              <a:buNone/>
+            </a:pPr>
+            <a:r>
+              <a:rPr/>
+              <a:t>Target: 1:45. Write the canonical form on the board. “This notation is universal across engineering, economics, and operations research. If you can read this, you can read any optimization paper.” Map each piece to van Dantzig. One variable, one constraint, closed-form objective — the simplest possible case.</a:t>
+            </a:r>
+          </a:p>
+        </p:txBody>
+      </p:sp>
+      <p:sp>
+        <p:nvSpPr>
+          <p:cNvPr id="4" name="Slide Number Placeholder 3"/>
+          <p:cNvSpPr>
+            <a:spLocks noGrp="1"/>
+          </p:cNvSpPr>
+          <p:nvPr>
+            <p:ph type="sldNum" sz="quarter" idx="10"/>
+          </p:nvPr>
+        </p:nvSpPr>
+        <p:spPr/>
+        <p:txBody>
+          <a:bodyPr/>
+          <a:lstStyle/>
+          <a:p>
+            <a:fld id="{18BDFEC3-8487-43E8-A154-7C12CBC1FFF2}" type="slidenum">
+              <a:rPr lang="en-US"/>
+              <a:t>15</a:t>
+            </a:fld>
+            <a:endParaRPr lang="en-US"/>
+          </a:p>
+        </p:txBody>
+      </p:sp>
+    </p:spTree>
+  </p:cSld>
+</p:notes>
+</file>
+
+<file path=ppt/notesSlides/notesSlide13.xml><?xml version="1.0" encoding="utf-8"?>
+<p:notes xmlns:a="http://schemas.openxmlformats.org/drawingml/2006/main" xmlns:r="http://schemas.openxmlformats.org/officeDocument/2006/relationships" xmlns:p="http://schemas.openxmlformats.org/presentationml/2006/main">
+  <p:cSld>
+    <p:spTree>
+      <p:nvGrpSpPr>
+        <p:cNvPr id="1" name=""/>
+        <p:cNvGrpSpPr/>
+        <p:nvPr/>
+      </p:nvGrpSpPr>
+      <p:grpSpPr>
+        <a:xfrm>
+          <a:off x="0" y="0"/>
+          <a:ext cx="0" cy="0"/>
+          <a:chOff x="0" y="0"/>
+          <a:chExt cx="0" cy="0"/>
+        </a:xfrm>
+      </p:grpSpPr>
+      <p:sp>
+        <p:nvSpPr>
+          <p:cNvPr id="2" name="Slide Image Placeholder 1"/>
+          <p:cNvSpPr>
+            <a:spLocks noGrp="1" noRot="1" noChangeAspect="1"/>
+          </p:cNvSpPr>
+          <p:nvPr>
+            <p:ph type="sldImg"/>
+          </p:nvPr>
+        </p:nvSpPr>
+        <p:spPr/>
+      </p:sp>
+      <p:sp>
+        <p:nvSpPr>
+          <p:cNvPr id="3" name="Notes Placeholder 2"/>
+          <p:cNvSpPr>
+            <a:spLocks noGrp="1"/>
+          </p:cNvSpPr>
+          <p:nvPr>
+            <p:ph type="body" idx="1"/>
+          </p:nvPr>
+        </p:nvSpPr>
+        <p:spPr/>
+        <p:txBody>
+          <a:bodyPr/>
+          <a:lstStyle/>
+          <a:p>
+            <a:pPr lvl="0" indent="0" marL="0">
+              <a:buNone/>
+            </a:pPr>
+            <a:r>
+              <a:rPr/>
+              <a:t>Target: 1:47. Just vocabulary. Students should recognize these terms when they see them in papers. The question for any study is: “how does uncertainty enter the optimization?” Different answers give very different solutions. Connect to Week 8 (robustness).</a:t>
+            </a:r>
+          </a:p>
+          <a:p>
+            <a:pPr lvl="0" indent="0" marL="0">
+              <a:buNone/>
+            </a:pPr>
+          </a:p>
+          <a:p>
+            <a:pPr lvl="0" indent="0" marL="0">
+              <a:buNone/>
+            </a:pPr>
+            <a:r>
+              <a:rPr/>
+              <a:t>Target: 1:49. One sentence per row. The organizing principle: “what structure does your problem have?” Other courses cover each technique in depth. Here we need to understand the tradeoffs between them.</a:t>
+            </a:r>
+          </a:p>
+          <a:p>
+            <a:pPr lvl="0" indent="0" marL="0">
+              <a:buNone/>
+            </a:pPr>
+          </a:p>
+          <a:p>
+            <a:pPr lvl="0" indent="0" marL="0">
+              <a:buNone/>
+            </a:pPr>
+            <a:r>
+              <a:rPr/>
+              <a:t>Target: 1:55. We’ll use “policy search” for the rest of the course. It changes how we think about and present results.</a:t>
+            </a:r>
+          </a:p>
+        </p:txBody>
+      </p:sp>
+      <p:sp>
+        <p:nvSpPr>
+          <p:cNvPr id="4" name="Slide Number Placeholder 3"/>
+          <p:cNvSpPr>
+            <a:spLocks noGrp="1"/>
+          </p:cNvSpPr>
+          <p:nvPr>
+            <p:ph type="sldNum" sz="quarter" idx="10"/>
+          </p:nvPr>
+        </p:nvSpPr>
+        <p:spPr/>
+        <p:txBody>
+          <a:bodyPr/>
+          <a:lstStyle/>
+          <a:p>
+            <a:fld id="{18BDFEC3-8487-43E8-A154-7C12CBC1FFF2}" type="slidenum">
+              <a:rPr lang="en-US"/>
+              <a:t>17</a:t>
+            </a:fld>
+            <a:endParaRPr lang="en-US"/>
+          </a:p>
+        </p:txBody>
+      </p:sp>
+    </p:spTree>
+  </p:cSld>
+</p:notes>
+</file>
+
+<file path=ppt/notesSlides/notesSlide14.xml><?xml version="1.0" encoding="utf-8"?>
+<p:notes xmlns:a="http://schemas.openxmlformats.org/drawingml/2006/main" xmlns:r="http://schemas.openxmlformats.org/officeDocument/2006/relationships" xmlns:p="http://schemas.openxmlformats.org/presentationml/2006/main">
+  <p:cSld>
+    <p:spTree>
+      <p:nvGrpSpPr>
+        <p:cNvPr id="1" name=""/>
+        <p:cNvGrpSpPr/>
+        <p:nvPr/>
+      </p:nvGrpSpPr>
+      <p:grpSpPr>
+        <a:xfrm>
+          <a:off x="0" y="0"/>
+          <a:ext cx="0" cy="0"/>
+          <a:chOff x="0" y="0"/>
+          <a:chExt cx="0" cy="0"/>
+        </a:xfrm>
+      </p:grpSpPr>
+      <p:sp>
+        <p:nvSpPr>
+          <p:cNvPr id="2" name="Slide Image Placeholder 1"/>
+          <p:cNvSpPr>
+            <a:spLocks noGrp="1" noRot="1" noChangeAspect="1"/>
+          </p:cNvSpPr>
+          <p:nvPr>
+            <p:ph type="sldImg"/>
+          </p:nvPr>
+        </p:nvSpPr>
+        <p:spPr/>
+      </p:sp>
+      <p:sp>
+        <p:nvSpPr>
+          <p:cNvPr id="3" name="Notes Placeholder 2"/>
+          <p:cNvSpPr>
+            <a:spLocks noGrp="1"/>
+          </p:cNvSpPr>
+          <p:nvPr>
+            <p:ph type="body" idx="1"/>
+          </p:nvPr>
+        </p:nvSpPr>
+        <p:spPr/>
+        <p:txBody>
+          <a:bodyPr/>
+          <a:lstStyle/>
+          <a:p>
+            <a:pPr lvl="0" indent="0" marL="0">
+              <a:buNone/>
+            </a:pPr>
+            <a:r>
+              <a:rPr/>
+              <a:t>Target: 1:58. These four questions apply to van Dantzig, to ICOW, and to any optimization result you’ll encounter.</a:t>
+            </a:r>
+          </a:p>
+        </p:txBody>
+      </p:sp>
+      <p:sp>
+        <p:nvSpPr>
+          <p:cNvPr id="4" name="Slide Number Placeholder 3"/>
+          <p:cNvSpPr>
+            <a:spLocks noGrp="1"/>
+          </p:cNvSpPr>
+          <p:nvPr>
+            <p:ph type="sldNum" sz="quarter" idx="10"/>
+          </p:nvPr>
+        </p:nvSpPr>
+        <p:spPr/>
+        <p:txBody>
+          <a:bodyPr/>
+          <a:lstStyle/>
+          <a:p>
+            <a:fld id="{18BDFEC3-8487-43E8-A154-7C12CBC1FFF2}" type="slidenum">
+              <a:rPr lang="en-US"/>
+              <a:t>18</a:t>
+            </a:fld>
+            <a:endParaRPr lang="en-US"/>
+          </a:p>
+        </p:txBody>
+      </p:sp>
+    </p:spTree>
+  </p:cSld>
+</p:notes>
+</file>
+
+<file path=ppt/notesSlides/notesSlide2.xml><?xml version="1.0" encoding="utf-8"?>
+<p:notes xmlns:a="http://schemas.openxmlformats.org/drawingml/2006/main" xmlns:r="http://schemas.openxmlformats.org/officeDocument/2006/relationships" xmlns:p="http://schemas.openxmlformats.org/presentationml/2006/main">
+  <p:cSld>
+    <p:spTree>
+      <p:nvGrpSpPr>
+        <p:cNvPr id="1" name=""/>
+        <p:cNvGrpSpPr/>
+        <p:nvPr/>
+      </p:nvGrpSpPr>
+      <p:grpSpPr>
+        <a:xfrm>
+          <a:off x="0" y="0"/>
+          <a:ext cx="0" cy="0"/>
+          <a:chOff x="0" y="0"/>
+          <a:chExt cx="0" cy="0"/>
+        </a:xfrm>
+      </p:grpSpPr>
+      <p:sp>
+        <p:nvSpPr>
+          <p:cNvPr id="2" name="Slide Image Placeholder 1"/>
+          <p:cNvSpPr>
+            <a:spLocks noGrp="1" noRot="1" noChangeAspect="1"/>
+          </p:cNvSpPr>
+          <p:nvPr>
+            <p:ph type="sldImg"/>
+          </p:nvPr>
+        </p:nvSpPr>
+        <p:spPr/>
+      </p:sp>
+      <p:sp>
+        <p:nvSpPr>
+          <p:cNvPr id="3" name="Notes Placeholder 2"/>
+          <p:cNvSpPr>
+            <a:spLocks noGrp="1"/>
+          </p:cNvSpPr>
+          <p:nvPr>
+            <p:ph type="body" idx="1"/>
+          </p:nvPr>
+        </p:nvSpPr>
+        <p:spPr/>
+        <p:txBody>
+          <a:bodyPr/>
+          <a:lstStyle/>
+          <a:p>
+            <a:pPr lvl="0" indent="0" marL="0">
+              <a:buNone/>
+            </a:pPr>
+            <a:r>
+              <a:rPr/>
+              <a:t>Target: 1:02. Ask: “What should the Commission do?”</a:t>
+            </a:r>
+          </a:p>
+          <a:p>
+            <a:pPr lvl="0" indent="0" marL="0">
+              <a:buNone/>
+            </a:pPr>
+          </a:p>
+          <a:p>
+            <a:pPr lvl="0" indent="0" marL="0">
+              <a:buNone/>
+            </a:pPr>
+            <a:r>
+              <a:rPr/>
+              <a:t>Target: 1:05. Pause here. Let the tension sit. “This is fundamentally an optimization problem. And in 1956, a mathematician named van Dantzig figured out how to solve it.”</a:t>
+            </a:r>
+          </a:p>
+          <a:p>
+            <a:pPr lvl="0" indent="0" marL="0">
+              <a:buNone/>
+            </a:pPr>
+          </a:p>
+          <a:p>
+            <a:pPr lvl="0" indent="0" marL="0">
+              <a:buNone/>
+            </a:pPr>
+            <a:r>
+              <a:rPr/>
+              <a:t>Target: 1:07. Briefly review the notation diagram. Optimization is about choosing the </a:t>
+            </a:r>
+            <a:r>
+              <a:rPr b="1"/>
+              <a:t>levers</a:t>
+            </a:r>
+            <a:r>
+              <a:rPr/>
+              <a:t> (decision variables) to achieve the best </a:t>
+            </a:r>
+            <a:r>
+              <a:rPr b="1"/>
+              <a:t>metrics</a:t>
+            </a:r>
+            <a:r>
+              <a:rPr/>
+              <a:t> (objective) given the </a:t>
+            </a:r>
+            <a:r>
+              <a:rPr b="1"/>
+              <a:t>states of the world</a:t>
+            </a:r>
+            <a:r>
+              <a:rPr/>
+              <a:t> (scenarios/uncertainties) and the </a:t>
+            </a:r>
+            <a:r>
+              <a:rPr b="1"/>
+              <a:t>relationships</a:t>
+            </a:r>
+            <a:r>
+              <a:rPr/>
+              <a:t> (constraints and system model).</a:t>
+            </a:r>
+          </a:p>
+        </p:txBody>
+      </p:sp>
+      <p:sp>
+        <p:nvSpPr>
+          <p:cNvPr id="4" name="Slide Number Placeholder 3"/>
+          <p:cNvSpPr>
+            <a:spLocks noGrp="1"/>
+          </p:cNvSpPr>
+          <p:nvPr>
+            <p:ph type="sldNum" sz="quarter" idx="10"/>
+          </p:nvPr>
+        </p:nvSpPr>
+        <p:spPr/>
+        <p:txBody>
+          <a:bodyPr/>
+          <a:lstStyle/>
+          <a:p>
+            <a:fld id="{18BDFEC3-8487-43E8-A154-7C12CBC1FFF2}" type="slidenum">
+              <a:rPr lang="en-US"/>
+              <a:t>4</a:t>
+            </a:fld>
+            <a:endParaRPr lang="en-US"/>
+          </a:p>
+        </p:txBody>
+      </p:sp>
+    </p:spTree>
+  </p:cSld>
+</p:notes>
+</file>
+
+<file path=ppt/notesSlides/notesSlide3.xml><?xml version="1.0" encoding="utf-8"?>
+<p:notes xmlns:a="http://schemas.openxmlformats.org/drawingml/2006/main" xmlns:r="http://schemas.openxmlformats.org/officeDocument/2006/relationships" xmlns:p="http://schemas.openxmlformats.org/presentationml/2006/main">
+  <p:cSld>
+    <p:spTree>
+      <p:nvGrpSpPr>
+        <p:cNvPr id="1" name=""/>
+        <p:cNvGrpSpPr/>
+        <p:nvPr/>
+      </p:nvGrpSpPr>
+      <p:grpSpPr>
+        <a:xfrm>
+          <a:off x="0" y="0"/>
+          <a:ext cx="0" cy="0"/>
+          <a:chOff x="0" y="0"/>
+          <a:chExt cx="0" cy="0"/>
+        </a:xfrm>
+      </p:grpSpPr>
+      <p:sp>
+        <p:nvSpPr>
+          <p:cNvPr id="2" name="Slide Image Placeholder 1"/>
+          <p:cNvSpPr>
+            <a:spLocks noGrp="1" noRot="1" noChangeAspect="1"/>
+          </p:cNvSpPr>
+          <p:nvPr>
+            <p:ph type="sldImg"/>
+          </p:nvPr>
+        </p:nvSpPr>
+        <p:spPr/>
+      </p:sp>
+      <p:sp>
+        <p:nvSpPr>
+          <p:cNvPr id="3" name="Notes Placeholder 2"/>
+          <p:cNvSpPr>
+            <a:spLocks noGrp="1"/>
+          </p:cNvSpPr>
+          <p:nvPr>
+            <p:ph type="body" idx="1"/>
+          </p:nvPr>
+        </p:nvSpPr>
+        <p:spPr/>
+        <p:txBody>
+          <a:bodyPr/>
+          <a:lstStyle/>
+          <a:p>
+            <a:pPr lvl="0" indent="0" marL="0">
+              <a:buNone/>
+            </a:pPr>
+            <a:r>
+              <a:rPr/>
+              <a:t>Target: 1:10. Write these four on the board. We’ll keep coming back to them.</a:t>
+            </a:r>
+          </a:p>
+        </p:txBody>
+      </p:sp>
+      <p:sp>
+        <p:nvSpPr>
+          <p:cNvPr id="4" name="Slide Number Placeholder 3"/>
+          <p:cNvSpPr>
+            <a:spLocks noGrp="1"/>
+          </p:cNvSpPr>
+          <p:nvPr>
+            <p:ph type="sldNum" sz="quarter" idx="10"/>
+          </p:nvPr>
+        </p:nvSpPr>
+        <p:spPr/>
+        <p:txBody>
+          <a:bodyPr/>
+          <a:lstStyle/>
+          <a:p>
+            <a:fld id="{18BDFEC3-8487-43E8-A154-7C12CBC1FFF2}" type="slidenum">
+              <a:rPr lang="en-US"/>
+              <a:t>5</a:t>
+            </a:fld>
+            <a:endParaRPr lang="en-US"/>
+          </a:p>
+        </p:txBody>
+      </p:sp>
+    </p:spTree>
+  </p:cSld>
+</p:notes>
+</file>
+
+<file path=ppt/notesSlides/notesSlide4.xml><?xml version="1.0" encoding="utf-8"?>
+<p:notes xmlns:a="http://schemas.openxmlformats.org/drawingml/2006/main" xmlns:r="http://schemas.openxmlformats.org/officeDocument/2006/relationships" xmlns:p="http://schemas.openxmlformats.org/presentationml/2006/main">
+  <p:cSld>
+    <p:spTree>
+      <p:nvGrpSpPr>
+        <p:cNvPr id="1" name=""/>
+        <p:cNvGrpSpPr/>
+        <p:nvPr/>
+      </p:nvGrpSpPr>
+      <p:grpSpPr>
+        <a:xfrm>
+          <a:off x="0" y="0"/>
+          <a:ext cx="0" cy="0"/>
+          <a:chOff x="0" y="0"/>
+          <a:chExt cx="0" cy="0"/>
+        </a:xfrm>
+      </p:grpSpPr>
+      <p:sp>
+        <p:nvSpPr>
+          <p:cNvPr id="2" name="Slide Image Placeholder 1"/>
+          <p:cNvSpPr>
+            <a:spLocks noGrp="1" noRot="1" noChangeAspect="1"/>
+          </p:cNvSpPr>
+          <p:nvPr>
+            <p:ph type="sldImg"/>
+          </p:nvPr>
+        </p:nvSpPr>
+        <p:spPr/>
+      </p:sp>
+      <p:sp>
+        <p:nvSpPr>
+          <p:cNvPr id="3" name="Notes Placeholder 2"/>
+          <p:cNvSpPr>
+            <a:spLocks noGrp="1"/>
+          </p:cNvSpPr>
+          <p:nvPr>
+            <p:ph type="body" idx="1"/>
+          </p:nvPr>
+        </p:nvSpPr>
+        <p:spPr/>
+        <p:txBody>
+          <a:bodyPr/>
+          <a:lstStyle/>
+          <a:p>
+            <a:pPr lvl="0" indent="0" marL="0">
+              <a:buNone/>
+            </a:pPr>
+            <a:r>
+              <a:rPr/>
+              <a:t>Target: 1:10. Transition to the formal model. Emphasize that every assumption was shaped by computational constraints.</a:t>
+            </a:r>
+          </a:p>
+        </p:txBody>
+      </p:sp>
+      <p:sp>
+        <p:nvSpPr>
+          <p:cNvPr id="4" name="Slide Number Placeholder 3"/>
+          <p:cNvSpPr>
+            <a:spLocks noGrp="1"/>
+          </p:cNvSpPr>
+          <p:nvPr>
+            <p:ph type="sldNum" sz="quarter" idx="10"/>
+          </p:nvPr>
+        </p:nvSpPr>
+        <p:spPr/>
+        <p:txBody>
+          <a:bodyPr/>
+          <a:lstStyle/>
+          <a:p>
+            <a:fld id="{18BDFEC3-8487-43E8-A154-7C12CBC1FFF2}" type="slidenum">
+              <a:rPr lang="en-US"/>
+              <a:t>6</a:t>
+            </a:fld>
+            <a:endParaRPr lang="en-US"/>
+          </a:p>
+        </p:txBody>
+      </p:sp>
+    </p:spTree>
+  </p:cSld>
+</p:notes>
+</file>
+
+<file path=ppt/notesSlides/notesSlide5.xml><?xml version="1.0" encoding="utf-8"?>
+<p:notes xmlns:a="http://schemas.openxmlformats.org/drawingml/2006/main" xmlns:r="http://schemas.openxmlformats.org/officeDocument/2006/relationships" xmlns:p="http://schemas.openxmlformats.org/presentationml/2006/main">
+  <p:cSld>
+    <p:spTree>
+      <p:nvGrpSpPr>
+        <p:cNvPr id="1" name=""/>
+        <p:cNvGrpSpPr/>
+        <p:nvPr/>
+      </p:nvGrpSpPr>
+      <p:grpSpPr>
+        <a:xfrm>
+          <a:off x="0" y="0"/>
+          <a:ext cx="0" cy="0"/>
+          <a:chOff x="0" y="0"/>
+          <a:chExt cx="0" cy="0"/>
+        </a:xfrm>
+      </p:grpSpPr>
+      <p:sp>
+        <p:nvSpPr>
+          <p:cNvPr id="2" name="Slide Image Placeholder 1"/>
+          <p:cNvSpPr>
+            <a:spLocks noGrp="1" noRot="1" noChangeAspect="1"/>
+          </p:cNvSpPr>
+          <p:nvPr>
+            <p:ph type="sldImg"/>
+          </p:nvPr>
+        </p:nvSpPr>
+        <p:spPr/>
+      </p:sp>
+      <p:sp>
+        <p:nvSpPr>
+          <p:cNvPr id="3" name="Notes Placeholder 2"/>
+          <p:cNvSpPr>
+            <a:spLocks noGrp="1"/>
+          </p:cNvSpPr>
+          <p:nvPr>
+            <p:ph type="body" idx="1"/>
+          </p:nvPr>
+        </p:nvSpPr>
+        <p:spPr/>
+        <p:txBody>
+          <a:bodyPr/>
+          <a:lstStyle/>
+          <a:p>
+            <a:pPr lvl="0" indent="0" marL="0">
+              <a:buNone/>
+            </a:pPr>
+            <a:r>
+              <a:rPr/>
+              <a:t>Target: 1:12. The exponential distribution wasn’t chosen because floods are truly exponential — it was chosen because it yields a tractable integral.</a:t>
+            </a:r>
+          </a:p>
+        </p:txBody>
+      </p:sp>
+      <p:sp>
+        <p:nvSpPr>
+          <p:cNvPr id="4" name="Slide Number Placeholder 3"/>
+          <p:cNvSpPr>
+            <a:spLocks noGrp="1"/>
+          </p:cNvSpPr>
+          <p:nvPr>
+            <p:ph type="sldNum" sz="quarter" idx="10"/>
+          </p:nvPr>
+        </p:nvSpPr>
+        <p:spPr/>
+        <p:txBody>
+          <a:bodyPr/>
+          <a:lstStyle/>
+          <a:p>
+            <a:fld id="{18BDFEC3-8487-43E8-A154-7C12CBC1FFF2}" type="slidenum">
+              <a:rPr lang="en-US"/>
+              <a:t>7</a:t>
+            </a:fld>
+            <a:endParaRPr lang="en-US"/>
+          </a:p>
+        </p:txBody>
+      </p:sp>
+    </p:spTree>
+  </p:cSld>
+</p:notes>
+</file>
+
+<file path=ppt/notesSlides/notesSlide6.xml><?xml version="1.0" encoding="utf-8"?>
+<p:notes xmlns:a="http://schemas.openxmlformats.org/drawingml/2006/main" xmlns:r="http://schemas.openxmlformats.org/officeDocument/2006/relationships" xmlns:p="http://schemas.openxmlformats.org/presentationml/2006/main">
+  <p:cSld>
+    <p:spTree>
+      <p:nvGrpSpPr>
+        <p:cNvPr id="1" name=""/>
+        <p:cNvGrpSpPr/>
+        <p:nvPr/>
+      </p:nvGrpSpPr>
+      <p:grpSpPr>
+        <a:xfrm>
+          <a:off x="0" y="0"/>
+          <a:ext cx="0" cy="0"/>
+          <a:chOff x="0" y="0"/>
+          <a:chExt cx="0" cy="0"/>
+        </a:xfrm>
+      </p:grpSpPr>
+      <p:sp>
+        <p:nvSpPr>
+          <p:cNvPr id="2" name="Slide Image Placeholder 1"/>
+          <p:cNvSpPr>
+            <a:spLocks noGrp="1" noRot="1" noChangeAspect="1"/>
+          </p:cNvSpPr>
+          <p:nvPr>
+            <p:ph type="sldImg"/>
+          </p:nvPr>
+        </p:nvSpPr>
+        <p:spPr/>
+      </p:sp>
+      <p:sp>
+        <p:nvSpPr>
+          <p:cNvPr id="3" name="Notes Placeholder 2"/>
+          <p:cNvSpPr>
+            <a:spLocks noGrp="1"/>
+          </p:cNvSpPr>
+          <p:nvPr>
+            <p:ph type="body" idx="1"/>
+          </p:nvPr>
+        </p:nvSpPr>
+        <p:spPr/>
+        <p:txBody>
+          <a:bodyPr/>
+          <a:lstStyle/>
+          <a:p>
+            <a:pPr lvl="0" indent="0" marL="0">
+              <a:buNone/>
+            </a:pPr>
+            <a:r>
+              <a:rPr/>
+              <a:t>Target: 1:15. The 1953 event (marked on the figure) falls off the fitted line — it was more extreme than the model predicted. Ask: “What does that tell us about the exponential assumption?”</a:t>
+            </a:r>
+          </a:p>
+        </p:txBody>
+      </p:sp>
+      <p:sp>
+        <p:nvSpPr>
+          <p:cNvPr id="4" name="Slide Number Placeholder 3"/>
+          <p:cNvSpPr>
+            <a:spLocks noGrp="1"/>
+          </p:cNvSpPr>
+          <p:nvPr>
+            <p:ph type="sldNum" sz="quarter" idx="10"/>
+          </p:nvPr>
+        </p:nvSpPr>
+        <p:spPr/>
+        <p:txBody>
+          <a:bodyPr/>
+          <a:lstStyle/>
+          <a:p>
+            <a:fld id="{18BDFEC3-8487-43E8-A154-7C12CBC1FFF2}" type="slidenum">
+              <a:rPr lang="en-US"/>
+              <a:t>9</a:t>
+            </a:fld>
+            <a:endParaRPr lang="en-US"/>
+          </a:p>
+        </p:txBody>
+      </p:sp>
+    </p:spTree>
+  </p:cSld>
+</p:notes>
+</file>
+
+<file path=ppt/notesSlides/notesSlide7.xml><?xml version="1.0" encoding="utf-8"?>
+<p:notes xmlns:a="http://schemas.openxmlformats.org/drawingml/2006/main" xmlns:r="http://schemas.openxmlformats.org/officeDocument/2006/relationships" xmlns:p="http://schemas.openxmlformats.org/presentationml/2006/main">
+  <p:cSld>
+    <p:spTree>
+      <p:nvGrpSpPr>
+        <p:cNvPr id="1" name=""/>
+        <p:cNvGrpSpPr/>
+        <p:nvPr/>
+      </p:nvGrpSpPr>
+      <p:grpSpPr>
+        <a:xfrm>
+          <a:off x="0" y="0"/>
+          <a:ext cx="0" cy="0"/>
+          <a:chOff x="0" y="0"/>
+          <a:chExt cx="0" cy="0"/>
+        </a:xfrm>
+      </p:grpSpPr>
+      <p:sp>
+        <p:nvSpPr>
+          <p:cNvPr id="2" name="Slide Image Placeholder 1"/>
+          <p:cNvSpPr>
+            <a:spLocks noGrp="1" noRot="1" noChangeAspect="1"/>
+          </p:cNvSpPr>
+          <p:nvPr>
+            <p:ph type="sldImg"/>
+          </p:nvPr>
+        </p:nvSpPr>
+        <p:spPr/>
+      </p:sp>
+      <p:sp>
+        <p:nvSpPr>
+          <p:cNvPr id="3" name="Notes Placeholder 2"/>
+          <p:cNvSpPr>
+            <a:spLocks noGrp="1"/>
+          </p:cNvSpPr>
+          <p:nvPr>
+            <p:ph type="body" idx="1"/>
+          </p:nvPr>
+        </p:nvSpPr>
+        <p:spPr/>
+        <p:txBody>
+          <a:bodyPr/>
+          <a:lstStyle/>
+          <a:p>
+            <a:pPr lvl="0" indent="0" marL="0">
+              <a:buNone/>
+            </a:pPr>
+            <a:r>
+              <a:rPr/>
+              <a:t>Target: 1:17. Students who did Lab 2 (hazard-damage convolution) know that damage is graduated. Ask: “What would change if we used a more realistic damage model?”</a:t>
+            </a:r>
+          </a:p>
+          <a:p>
+            <a:pPr lvl="0" indent="0" marL="0">
+              <a:buNone/>
+            </a:pPr>
+          </a:p>
+          <a:p>
+            <a:pPr lvl="0" indent="0" marL="0">
+              <a:buNone/>
+            </a:pPr>
+            <a:r>
+              <a:rPr/>
+              <a:t>Target: 1:20. The 100/δ comes from summing the infinite geometric series of discounted annual losses. This is the same present value calculation from last week.</a:t>
+            </a:r>
+          </a:p>
+          <a:p>
+            <a:pPr lvl="0" indent="0" marL="0">
+              <a:buNone/>
+            </a:pPr>
+          </a:p>
+          <a:p>
+            <a:pPr lvl="0" indent="0" marL="0">
+              <a:buNone/>
+            </a:pPr>
+            <a:r>
+              <a:rPr/>
+              <a:t>Target: 1:23. Walk through the figure. Ask: “What happens if V doubles? Which curve shifts?”</a:t>
+            </a:r>
+          </a:p>
+        </p:txBody>
+      </p:sp>
+      <p:sp>
+        <p:nvSpPr>
+          <p:cNvPr id="4" name="Slide Number Placeholder 3"/>
+          <p:cNvSpPr>
+            <a:spLocks noGrp="1"/>
+          </p:cNvSpPr>
+          <p:nvPr>
+            <p:ph type="sldNum" sz="quarter" idx="10"/>
+          </p:nvPr>
+        </p:nvSpPr>
+        <p:spPr/>
+        <p:txBody>
+          <a:bodyPr/>
+          <a:lstStyle/>
+          <a:p>
+            <a:fld id="{18BDFEC3-8487-43E8-A154-7C12CBC1FFF2}" type="slidenum">
+              <a:rPr lang="en-US"/>
+              <a:t>10</a:t>
+            </a:fld>
+            <a:endParaRPr lang="en-US"/>
+          </a:p>
+        </p:txBody>
+      </p:sp>
+    </p:spTree>
+  </p:cSld>
+</p:notes>
+</file>
+
+<file path=ppt/notesSlides/notesSlide8.xml><?xml version="1.0" encoding="utf-8"?>
+<p:notes xmlns:a="http://schemas.openxmlformats.org/drawingml/2006/main" xmlns:r="http://schemas.openxmlformats.org/officeDocument/2006/relationships" xmlns:p="http://schemas.openxmlformats.org/presentationml/2006/main">
+  <p:cSld>
+    <p:spTree>
+      <p:nvGrpSpPr>
+        <p:cNvPr id="1" name=""/>
+        <p:cNvGrpSpPr/>
+        <p:nvPr/>
+      </p:nvGrpSpPr>
+      <p:grpSpPr>
+        <a:xfrm>
+          <a:off x="0" y="0"/>
+          <a:ext cx="0" cy="0"/>
+          <a:chOff x="0" y="0"/>
+          <a:chExt cx="0" cy="0"/>
+        </a:xfrm>
+      </p:grpSpPr>
+      <p:sp>
+        <p:nvSpPr>
+          <p:cNvPr id="2" name="Slide Image Placeholder 1"/>
+          <p:cNvSpPr>
+            <a:spLocks noGrp="1" noRot="1" noChangeAspect="1"/>
+          </p:cNvSpPr>
+          <p:nvPr>
+            <p:ph type="sldImg"/>
+          </p:nvPr>
+        </p:nvSpPr>
+        <p:spPr/>
+      </p:sp>
+      <p:sp>
+        <p:nvSpPr>
+          <p:cNvPr id="3" name="Notes Placeholder 2"/>
+          <p:cNvSpPr>
+            <a:spLocks noGrp="1"/>
+          </p:cNvSpPr>
+          <p:nvPr>
+            <p:ph type="body" idx="1"/>
+          </p:nvPr>
+        </p:nvSpPr>
+        <p:spPr/>
+        <p:txBody>
+          <a:bodyPr/>
+          <a:lstStyle/>
+          <a:p>
+            <a:pPr lvl="0" indent="0" marL="0">
+              <a:buNone/>
+            </a:pPr>
+            <a:r>
+              <a:rPr/>
+              <a:t>Target: 1:26. Don’t derive — show the result and focus on interpretation. Ask: “Which of these parameters do we know well? Which are uncertain?”</a:t>
+            </a:r>
+          </a:p>
+        </p:txBody>
+      </p:sp>
+      <p:sp>
+        <p:nvSpPr>
+          <p:cNvPr id="4" name="Slide Number Placeholder 3"/>
+          <p:cNvSpPr>
+            <a:spLocks noGrp="1"/>
+          </p:cNvSpPr>
+          <p:nvPr>
+            <p:ph type="sldNum" sz="quarter" idx="10"/>
+          </p:nvPr>
+        </p:nvSpPr>
+        <p:spPr/>
+        <p:txBody>
+          <a:bodyPr/>
+          <a:lstStyle/>
+          <a:p>
+            <a:fld id="{18BDFEC3-8487-43E8-A154-7C12CBC1FFF2}" type="slidenum">
+              <a:rPr lang="en-US"/>
+              <a:t>11</a:t>
+            </a:fld>
+            <a:endParaRPr lang="en-US"/>
+          </a:p>
+        </p:txBody>
+      </p:sp>
+    </p:spTree>
+  </p:cSld>
+</p:notes>
+</file>
+
+<file path=ppt/notesSlides/notesSlide9.xml><?xml version="1.0" encoding="utf-8"?>
+<p:notes xmlns:a="http://schemas.openxmlformats.org/drawingml/2006/main" xmlns:r="http://schemas.openxmlformats.org/officeDocument/2006/relationships" xmlns:p="http://schemas.openxmlformats.org/presentationml/2006/main">
+  <p:cSld>
+    <p:spTree>
+      <p:nvGrpSpPr>
+        <p:cNvPr id="1" name=""/>
+        <p:cNvGrpSpPr/>
+        <p:nvPr/>
+      </p:nvGrpSpPr>
+      <p:grpSpPr>
+        <a:xfrm>
+          <a:off x="0" y="0"/>
+          <a:ext cx="0" cy="0"/>
+          <a:chOff x="0" y="0"/>
+          <a:chExt cx="0" cy="0"/>
+        </a:xfrm>
+      </p:grpSpPr>
+      <p:sp>
+        <p:nvSpPr>
+          <p:cNvPr id="2" name="Slide Image Placeholder 1"/>
+          <p:cNvSpPr>
+            <a:spLocks noGrp="1" noRot="1" noChangeAspect="1"/>
+          </p:cNvSpPr>
+          <p:nvPr>
+            <p:ph type="sldImg"/>
+          </p:nvPr>
+        </p:nvSpPr>
+        <p:spPr/>
+      </p:sp>
+      <p:sp>
+        <p:nvSpPr>
+          <p:cNvPr id="3" name="Notes Placeholder 2"/>
+          <p:cNvSpPr>
+            <a:spLocks noGrp="1"/>
+          </p:cNvSpPr>
+          <p:nvPr>
+            <p:ph type="body" idx="1"/>
+          </p:nvPr>
+        </p:nvSpPr>
+        <p:spPr/>
+        <p:txBody>
+          <a:bodyPr/>
+          <a:lstStyle/>
+          <a:p>
+            <a:pPr lvl="0" indent="0" marL="0">
+              <a:buNone/>
+            </a:pPr>
+            <a:r>
+              <a:rPr/>
+              <a:t>Target: 1:26. van Dantzig spends half the paper relaxing these assumptions.</a:t>
+            </a:r>
+          </a:p>
+          <a:p>
+            <a:pPr lvl="0" indent="0" marL="0">
+              <a:buNone/>
+            </a:pPr>
+          </a:p>
+          <a:p>
+            <a:pPr lvl="0" indent="0" marL="0">
+              <a:buNone/>
+            </a:pPr>
+            <a:r>
+              <a:rPr/>
+              <a:t>Target: 1:29.</a:t>
+            </a:r>
+          </a:p>
+          <a:p>
+            <a:pPr lvl="0" indent="0" marL="0">
+              <a:buNone/>
+            </a:pPr>
+          </a:p>
+          <a:p>
+            <a:pPr lvl="0" indent="0" marL="0">
+              <a:buNone/>
+            </a:pPr>
+            <a:r>
+              <a:rPr/>
+              <a:t>Target: 1:32. If wealth growth equals the discount rate, the present value of future losses diverges. Connect to discounting debates from Week 5.</a:t>
+            </a:r>
+          </a:p>
+          <a:p>
+            <a:pPr lvl="0" indent="0" marL="0">
+              <a:buNone/>
+            </a:pPr>
+          </a:p>
+          <a:p>
+            <a:pPr lvl="0" indent="0" marL="0">
+              <a:buNone/>
+            </a:pPr>
+            <a:r>
+              <a:rPr/>
+              <a:t>Target: 1:35. A 1956 paper grappling with the same uncertainty challenges we discuss today. Flag the connection to Week 8 (robustness and deep uncertainty).</a:t>
+            </a:r>
+          </a:p>
+          <a:p>
+            <a:pPr lvl="0" indent="0" marL="0">
+              <a:buNone/>
+            </a:pPr>
+          </a:p>
+          <a:p>
+            <a:pPr lvl="0" indent="0" marL="0">
+              <a:buNone/>
+            </a:pPr>
+            <a:r>
+              <a:rPr/>
+              <a:t>Target: 1:37. He’s doing robust optimization before the term existed.</a:t>
+            </a:r>
+          </a:p>
+        </p:txBody>
+      </p:sp>
+      <p:sp>
+        <p:nvSpPr>
+          <p:cNvPr id="4" name="Slide Number Placeholder 3"/>
+          <p:cNvSpPr>
+            <a:spLocks noGrp="1"/>
+          </p:cNvSpPr>
+          <p:nvPr>
+            <p:ph type="sldNum" sz="quarter" idx="10"/>
+          </p:nvPr>
+        </p:nvSpPr>
+        <p:spPr/>
+        <p:txBody>
+          <a:bodyPr/>
+          <a:lstStyle/>
+          <a:p>
+            <a:fld id="{18BDFEC3-8487-43E8-A154-7C12CBC1FFF2}" type="slidenum">
+              <a:rPr lang="en-US"/>
+              <a:t>12</a:t>
+            </a:fld>
+            <a:endParaRPr lang="en-US"/>
+          </a:p>
+        </p:txBody>
+      </p:sp>
+    </p:spTree>
+  </p:cSld>
+</p:notes>
 </file>
 
 <file path=ppt/slideLayouts/slideLayout1.xml><?xml version="1.0" encoding="utf-8"?>
@@ -3180,7 +4887,2560 @@
             </a:pPr>
             <a:r>
               <a:rPr/>
-              <a:t>2026-02-18</a:t>
+              <a:t>2026-02-16</a:t>
+            </a:r>
+          </a:p>
+        </p:txBody>
+      </p:sp>
+    </p:spTree>
+  </p:cSld>
+</p:sld>
+</file>
+
+<file path=ppt/slides/slide10.xml><?xml version="1.0" encoding="utf-8"?>
+<p:sld xmlns:a="http://schemas.openxmlformats.org/drawingml/2006/main" xmlns:r="http://schemas.openxmlformats.org/officeDocument/2006/relationships" xmlns:p="http://schemas.openxmlformats.org/presentationml/2006/main">
+  <p:cSld>
+    <p:spTree>
+      <p:nvGrpSpPr>
+        <p:cNvPr id="1" name=""/>
+        <p:cNvGrpSpPr/>
+        <p:nvPr/>
+      </p:nvGrpSpPr>
+      <p:grpSpPr>
+        <a:xfrm>
+          <a:off x="0" y="0"/>
+          <a:ext cx="0" cy="0"/>
+          <a:chOff x="0" y="0"/>
+          <a:chExt cx="0" cy="0"/>
+        </a:xfrm>
+      </p:grpSpPr>
+      <mc:AlternateContent xmlns:mc="http://schemas.openxmlformats.org/markup-compatibility/2006">
+        <mc:Choice xmlns:a14="http://schemas.microsoft.com/office/drawing/2010/main" Requires="a14">
+          <p:sp>
+            <p:nvSpPr>
+              <p:cNvPr id="4" name="Text Placeholder 3"/>
+              <p:cNvSpPr>
+                <a:spLocks noGrp="1"/>
+              </p:cNvSpPr>
+              <p:nvPr>
+                <p:ph idx="2" sz="half" type="body"/>
+              </p:nvPr>
+            </p:nvSpPr>
+            <p:spPr/>
+            <p:txBody>
+              <a:bodyPr/>
+              <a:lstStyle/>
+              <a:p>
+                <a:pPr lvl="0" indent="0" marL="0">
+                  <a:spcBef>
+                    <a:spcPts val="3000"/>
+                  </a:spcBef>
+                  <a:buNone/>
+                </a:pPr>
+                <a:r>
+                  <a:rPr b="1"/>
+                  <a:t>The Loss Model</a:t>
+                </a:r>
+              </a:p>
+              <a:p>
+                <a:pPr lvl="0" indent="0" marL="0">
+                  <a:buNone/>
+                </a:pPr>
+                <a:r>
+                  <a:rPr/>
+                  <a:t>van Dantzig assumes </a:t>
+                </a:r>
+                <a:r>
+                  <a:rPr b="1"/>
+                  <a:t>binary damage</a:t>
+                </a:r>
+                <a:r>
+                  <a:rPr/>
+                  <a:t>: if water exceeds dike height </a:t>
+                </a:r>
+                <a14:m>
+                  <m:oMath xmlns:m="http://schemas.openxmlformats.org/officeDocument/2006/math">
+                    <m:r>
+                      <m:t>H</m:t>
+                    </m:r>
+                  </m:oMath>
+                </a14:m>
+                <a:r>
+                  <a:rPr/>
+                  <a:t>, everything in the polder is lost.</a:t>
+                </a:r>
+              </a:p>
+              <a:p>
+                <a:pPr lvl="0" indent="0" marL="0">
+                  <a:buNone/>
+                </a:pPr>
+                <a14:m>
+                  <m:oMathPara xmlns:m="http://schemas.openxmlformats.org/officeDocument/2006/math">
+                    <m:oMathParaPr>
+                      <m:jc m:val="center"/>
+                    </m:oMathParaPr>
+                    <m:oMath>
+                      <m:r>
+                        <m:t>S</m:t>
+                      </m:r>
+                      <m:r>
+                        <m:rPr>
+                          <m:sty m:val="p"/>
+                        </m:rPr>
+                        <m:t>=</m:t>
+                      </m:r>
+                      <m:d>
+                        <m:dPr>
+                          <m:begChr m:val="{"/>
+                          <m:sepChr m:val=""/>
+                          <m:endChr m:val=""/>
+                          <m:grow/>
+                        </m:dPr>
+                        <m:e>
+                          <m:m>
+                            <m:mPr>
+                              <m:baseJc m:val="center"/>
+                              <m:plcHide m:val="on"/>
+                              <m:mcs>
+                                <m:mc>
+                                  <m:mcPr>
+                                    <m:mcJc m:val="left"/>
+                                    <m:count m:val="1"/>
+                                  </m:mcPr>
+                                </m:mc>
+                                <m:mc>
+                                  <m:mcPr>
+                                    <m:mcJc m:val="left"/>
+                                    <m:count m:val="1"/>
+                                  </m:mcPr>
+                                </m:mc>
+                              </m:mcs>
+                            </m:mPr>
+                            <m:mr>
+                              <m:e>
+                                <m:r>
+                                  <m:t>0</m:t>
+                                </m:r>
+                              </m:e>
+                              <m:e>
+                                <m:r>
+                                  <m:rPr>
+                                    <m:nor/>
+                                    <m:sty m:val="p"/>
+                                  </m:rPr>
+                                  <m:t>if </m:t>
+                                </m:r>
+                                <m:r>
+                                  <m:t>h</m:t>
+                                </m:r>
+                                <m:r>
+                                  <m:rPr>
+                                    <m:sty m:val="p"/>
+                                  </m:rPr>
+                                  <m:t>≤</m:t>
+                                </m:r>
+                                <m:r>
+                                  <m:t>H</m:t>
+                                </m:r>
+                              </m:e>
+                            </m:mr>
+                            <m:mr>
+                              <m:e>
+                                <m:r>
+                                  <m:t>V</m:t>
+                                </m:r>
+                              </m:e>
+                              <m:e>
+                                <m:r>
+                                  <m:rPr>
+                                    <m:nor/>
+                                    <m:sty m:val="p"/>
+                                  </m:rPr>
+                                  <m:t>if </m:t>
+                                </m:r>
+                                <m:r>
+                                  <m:t>h</m:t>
+                                </m:r>
+                                <m:r>
+                                  <m:rPr>
+                                    <m:sty m:val="p"/>
+                                  </m:rPr>
+                                  <m:t>&gt;</m:t>
+                                </m:r>
+                                <m:r>
+                                  <m:t>H</m:t>
+                                </m:r>
+                              </m:e>
+                            </m:mr>
+                          </m:m>
+                        </m:e>
+                      </m:d>
+                    </m:oMath>
+                  </m:oMathPara>
+                </a14:m>
+              </a:p>
+              <a:p>
+                <a:pPr lvl="0" indent="0" marL="0">
+                  <a:buNone/>
+                </a:pPr>
+                <a:r>
+                  <a:rPr/>
+                  <a:t>where </a:t>
+                </a:r>
+                <a14:m>
+                  <m:oMath xmlns:m="http://schemas.openxmlformats.org/officeDocument/2006/math">
+                    <m:r>
+                      <m:t>V</m:t>
+                    </m:r>
+                  </m:oMath>
+                </a14:m>
+                <a:r>
+                  <a:rPr/>
+                  <a:t> is the total value of all goods, buildings, farms, cattle, and industry in the polder.</a:t>
+                </a:r>
+              </a:p>
+              <a:p>
+                <a:pPr lvl="0" indent="0" marL="0">
+                  <a:spcBef>
+                    <a:spcPts val="3000"/>
+                  </a:spcBef>
+                  <a:buNone/>
+                </a:pPr>
+                <a:r>
+                  <a:rPr b="1"/>
+                  <a:t>Building the Cost Function</a:t>
+                </a:r>
+              </a:p>
+              <a:p>
+                <a:pPr lvl="0" indent="0" marL="0">
+                  <a:buNone/>
+                </a:pPr>
+                <a:r>
+                  <a:rPr b="1"/>
+                  <a:t>Construction cost</a:t>
+                </a:r>
+                <a:r>
+                  <a:rPr/>
+                  <a:t> (linear approximation):</a:t>
+                </a:r>
+              </a:p>
+              <a:p>
+                <a:pPr lvl="0" indent="0" marL="0">
+                  <a:buNone/>
+                </a:pPr>
+                <a14:m>
+                  <m:oMathPara xmlns:m="http://schemas.openxmlformats.org/officeDocument/2006/math">
+                    <m:oMathParaPr>
+                      <m:jc m:val="center"/>
+                    </m:oMathParaPr>
+                    <m:oMath>
+                      <m:r>
+                        <m:t>I</m:t>
+                      </m:r>
+                      <m:d>
+                        <m:dPr>
+                          <m:begChr m:val="("/>
+                          <m:sepChr m:val=""/>
+                          <m:endChr m:val=")"/>
+                          <m:grow/>
+                        </m:dPr>
+                        <m:e>
+                          <m:r>
+                            <m:t>X</m:t>
+                          </m:r>
+                        </m:e>
+                      </m:d>
+                      <m:r>
+                        <m:rPr>
+                          <m:sty m:val="p"/>
+                        </m:rPr>
+                        <m:t>=</m:t>
+                      </m:r>
+                      <m:sSub>
+                        <m:e>
+                          <m:r>
+                            <m:t>I</m:t>
+                          </m:r>
+                        </m:e>
+                        <m:sub>
+                          <m:r>
+                            <m:t>0</m:t>
+                          </m:r>
+                        </m:sub>
+                      </m:sSub>
+                      <m:r>
+                        <m:rPr>
+                          <m:sty m:val="p"/>
+                        </m:rPr>
+                        <m:t>+</m:t>
+                      </m:r>
+                      <m:r>
+                        <m:t>k</m:t>
+                      </m:r>
+                      <m:r>
+                        <m:t>X</m:t>
+                      </m:r>
+                    </m:oMath>
+                  </m:oMathPara>
+                </a14:m>
+              </a:p>
+              <a:p>
+                <a:pPr lvl="0" indent="0" marL="0">
+                  <a:buNone/>
+                </a:pPr>
+                <a:r>
+                  <a:rPr b="1"/>
+                  <a:t>Expected annual flood loss</a:t>
+                </a:r>
+                <a:r>
+                  <a:rPr/>
+                  <a:t> (probability </a:t>
+                </a:r>
+                <a14:m>
+                  <m:oMath xmlns:m="http://schemas.openxmlformats.org/officeDocument/2006/math">
+                    <m:r>
+                      <m:rPr>
+                        <m:sty m:val="p"/>
+                      </m:rPr>
+                      <m:t>×</m:t>
+                    </m:r>
+                  </m:oMath>
+                </a14:m>
+                <a:r>
+                  <a:rPr/>
+                  <a:t> total value at risk):</a:t>
+                </a:r>
+              </a:p>
+              <a:p>
+                <a:pPr lvl="0" indent="0" marL="0">
+                  <a:buNone/>
+                </a:pPr>
+                <a14:m>
+                  <m:oMathPara xmlns:m="http://schemas.openxmlformats.org/officeDocument/2006/math">
+                    <m:oMathParaPr>
+                      <m:jc m:val="center"/>
+                    </m:oMathParaPr>
+                    <m:oMath>
+                      <m:sSub>
+                        <m:e>
+                          <m:r>
+                            <m:t>p</m:t>
+                          </m:r>
+                        </m:e>
+                        <m:sub>
+                          <m:r>
+                            <m:t>0</m:t>
+                          </m:r>
+                        </m:sub>
+                      </m:sSub>
+                      <m:r>
+                        <m:rPr>
+                          <m:sty m:val="p"/>
+                        </m:rPr>
+                        <m:t>⋅</m:t>
+                      </m:r>
+                      <m:r>
+                        <m:t>V</m:t>
+                      </m:r>
+                      <m:r>
+                        <m:rPr>
+                          <m:sty m:val="p"/>
+                        </m:rPr>
+                        <m:t>⋅</m:t>
+                      </m:r>
+                      <m:sSup>
+                        <m:e>
+                          <m:r>
+                            <m:t>e</m:t>
+                          </m:r>
+                        </m:e>
+                        <m:sup>
+                          <m:r>
+                            <m:rPr>
+                              <m:sty m:val="p"/>
+                            </m:rPr>
+                            <m:t>−</m:t>
+                          </m:r>
+                          <m:r>
+                            <m:t>α</m:t>
+                          </m:r>
+                          <m:r>
+                            <m:t>X</m:t>
+                          </m:r>
+                        </m:sup>
+                      </m:sSup>
+                    </m:oMath>
+                  </m:oMathPara>
+                </a14:m>
+              </a:p>
+              <a:p>
+                <a:pPr lvl="0" indent="0" marL="0">
+                  <a:buNone/>
+                </a:pPr>
+                <a:r>
+                  <a:rPr b="1"/>
+                  <a:t>Present value</a:t>
+                </a:r>
+                <a:r>
+                  <a:rPr/>
+                  <a:t> of ALL future expected losses (discounting!):</a:t>
+                </a:r>
+              </a:p>
+              <a:p>
+                <a:pPr lvl="0" indent="0" marL="0">
+                  <a:buNone/>
+                </a:pPr>
+                <a14:m>
+                  <m:oMathPara xmlns:m="http://schemas.openxmlformats.org/officeDocument/2006/math">
+                    <m:oMathParaPr>
+                      <m:jc m:val="center"/>
+                    </m:oMathParaPr>
+                    <m:oMath>
+                      <m:r>
+                        <m:t>L</m:t>
+                      </m:r>
+                      <m:d>
+                        <m:dPr>
+                          <m:begChr m:val="("/>
+                          <m:sepChr m:val=""/>
+                          <m:endChr m:val=")"/>
+                          <m:grow/>
+                        </m:dPr>
+                        <m:e>
+                          <m:r>
+                            <m:t>X</m:t>
+                          </m:r>
+                        </m:e>
+                      </m:d>
+                      <m:r>
+                        <m:rPr>
+                          <m:sty m:val="p"/>
+                        </m:rPr>
+                        <m:t>=</m:t>
+                      </m:r>
+                      <m:f>
+                        <m:fPr>
+                          <m:type m:val="bar"/>
+                        </m:fPr>
+                        <m:num>
+                          <m:r>
+                            <m:t>100</m:t>
+                          </m:r>
+                          <m:r>
+                            <m:t> </m:t>
+                          </m:r>
+                          <m:sSub>
+                            <m:e>
+                              <m:r>
+                                <m:t>p</m:t>
+                              </m:r>
+                            </m:e>
+                            <m:sub>
+                              <m:r>
+                                <m:t>0</m:t>
+                              </m:r>
+                            </m:sub>
+                          </m:sSub>
+                          <m:r>
+                            <m:t> </m:t>
+                          </m:r>
+                          <m:r>
+                            <m:t>V</m:t>
+                          </m:r>
+                          <m:r>
+                            <m:t> </m:t>
+                          </m:r>
+                          <m:sSup>
+                            <m:e>
+                              <m:r>
+                                <m:t>e</m:t>
+                              </m:r>
+                            </m:e>
+                            <m:sup>
+                              <m:r>
+                                <m:rPr>
+                                  <m:sty m:val="p"/>
+                                </m:rPr>
+                                <m:t>−</m:t>
+                              </m:r>
+                              <m:r>
+                                <m:t>α</m:t>
+                              </m:r>
+                              <m:r>
+                                <m:t>X</m:t>
+                              </m:r>
+                            </m:sup>
+                          </m:sSup>
+                        </m:num>
+                        <m:den>
+                          <m:r>
+                            <m:t>δ</m:t>
+                          </m:r>
+                        </m:den>
+                      </m:f>
+                    </m:oMath>
+                  </m:oMathPara>
+                </a14:m>
+              </a:p>
+              <a:p>
+                <a:pPr lvl="0" indent="0" marL="0">
+                  <a:buNone/>
+                </a:pPr>
+                <a:r>
+                  <a:rPr/>
+                  <a:t>where </a:t>
+                </a:r>
+                <a14:m>
+                  <m:oMath xmlns:m="http://schemas.openxmlformats.org/officeDocument/2006/math">
+                    <m:r>
+                      <m:t>δ</m:t>
+                    </m:r>
+                  </m:oMath>
+                </a14:m>
+                <a:r>
+                  <a:rPr/>
+                  <a:t> is the interest rate (in percent) — this is NPV, just like Week 5.</a:t>
+                </a:r>
+              </a:p>
+              <a:p>
+                <a:pPr lvl="0" indent="0" marL="0">
+                  <a:spcBef>
+                    <a:spcPts val="3000"/>
+                  </a:spcBef>
+                  <a:buNone/>
+                </a:pPr>
+                <a:r>
+                  <a:rPr b="1"/>
+                  <a:t>The U-Shaped Total Cost</a:t>
+                </a:r>
+              </a:p>
+              <a:p>
+                <a:pPr lvl="0" indent="0" marL="0">
+                  <a:buNone/>
+                </a:pPr>
+                <a14:m>
+                  <m:oMathPara xmlns:m="http://schemas.openxmlformats.org/officeDocument/2006/math">
+                    <m:oMathParaPr>
+                      <m:jc m:val="center"/>
+                    </m:oMathParaPr>
+                    <m:oMath>
+                      <m:r>
+                        <m:rPr>
+                          <m:nor/>
+                          <m:sty m:val="p"/>
+                        </m:rPr>
+                        <m:t>Total</m:t>
+                      </m:r>
+                      <m:d>
+                        <m:dPr>
+                          <m:begChr m:val="("/>
+                          <m:sepChr m:val=""/>
+                          <m:endChr m:val=")"/>
+                          <m:grow/>
+                        </m:dPr>
+                        <m:e>
+                          <m:r>
+                            <m:t>X</m:t>
+                          </m:r>
+                        </m:e>
+                      </m:d>
+                      <m:r>
+                        <m:rPr>
+                          <m:sty m:val="p"/>
+                        </m:rPr>
+                        <m:t>=</m:t>
+                      </m:r>
+                      <m:limLow>
+                        <m:e>
+                          <m:limLow>
+                            <m:e>
+                              <m:sSub>
+                                <m:e>
+                                  <m:r>
+                                    <m:t>I</m:t>
+                                  </m:r>
+                                </m:e>
+                                <m:sub>
+                                  <m:r>
+                                    <m:t>0</m:t>
+                                  </m:r>
+                                </m:sub>
+                              </m:sSub>
+                              <m:r>
+                                <m:rPr>
+                                  <m:sty m:val="p"/>
+                                </m:rPr>
+                                <m:t>+</m:t>
+                              </m:r>
+                              <m:r>
+                                <m:t>k</m:t>
+                              </m:r>
+                              <m:r>
+                                <m:t>X</m:t>
+                              </m:r>
+                            </m:e>
+                            <m:lim>
+                              <m:r>
+                                <m:rPr>
+                                  <m:sty m:val="p"/>
+                                </m:rPr>
+                                <m:t>⏟</m:t>
+                              </m:r>
+                            </m:lim>
+                          </m:limLow>
+                        </m:e>
+                        <m:lim>
+                          <m:r>
+                            <m:rPr>
+                              <m:nor/>
+                              <m:sty m:val="p"/>
+                            </m:rPr>
+                            <m:t>construction</m:t>
+                          </m:r>
+                        </m:lim>
+                      </m:limLow>
+                      <m:r>
+                        <m:rPr>
+                          <m:sty m:val="p"/>
+                        </m:rPr>
+                        <m:t>+</m:t>
+                      </m:r>
+                      <m:limLow>
+                        <m:e>
+                          <m:limLow>
+                            <m:e>
+                              <m:f>
+                                <m:fPr>
+                                  <m:type m:val="bar"/>
+                                </m:fPr>
+                                <m:num>
+                                  <m:r>
+                                    <m:t>100</m:t>
+                                  </m:r>
+                                  <m:r>
+                                    <m:t> </m:t>
+                                  </m:r>
+                                  <m:sSub>
+                                    <m:e>
+                                      <m:r>
+                                        <m:t>p</m:t>
+                                      </m:r>
+                                    </m:e>
+                                    <m:sub>
+                                      <m:r>
+                                        <m:t>0</m:t>
+                                      </m:r>
+                                    </m:sub>
+                                  </m:sSub>
+                                  <m:r>
+                                    <m:t> </m:t>
+                                  </m:r>
+                                  <m:r>
+                                    <m:t>V</m:t>
+                                  </m:r>
+                                  <m:r>
+                                    <m:t> </m:t>
+                                  </m:r>
+                                  <m:sSup>
+                                    <m:e>
+                                      <m:r>
+                                        <m:t>e</m:t>
+                                      </m:r>
+                                    </m:e>
+                                    <m:sup>
+                                      <m:r>
+                                        <m:rPr>
+                                          <m:sty m:val="p"/>
+                                        </m:rPr>
+                                        <m:t>−</m:t>
+                                      </m:r>
+                                      <m:r>
+                                        <m:t>α</m:t>
+                                      </m:r>
+                                      <m:r>
+                                        <m:t>X</m:t>
+                                      </m:r>
+                                    </m:sup>
+                                  </m:sSup>
+                                </m:num>
+                                <m:den>
+                                  <m:r>
+                                    <m:t>δ</m:t>
+                                  </m:r>
+                                </m:den>
+                              </m:f>
+                            </m:e>
+                            <m:lim>
+                              <m:r>
+                                <m:rPr>
+                                  <m:sty m:val="p"/>
+                                </m:rPr>
+                                <m:t>⏟</m:t>
+                              </m:r>
+                            </m:lim>
+                          </m:limLow>
+                        </m:e>
+                        <m:lim>
+                          <m:r>
+                            <m:rPr>
+                              <m:nor/>
+                              <m:sty m:val="p"/>
+                            </m:rPr>
+                            <m:t>expected losses (NPV)</m:t>
+                          </m:r>
+                        </m:lim>
+                      </m:limLow>
+                    </m:oMath>
+                  </m:oMathPara>
+                </a14:m>
+              </a:p>
+            </p:txBody>
+          </p:sp>
+        </mc:Choice>
+      </mc:AlternateContent>
+      <p:pic>
+        <p:nvPicPr>
+          <p:cNvPr descr="index_files/figure-pptx/fig-u-shaped-output-1.png" id="0" name="Picture 1"/>
+          <p:cNvPicPr>
+            <a:picLocks noGrp="1" noChangeAspect="1"/>
+          </p:cNvPicPr>
+          <p:nvPr/>
+        </p:nvPicPr>
+        <p:blipFill>
+          <a:blip r:embed="rId3"/>
+          <a:stretch>
+            <a:fillRect/>
+          </a:stretch>
+        </p:blipFill>
+        <p:spPr bwMode="auto">
+          <a:xfrm>
+            <a:off x="3568700" y="495300"/>
+            <a:ext cx="5105400" cy="3276600"/>
+          </a:xfrm>
+          <a:prstGeom prst="rect">
+            <a:avLst/>
+          </a:prstGeom>
+          <a:noFill/>
+          <a:ln w="9525">
+            <a:noFill/>
+            <a:headEnd/>
+            <a:tailEnd/>
+          </a:ln>
+        </p:spPr>
+      </p:pic>
+      <p:sp>
+        <p:nvSpPr>
+          <p:cNvPr id="1" name="TextBox 3"/>
+          <p:cNvSpPr txBox="1"/>
+          <p:nvPr/>
+        </p:nvSpPr>
+        <p:spPr>
+          <a:xfrm>
+            <a:off x="3568700" y="4076700"/>
+            <a:ext cx="5105400" cy="508000"/>
+          </a:xfrm>
+          <a:prstGeom prst="rect">
+            <a:avLst/>
+          </a:prstGeom>
+          <a:noFill/>
+        </p:spPr>
+        <p:txBody>
+          <a:bodyPr/>
+          <a:lstStyle/>
+          <a:p>
+            <a:pPr lvl="0" indent="0" marL="0" algn="ctr">
+              <a:buNone/>
+            </a:pPr>
+            <a:r>
+              <a:rPr/>
+              <a:t>Figure 2: The classic trade-off: construction costs rise with dike height, expected losses fall. The optimum balances them. How would the optimum shift if the curves changed shape?</a:t>
+            </a:r>
+          </a:p>
+        </p:txBody>
+      </p:sp>
+    </p:spTree>
+  </p:cSld>
+</p:sld>
+</file>
+
+<file path=ppt/slides/slide11.xml><?xml version="1.0" encoding="utf-8"?>
+<p:sld xmlns:a="http://schemas.openxmlformats.org/drawingml/2006/main" xmlns:r="http://schemas.openxmlformats.org/officeDocument/2006/relationships" xmlns:p="http://schemas.openxmlformats.org/presentationml/2006/main">
+  <p:cSld>
+    <p:spTree>
+      <p:nvGrpSpPr>
+        <p:cNvPr id="1" name=""/>
+        <p:cNvGrpSpPr/>
+        <p:nvPr/>
+      </p:nvGrpSpPr>
+      <p:grpSpPr>
+        <a:xfrm>
+          <a:off x="0" y="0"/>
+          <a:ext cx="0" cy="0"/>
+          <a:chOff x="0" y="0"/>
+          <a:chExt cx="0" cy="0"/>
+        </a:xfrm>
+      </p:grpSpPr>
+      <mc:AlternateContent xmlns:mc="http://schemas.openxmlformats.org/markup-compatibility/2006">
+        <mc:Choice xmlns:a14="http://schemas.microsoft.com/office/drawing/2010/main" Requires="a14">
+          <p:sp>
+            <p:nvSpPr>
+              <p:cNvPr id="3" name="Content Placeholder 2"/>
+              <p:cNvSpPr>
+                <a:spLocks noGrp="1"/>
+              </p:cNvSpPr>
+              <p:nvPr>
+                <p:ph idx="1"/>
+              </p:nvPr>
+            </p:nvSpPr>
+            <p:spPr/>
+            <p:txBody>
+              <a:bodyPr/>
+              <a:lstStyle/>
+              <a:p>
+                <a:pPr lvl="0" indent="0" marL="0">
+                  <a:spcBef>
+                    <a:spcPts val="3000"/>
+                  </a:spcBef>
+                  <a:buNone/>
+                </a:pPr>
+                <a:r>
+                  <a:rPr b="1"/>
+                  <a:t>The Analytical Solution</a:t>
+                </a:r>
+              </a:p>
+              <a:p>
+                <a:pPr lvl="0" indent="0" marL="0">
+                  <a:buNone/>
+                </a:pPr>
+                <a:r>
+                  <a:rPr/>
+                  <a:t>Take the derivative, set equal to zero:</a:t>
+                </a:r>
+              </a:p>
+              <a:p>
+                <a:pPr lvl="0" indent="0" marL="0">
+                  <a:buNone/>
+                </a:pPr>
+                <a14:m>
+                  <m:oMathPara xmlns:m="http://schemas.openxmlformats.org/officeDocument/2006/math">
+                    <m:oMathParaPr>
+                      <m:jc m:val="center"/>
+                    </m:oMathParaPr>
+                    <m:oMath>
+                      <m:sSup>
+                        <m:e>
+                          <m:r>
+                            <m:t>X</m:t>
+                          </m:r>
+                        </m:e>
+                        <m:sup>
+                          <m:r>
+                            <m:rPr>
+                              <m:sty m:val="p"/>
+                            </m:rPr>
+                            <m:t>*</m:t>
+                          </m:r>
+                        </m:sup>
+                      </m:sSup>
+                      <m:r>
+                        <m:rPr>
+                          <m:sty m:val="p"/>
+                        </m:rPr>
+                        <m:t>=</m:t>
+                      </m:r>
+                      <m:f>
+                        <m:fPr>
+                          <m:type m:val="bar"/>
+                        </m:fPr>
+                        <m:num>
+                          <m:r>
+                            <m:t>1</m:t>
+                          </m:r>
+                        </m:num>
+                        <m:den>
+                          <m:r>
+                            <m:t>α</m:t>
+                          </m:r>
+                        </m:den>
+                      </m:f>
+                      <m:r>
+                        <m:rPr>
+                          <m:sty m:val="p"/>
+                        </m:rPr>
+                        <m:t>ln</m:t>
+                      </m:r>
+                      <m:r>
+                        <m:t>​</m:t>
+                      </m:r>
+                      <m:d>
+                        <m:dPr>
+                          <m:begChr m:val="("/>
+                          <m:sepChr m:val=""/>
+                          <m:endChr m:val=")"/>
+                          <m:grow/>
+                        </m:dPr>
+                        <m:e>
+                          <m:f>
+                            <m:fPr>
+                              <m:type m:val="bar"/>
+                            </m:fPr>
+                            <m:num>
+                              <m:r>
+                                <m:t>100</m:t>
+                              </m:r>
+                              <m:r>
+                                <m:t> </m:t>
+                              </m:r>
+                              <m:sSub>
+                                <m:e>
+                                  <m:r>
+                                    <m:t>p</m:t>
+                                  </m:r>
+                                </m:e>
+                                <m:sub>
+                                  <m:r>
+                                    <m:t>0</m:t>
+                                  </m:r>
+                                </m:sub>
+                              </m:sSub>
+                              <m:r>
+                                <m:t> </m:t>
+                              </m:r>
+                              <m:r>
+                                <m:t>V</m:t>
+                              </m:r>
+                              <m:r>
+                                <m:t> </m:t>
+                              </m:r>
+                              <m:r>
+                                <m:t>α</m:t>
+                              </m:r>
+                            </m:num>
+                            <m:den>
+                              <m:r>
+                                <m:t>δ</m:t>
+                              </m:r>
+                              <m:r>
+                                <m:t> </m:t>
+                              </m:r>
+                              <m:r>
+                                <m:t>k</m:t>
+                              </m:r>
+                            </m:den>
+                          </m:f>
+                        </m:e>
+                      </m:d>
+                    </m:oMath>
+                  </m:oMathPara>
+                </a14:m>
+              </a:p>
+              <a:p>
+                <a:pPr lvl="0" indent="0" marL="0">
+                  <a:buNone/>
+                </a:pPr>
+                <a:r>
+                  <a:rPr/>
+                  <a:t>Interpretation:</a:t>
+                </a:r>
+              </a:p>
+              <a:p>
+                <a:pPr lvl="0"/>
+                <a:r>
+                  <a:rPr/>
+                  <a:t>Optimal height </a:t>
+                </a:r>
+                <a:r>
+                  <a:rPr b="1"/>
+                  <a:t>increases</a:t>
+                </a:r>
+                <a:r>
+                  <a:rPr/>
+                  <a:t> when value </a:t>
+                </a:r>
+                <a14:m>
+                  <m:oMath xmlns:m="http://schemas.openxmlformats.org/officeDocument/2006/math">
+                    <m:r>
+                      <m:t>V</m:t>
+                    </m:r>
+                  </m:oMath>
+                </a14:m>
+                <a:r>
+                  <a:rPr/>
+                  <a:t> is high</a:t>
+                </a:r>
+              </a:p>
+              <a:p>
+                <a:pPr lvl="0"/>
+                <a:r>
+                  <a:rPr/>
+                  <a:t>Optimal height </a:t>
+                </a:r>
+                <a:r>
+                  <a:rPr b="1"/>
+                  <a:t>increases</a:t>
+                </a:r>
+                <a:r>
+                  <a:rPr/>
+                  <a:t> when flood probability </a:t>
+                </a:r>
+                <a14:m>
+                  <m:oMath xmlns:m="http://schemas.openxmlformats.org/officeDocument/2006/math">
+                    <m:sSub>
+                      <m:e>
+                        <m:r>
+                          <m:t>p</m:t>
+                        </m:r>
+                      </m:e>
+                      <m:sub>
+                        <m:r>
+                          <m:t>0</m:t>
+                        </m:r>
+                      </m:sub>
+                    </m:sSub>
+                  </m:oMath>
+                </a14:m>
+                <a:r>
+                  <a:rPr/>
+                  <a:t> is high</a:t>
+                </a:r>
+              </a:p>
+              <a:p>
+                <a:pPr lvl="0"/>
+                <a:r>
+                  <a:rPr/>
+                  <a:t>Optimal height </a:t>
+                </a:r>
+                <a:r>
+                  <a:rPr b="1"/>
+                  <a:t>decreases</a:t>
+                </a:r>
+                <a:r>
+                  <a:rPr/>
+                  <a:t> when discount rate </a:t>
+                </a:r>
+                <a14:m>
+                  <m:oMath xmlns:m="http://schemas.openxmlformats.org/officeDocument/2006/math">
+                    <m:r>
+                      <m:t>δ</m:t>
+                    </m:r>
+                  </m:oMath>
+                </a14:m>
+                <a:r>
+                  <a:rPr/>
+                  <a:t> is high</a:t>
+                </a:r>
+              </a:p>
+              <a:p>
+                <a:pPr lvl="0"/>
+                <a:r>
+                  <a:rPr/>
+                  <a:t>Optimal height </a:t>
+                </a:r>
+                <a:r>
+                  <a:rPr b="1"/>
+                  <a:t>decreases</a:t>
+                </a:r>
+                <a:r>
+                  <a:rPr/>
+                  <a:t> when construction cost </a:t>
+                </a:r>
+                <a14:m>
+                  <m:oMath xmlns:m="http://schemas.openxmlformats.org/officeDocument/2006/math">
+                    <m:r>
+                      <m:t>k</m:t>
+                    </m:r>
+                  </m:oMath>
+                </a14:m>
+                <a:r>
+                  <a:rPr/>
+                  <a:t> is high</a:t>
+                </a:r>
+              </a:p>
+            </p:txBody>
+          </p:sp>
+        </mc:Choice>
+      </mc:AlternateContent>
+    </p:spTree>
+  </p:cSld>
+</p:sld>
+</file>
+
+<file path=ppt/slides/slide12.xml><?xml version="1.0" encoding="utf-8"?>
+<p:sld xmlns:a="http://schemas.openxmlformats.org/drawingml/2006/main" xmlns:r="http://schemas.openxmlformats.org/officeDocument/2006/relationships" xmlns:p="http://schemas.openxmlformats.org/presentationml/2006/main">
+  <p:cSld>
+    <p:spTree>
+      <p:nvGrpSpPr>
+        <p:cNvPr id="1" name=""/>
+        <p:cNvGrpSpPr/>
+        <p:nvPr/>
+      </p:nvGrpSpPr>
+      <p:grpSpPr>
+        <a:xfrm>
+          <a:off x="0" y="0"/>
+          <a:ext cx="0" cy="0"/>
+          <a:chOff x="0" y="0"/>
+          <a:chExt cx="0" cy="0"/>
+        </a:xfrm>
+      </p:grpSpPr>
+      <p:sp>
+        <p:nvSpPr>
+          <p:cNvPr id="2" name="Title 1"/>
+          <p:cNvSpPr>
+            <a:spLocks noGrp="1"/>
+          </p:cNvSpPr>
+          <p:nvPr>
+            <p:ph type="title"/>
+          </p:nvPr>
+        </p:nvSpPr>
+        <p:spPr/>
+        <p:txBody>
+          <a:bodyPr/>
+          <a:lstStyle/>
+          <a:p>
+            <a:pPr lvl="0" indent="0" marL="0">
+              <a:buNone/>
+            </a:pPr>
+            <a:r>
+              <a:rPr/>
+              <a:t>Adding Realism</a:t>
+            </a:r>
+          </a:p>
+        </p:txBody>
+      </p:sp>
+      <mc:AlternateContent xmlns:mc="http://schemas.openxmlformats.org/markup-compatibility/2006">
+        <mc:Choice xmlns:a14="http://schemas.microsoft.com/office/drawing/2010/main" Requires="a14">
+          <p:sp>
+            <p:nvSpPr>
+              <p:cNvPr id="3" name="Content Placeholder 2"/>
+              <p:cNvSpPr>
+                <a:spLocks noGrp="1"/>
+              </p:cNvSpPr>
+              <p:nvPr>
+                <p:ph idx="1"/>
+              </p:nvPr>
+            </p:nvSpPr>
+            <p:spPr/>
+            <p:txBody>
+              <a:bodyPr/>
+              <a:lstStyle/>
+              <a:p>
+                <a:pPr lvl="0" indent="0" marL="0">
+                  <a:spcBef>
+                    <a:spcPts val="3000"/>
+                  </a:spcBef>
+                  <a:buNone/>
+                </a:pPr>
+                <a:r>
+                  <a:rPr b="1"/>
+                  <a:t>The Netherlands is Changing</a:t>
+                </a:r>
+              </a:p>
+              <a:p>
+                <a:pPr lvl="0" indent="0" marL="0">
+                  <a:buNone/>
+                </a:pPr>
+                <a:r>
+                  <a:rPr/>
+                  <a:t>Two slow processes push the optimal dike height higher:</a:t>
+                </a:r>
+              </a:p>
+              <a:p>
+                <a:pPr lvl="0" indent="0" marL="0">
+                  <a:buNone/>
+                </a:pPr>
+                <a:r>
+                  <a:rPr b="1"/>
+                  <a:t>Wealth growth:</a:t>
+                </a:r>
+                <a:r>
+                  <a:rPr/>
+                  <a:t> the economy grows at rate </a:t>
+                </a:r>
+                <a14:m>
+                  <m:oMath xmlns:m="http://schemas.openxmlformats.org/officeDocument/2006/math">
+                    <m:r>
+                      <m:t>γ</m:t>
+                    </m:r>
+                  </m:oMath>
+                </a14:m>
+                <a:r>
+                  <a:rPr/>
+                  <a:t> (estimated 1.5–2.5% per year), so </a:t>
+                </a:r>
+                <a14:m>
+                  <m:oMath xmlns:m="http://schemas.openxmlformats.org/officeDocument/2006/math">
+                    <m:r>
+                      <m:t>V</m:t>
+                    </m:r>
+                  </m:oMath>
+                </a14:m>
+                <a:r>
+                  <a:rPr/>
+                  <a:t> increases over time.</a:t>
+                </a:r>
+              </a:p>
+              <a:p>
+                <a:pPr lvl="0" indent="0" marL="0">
+                  <a:buNone/>
+                </a:pPr>
+                <a:r>
+                  <a:rPr b="1"/>
+                  <a:t>Land subsidence:</a:t>
+                </a:r>
+                <a:r>
+                  <a:rPr/>
+                  <a:t> the Netherlands has been sinking for 9,000 years at rate </a:t>
+                </a:r>
+                <a14:m>
+                  <m:oMath xmlns:m="http://schemas.openxmlformats.org/officeDocument/2006/math">
+                    <m:r>
+                      <m:t>ν</m:t>
+                    </m:r>
+                  </m:oMath>
+                </a14:m>
+                <a:r>
+                  <a:rPr/>
+                  <a:t> (~0.7 m/century), so effective dike height decreases.</a:t>
+                </a:r>
+              </a:p>
+              <a:p>
+                <a:pPr lvl="0" indent="0" marL="0">
+                  <a:buNone/>
+                </a:pPr>
+                <a:r>
+                  <a:rPr/>
+                  <a:t>Both compound over centuries-long planning horizons.</a:t>
+                </a:r>
+              </a:p>
+              <a:p>
+                <a:pPr lvl="0" indent="0" marL="0">
+                  <a:spcBef>
+                    <a:spcPts val="3000"/>
+                  </a:spcBef>
+                  <a:buNone/>
+                </a:pPr>
+                <a:r>
+                  <a:rPr b="1"/>
+                  <a:t>The Reduced Interest Rate</a:t>
+                </a:r>
+              </a:p>
+              <a:p>
+                <a:pPr lvl="0" indent="0" marL="0">
+                  <a:buNone/>
+                </a:pPr>
+                <a:r>
+                  <a:rPr/>
+                  <a:t>With wealth growth, the effective discount rate becomes:</a:t>
+                </a:r>
+              </a:p>
+              <a:p>
+                <a:pPr lvl="0" indent="0" marL="0">
+                  <a:buNone/>
+                </a:pPr>
+                <a14:m>
+                  <m:oMathPara xmlns:m="http://schemas.openxmlformats.org/officeDocument/2006/math">
+                    <m:oMathParaPr>
+                      <m:jc m:val="center"/>
+                    </m:oMathParaPr>
+                    <m:oMath>
+                      <m:r>
+                        <m:t>δ</m:t>
+                      </m:r>
+                      <m:r>
+                        <m:rPr>
+                          <m:sty m:val="p"/>
+                        </m:rPr>
+                        <m:t>′</m:t>
+                      </m:r>
+                      <m:r>
+                        <m:rPr>
+                          <m:sty m:val="p"/>
+                        </m:rPr>
+                        <m:t>=</m:t>
+                      </m:r>
+                      <m:r>
+                        <m:t>δ</m:t>
+                      </m:r>
+                      <m:r>
+                        <m:rPr>
+                          <m:sty m:val="p"/>
+                        </m:rPr>
+                        <m:t>−</m:t>
+                      </m:r>
+                      <m:r>
+                        <m:t>γ</m:t>
+                      </m:r>
+                    </m:oMath>
+                  </m:oMathPara>
+                </a14:m>
+              </a:p>
+              <a:p>
+                <a:pPr lvl="0" indent="0" marL="0">
+                  <a:buNone/>
+                </a:pPr>
+                <a:r>
+                  <a:rPr/>
+                  <a:t>van Dantzig estimates </a:t>
+                </a:r>
+                <a14:m>
+                  <m:oMath xmlns:m="http://schemas.openxmlformats.org/officeDocument/2006/math">
+                    <m:r>
+                      <m:t>δ</m:t>
+                    </m:r>
+                    <m:r>
+                      <m:rPr>
+                        <m:sty m:val="p"/>
+                      </m:rPr>
+                      <m:t>≈</m:t>
+                    </m:r>
+                    <m:r>
+                      <m:t>3.5</m:t>
+                    </m:r>
+                    <m:r>
+                      <m:rPr>
+                        <m:nor/>
+                        <m:sty m:val="p"/>
+                      </m:rPr>
+                      <m:t>–</m:t>
+                    </m:r>
+                    <m:r>
+                      <m:t>4.5</m:t>
+                    </m:r>
+                    <m:r>
+                      <m:rPr>
+                        <m:sty m:val="p"/>
+                      </m:rPr>
+                      <m:t>%</m:t>
+                    </m:r>
+                  </m:oMath>
+                </a14:m>
+                <a:r>
+                  <a:rPr/>
+                  <a:t> and </a:t>
+                </a:r>
+                <a14:m>
+                  <m:oMath xmlns:m="http://schemas.openxmlformats.org/officeDocument/2006/math">
+                    <m:r>
+                      <m:t>γ</m:t>
+                    </m:r>
+                    <m:r>
+                      <m:rPr>
+                        <m:sty m:val="p"/>
+                      </m:rPr>
+                      <m:t>≈</m:t>
+                    </m:r>
+                    <m:r>
+                      <m:t>1.5</m:t>
+                    </m:r>
+                    <m:r>
+                      <m:rPr>
+                        <m:nor/>
+                        <m:sty m:val="p"/>
+                      </m:rPr>
+                      <m:t>–</m:t>
+                    </m:r>
+                    <m:r>
+                      <m:t>2.5</m:t>
+                    </m:r>
+                    <m:r>
+                      <m:rPr>
+                        <m:sty m:val="p"/>
+                      </m:rPr>
+                      <m:t>%</m:t>
+                    </m:r>
+                  </m:oMath>
+                </a14:m>
+                <a:r>
+                  <a:rPr/>
+                  <a:t>, giving </a:t>
+                </a:r>
+                <a14:m>
+                  <m:oMath xmlns:m="http://schemas.openxmlformats.org/officeDocument/2006/math">
+                    <m:r>
+                      <m:t>δ</m:t>
+                    </m:r>
+                    <m:r>
+                      <m:rPr>
+                        <m:sty m:val="p"/>
+                      </m:rPr>
+                      <m:t>′</m:t>
+                    </m:r>
+                    <m:r>
+                      <m:rPr>
+                        <m:sty m:val="p"/>
+                      </m:rPr>
+                      <m:t>≈</m:t>
+                    </m:r>
+                    <m:r>
+                      <m:t>1</m:t>
+                    </m:r>
+                    <m:r>
+                      <m:rPr>
+                        <m:nor/>
+                        <m:sty m:val="p"/>
+                      </m:rPr>
+                      <m:t>–</m:t>
+                    </m:r>
+                    <m:r>
+                      <m:t>3</m:t>
+                    </m:r>
+                    <m:r>
+                      <m:rPr>
+                        <m:sty m:val="p"/>
+                      </m:rPr>
+                      <m:t>%</m:t>
+                    </m:r>
+                  </m:oMath>
+                </a14:m>
+                <a:r>
+                  <a:rPr/>
+                  <a:t>.</a:t>
+                </a:r>
+              </a:p>
+              <a:p>
+                <a:pPr lvl="0" indent="0" marL="0">
+                  <a:buNone/>
+                </a:pPr>
+                <a:r>
+                  <a:rPr/>
+                  <a:t>A smaller effective discount rate means future losses matter more — and the optimal dike gets taller.</a:t>
+                </a:r>
+              </a:p>
+              <a:p>
+                <a:pPr lvl="0" indent="0" marL="0">
+                  <a:buNone/>
+                </a:pPr>
+                <a:r>
+                  <a:rPr/>
+                  <a:t>What happens if </a:t>
+                </a:r>
+                <a14:m>
+                  <m:oMath xmlns:m="http://schemas.openxmlformats.org/officeDocument/2006/math">
+                    <m:r>
+                      <m:t>γ</m:t>
+                    </m:r>
+                    <m:r>
+                      <m:rPr>
+                        <m:sty m:val="p"/>
+                      </m:rPr>
+                      <m:t>≥</m:t>
+                    </m:r>
+                    <m:r>
+                      <m:t>δ</m:t>
+                    </m:r>
+                  </m:oMath>
+                </a14:m>
+                <a:r>
+                  <a:rPr/>
+                  <a:t>?</a:t>
+                </a:r>
+              </a:p>
+              <a:p>
+                <a:pPr lvl="0" indent="0" marL="0">
+                  <a:buNone/>
+                </a:pPr>
+                <a:r>
+                  <a:rPr/>
+                  <a:t>The present value of future losses </a:t>
+                </a:r>
+                <a:r>
+                  <a:rPr b="1"/>
+                  <a:t>diverges</a:t>
+                </a:r>
+                <a:r>
+                  <a:rPr/>
+                  <a:t> — there is no finite optimum.</a:t>
+                </a:r>
+              </a:p>
+              <a:p>
+                <a:pPr lvl="0" indent="0" marL="0">
+                  <a:spcBef>
+                    <a:spcPts val="3000"/>
+                  </a:spcBef>
+                  <a:buNone/>
+                </a:pPr>
+                <a:r>
+                  <a:rPr b="1"/>
+                  <a:t>“The Doubtful Constants”</a:t>
+                </a:r>
+              </a:p>
+              <a:p>
+                <a:pPr lvl="0" indent="0" marL="0">
+                  <a:buNone/>
+                </a:pPr>
+                <a:r>
+                  <a:rPr/>
+                  <a:t>van Dantzig devotes a whole section to parameter uncertainty (Section 6).</a:t>
+                </a:r>
+              </a:p>
+              <a:p>
+                <a:pPr lvl="0" indent="0" marL="0">
+                  <a:buNone/>
+                </a:pPr>
+                <a:r>
+                  <a:rPr/>
+                  <a:t>Most of his parameters are “rather badly known”:</a:t>
+                </a:r>
+              </a:p>
+              <a:p>
+                <a:pPr lvl="0"/>
+                <a14:m>
+                  <m:oMath xmlns:m="http://schemas.openxmlformats.org/officeDocument/2006/math">
+                    <m:r>
+                      <m:t>α</m:t>
+                    </m:r>
+                  </m:oMath>
+                </a14:m>
+                <a:r>
+                  <a:rPr/>
+                  <a:t> and </a:t>
+                </a:r>
+                <a14:m>
+                  <m:oMath xmlns:m="http://schemas.openxmlformats.org/officeDocument/2006/math">
+                    <m:sSub>
+                      <m:e>
+                        <m:r>
+                          <m:t>p</m:t>
+                        </m:r>
+                      </m:e>
+                      <m:sub>
+                        <m:r>
+                          <m:t>0</m:t>
+                        </m:r>
+                      </m:sub>
+                    </m:sSub>
+                  </m:oMath>
+                </a14:m>
+                <a:r>
+                  <a:rPr/>
+                  <a:t> — physical constants, improvable with better data</a:t>
+                </a:r>
+              </a:p>
+              <a:p>
+                <a:pPr lvl="0"/>
+                <a14:m>
+                  <m:oMath xmlns:m="http://schemas.openxmlformats.org/officeDocument/2006/math">
+                    <m:sSub>
+                      <m:e>
+                        <m:r>
+                          <m:t>I</m:t>
+                        </m:r>
+                      </m:e>
+                      <m:sub>
+                        <m:r>
+                          <m:t>0</m:t>
+                        </m:r>
+                      </m:sub>
+                    </m:sSub>
+                  </m:oMath>
+                </a14:m>
+                <a:r>
+                  <a:rPr/>
+                  <a:t> and </a:t>
+                </a:r>
+                <a14:m>
+                  <m:oMath xmlns:m="http://schemas.openxmlformats.org/officeDocument/2006/math">
+                    <m:r>
+                      <m:t>k</m:t>
+                    </m:r>
+                  </m:oMath>
+                </a14:m>
+                <a:r>
+                  <a:rPr/>
+                  <a:t> — engineering estimates</a:t>
+                </a:r>
+              </a:p>
+              <a:p>
+                <a:pPr lvl="0"/>
+                <a14:m>
+                  <m:oMath xmlns:m="http://schemas.openxmlformats.org/officeDocument/2006/math">
+                    <m:r>
+                      <m:t>V</m:t>
+                    </m:r>
+                  </m:oMath>
+                </a14:m>
+                <a:r>
+                  <a:rPr/>
+                  <a:t> — determinable from economic data (with difficulty)</a:t>
+                </a:r>
+              </a:p>
+              <a:p>
+                <a:pPr lvl="0"/>
+                <a14:m>
+                  <m:oMath xmlns:m="http://schemas.openxmlformats.org/officeDocument/2006/math">
+                    <m:r>
+                      <m:t>δ</m:t>
+                    </m:r>
+                  </m:oMath>
+                </a14:m>
+                <a:r>
+                  <a:rPr/>
+                  <a:t> and </a:t>
+                </a:r>
+                <a14:m>
+                  <m:oMath xmlns:m="http://schemas.openxmlformats.org/officeDocument/2006/math">
+                    <m:r>
+                      <m:t>γ</m:t>
+                    </m:r>
+                  </m:oMath>
+                </a14:m>
+                <a:r>
+                  <a:rPr/>
+                  <a:t> — “secular” economic quantities, deeply uncertain over centuries</a:t>
+                </a:r>
+              </a:p>
+              <a:p>
+                <a:pPr lvl="0" indent="0" marL="0">
+                  <a:buNone/>
+                </a:pPr>
+                <a:r>
+                  <a:rPr/>
+                  <a:t>Which of these can we learn? Which are fundamentally unknowable?</a:t>
+                </a:r>
+              </a:p>
+              <a:p>
+                <a:pPr lvl="0" indent="0" marL="0">
+                  <a:buNone/>
+                </a:pPr>
+                <a:r>
+                  <a:rPr/>
+                  <a:t>We’ll return to this distinction when we study </a:t>
+                </a:r>
+                <a:r>
+                  <a:rPr b="1"/>
+                  <a:t>robustness</a:t>
+                </a:r>
+                <a:r>
+                  <a:rPr/>
+                  <a:t> later in the semester.</a:t>
+                </a:r>
+              </a:p>
+              <a:p>
+                <a:pPr lvl="0" indent="0" marL="0">
+                  <a:spcBef>
+                    <a:spcPts val="3000"/>
+                  </a:spcBef>
+                  <a:buNone/>
+                </a:pPr>
+                <a:r>
+                  <a:rPr b="1"/>
+                  <a:t>The “Safe Side” Approach</a:t>
+                </a:r>
+              </a:p>
+              <a:p>
+                <a:pPr lvl="0" indent="0" marL="0">
+                  <a:buNone/>
+                </a:pPr>
+                <a:r>
+                  <a:rPr/>
+                  <a:t>van Dantzig’s solution to parameter uncertainty:</a:t>
+                </a:r>
+              </a:p>
+              <a:p>
+                <a:pPr lvl="0" indent="0" marL="1270000">
+                  <a:buNone/>
+                </a:pPr>
+                <a:r>
+                  <a:rPr sz="2000"/>
+                  <a:t>“The best thing we can do is to ascertain that our solution will hold under the most unfavourable circumstances which must be considered to be realistic.”</a:t>
+                </a:r>
+              </a:p>
+              <a:p>
+                <a:pPr lvl="0" indent="0" marL="0">
+                  <a:buNone/>
+                </a:pPr>
+                <a:r>
+                  <a:rPr/>
+                  <a:t>Take the highest reasonable </a:t>
+                </a:r>
+                <a14:m>
+                  <m:oMath xmlns:m="http://schemas.openxmlformats.org/officeDocument/2006/math">
+                    <m:sSub>
+                      <m:e>
+                        <m:r>
+                          <m:t>p</m:t>
+                        </m:r>
+                      </m:e>
+                      <m:sub>
+                        <m:r>
+                          <m:t>0</m:t>
+                        </m:r>
+                      </m:sub>
+                    </m:sSub>
+                  </m:oMath>
+                </a14:m>
+                <a:r>
+                  <a:rPr/>
+                  <a:t>, </a:t>
+                </a:r>
+                <a14:m>
+                  <m:oMath xmlns:m="http://schemas.openxmlformats.org/officeDocument/2006/math">
+                    <m:r>
+                      <m:t>V</m:t>
+                    </m:r>
+                  </m:oMath>
+                </a14:m>
+                <a:r>
+                  <a:rPr/>
+                  <a:t>, </a:t>
+                </a:r>
+                <a14:m>
+                  <m:oMath xmlns:m="http://schemas.openxmlformats.org/officeDocument/2006/math">
+                    <m:r>
+                      <m:t>η</m:t>
+                    </m:r>
+                  </m:oMath>
+                </a14:m>
+                <a:r>
+                  <a:rPr/>
+                  <a:t> and the lowest reasonable </a:t>
+                </a:r>
+                <a14:m>
+                  <m:oMath xmlns:m="http://schemas.openxmlformats.org/officeDocument/2006/math">
+                    <m:r>
+                      <m:t>k</m:t>
+                    </m:r>
+                  </m:oMath>
+                </a14:m>
+                <a:r>
+                  <a:rPr/>
+                  <a:t>, </a:t>
+                </a:r>
+                <a14:m>
+                  <m:oMath xmlns:m="http://schemas.openxmlformats.org/officeDocument/2006/math">
+                    <m:r>
+                      <m:t>δ</m:t>
+                    </m:r>
+                    <m:r>
+                      <m:rPr>
+                        <m:sty m:val="p"/>
+                      </m:rPr>
+                      <m:t>′</m:t>
+                    </m:r>
+                  </m:oMath>
+                </a14:m>
+                <a:r>
+                  <a:rPr/>
+                  <a:t>.</a:t>
+                </a:r>
+              </a:p>
+              <a:p>
+                <a:pPr lvl="0" indent="0" marL="0">
+                  <a:buNone/>
+                </a:pPr>
+                <a:r>
+                  <a:rPr/>
+                  <a:t>This is a </a:t>
+                </a:r>
+                <a:r>
+                  <a:rPr b="1"/>
+                  <a:t>minimax</a:t>
+                </a:r>
+                <a:r>
+                  <a:rPr/>
+                  <a:t> strategy — minimize cost under the worst-case parameter values.</a:t>
+                </a:r>
+              </a:p>
+              <a:p>
+                <a:pPr lvl="0" indent="0" marL="0">
+                  <a:buNone/>
+                </a:pPr>
+                <a:r>
+                  <a:rPr/>
+                  <a:t>The trade-off: minimax will </a:t>
+                </a:r>
+                <a:r>
+                  <a:rPr b="1"/>
+                  <a:t>overdesign</a:t>
+                </a:r>
+                <a:r>
+                  <a:rPr/>
+                  <a:t> relative to the expected case. Choosing to err on the side of safety is defensible — but overdesign has real costs.</a:t>
+                </a:r>
+              </a:p>
+              <a:p>
+                <a:pPr lvl="0" indent="0" marL="0">
+                  <a:buNone/>
+                </a:pPr>
+                <a:r>
+                  <a:rPr/>
+                  <a:t>We’ll return to robustness more formally in Week 8.</a:t>
+                </a:r>
+              </a:p>
+              <a:p>
+                <a:pPr lvl="0" indent="0" marL="0">
+                  <a:spcBef>
+                    <a:spcPts val="3000"/>
+                  </a:spcBef>
+                  <a:buNone/>
+                </a:pPr>
+                <a:r>
+                  <a:rPr b="1"/>
+                  <a:t>The Numerical Result</a:t>
+                </a:r>
+              </a:p>
+            </p:txBody>
+          </p:sp>
+        </mc:Choice>
+      </mc:AlternateContent>
+    </p:spTree>
+  </p:cSld>
+</p:sld>
+</file>
+
+<file path=ppt/slides/slide13.xml><?xml version="1.0" encoding="utf-8"?>
+<p:sld xmlns:a="http://schemas.openxmlformats.org/drawingml/2006/main" xmlns:r="http://schemas.openxmlformats.org/officeDocument/2006/relationships" xmlns:p="http://schemas.openxmlformats.org/presentationml/2006/main">
+  <p:cSld>
+    <p:spTree>
+      <p:nvGrpSpPr>
+        <p:cNvPr id="1" name=""/>
+        <p:cNvGrpSpPr/>
+        <p:nvPr/>
+      </p:nvGrpSpPr>
+      <p:grpSpPr>
+        <a:xfrm>
+          <a:off x="0" y="0"/>
+          <a:ext cx="0" cy="0"/>
+          <a:chOff x="0" y="0"/>
+          <a:chExt cx="0" cy="0"/>
+        </a:xfrm>
+      </p:grpSpPr>
+      <p:sp>
+        <p:nvSpPr>
+          <p:cNvPr id="3" name="Content Placeholder 2"/>
+          <p:cNvSpPr>
+            <a:spLocks noGrp="1"/>
+          </p:cNvSpPr>
+          <p:nvPr>
+            <p:ph idx="1" sz="half"/>
+          </p:nvPr>
+        </p:nvSpPr>
+        <p:spPr/>
+        <p:txBody>
+          <a:bodyPr/>
+          <a:lstStyle/>
+          <a:p>
+            <a:pPr lvl="0" indent="0" marL="0">
+              <a:buNone/>
+            </a:pPr>
+            <a:r>
+              <a:rPr/>
+              <a:t>The paper considers additional parameters and processes (wealth growth, land subsidence, safe-side estimates) that shift both curves — pushing the optimum higher.</a:t>
+            </a:r>
+          </a:p>
+          <a:p>
+            <a:pPr lvl="0" indent="0" marL="0">
+              <a:buNone/>
+            </a:pPr>
+            <a:r>
+              <a:rPr/>
+              <a:t>van Dantzig concludes that a dike height of roughly 6 meters “may be considered as a sufficiently safe height.”</a:t>
+            </a:r>
+          </a:p>
+          <a:p>
+            <a:pPr lvl="0" indent="0" marL="0">
+              <a:buNone/>
+            </a:pPr>
+            <a:r>
+              <a:rPr/>
+              <a:t>This informed the Delta Commission’s decisions — and ultimately the Delta Works.</a:t>
+            </a:r>
+          </a:p>
+        </p:txBody>
+      </p:sp>
+      <p:pic>
+        <p:nvPicPr>
+          <p:cNvPr descr="deltaworks-b.jpg" id="0" name="Picture 1"/>
+          <p:cNvPicPr>
+            <a:picLocks noGrp="1" noChangeAspect="1"/>
+          </p:cNvPicPr>
+          <p:nvPr/>
+        </p:nvPicPr>
+        <p:blipFill>
+          <a:blip r:embed="rId3"/>
+          <a:stretch>
+            <a:fillRect/>
+          </a:stretch>
+        </p:blipFill>
+        <p:spPr bwMode="auto">
+          <a:xfrm>
+            <a:off x="4914900" y="1193800"/>
+            <a:ext cx="3492500" cy="2882900"/>
+          </a:xfrm>
+          <a:prstGeom prst="rect">
+            <a:avLst/>
+          </a:prstGeom>
+          <a:noFill/>
+          <a:ln w="9525">
+            <a:noFill/>
+            <a:headEnd/>
+            <a:tailEnd/>
+          </a:ln>
+        </p:spPr>
+      </p:pic>
+      <p:sp>
+        <p:nvSpPr>
+          <p:cNvPr id="1" name="TextBox 3"/>
+          <p:cNvSpPr txBox="1"/>
+          <p:nvPr/>
+        </p:nvSpPr>
+        <p:spPr>
+          <a:xfrm>
+            <a:off x="4648200" y="4076700"/>
+            <a:ext cx="4038600" cy="508000"/>
+          </a:xfrm>
+          <a:prstGeom prst="rect">
+            <a:avLst/>
+          </a:prstGeom>
+          <a:noFill/>
+        </p:spPr>
+        <p:txBody>
+          <a:bodyPr/>
+          <a:lstStyle/>
+          <a:p>
+            <a:pPr lvl="0" indent="0" marL="0" algn="ctr">
+              <a:buNone/>
+            </a:pPr>
+            <a:r>
+              <a:rPr/>
+              <a:t>The Oosterscheldekering, part of the Delta Works. Source: </a:t>
+            </a:r>
+            <a:r>
+              <a:rPr>
+                <a:hlinkClick r:id="rId4"/>
+              </a:rPr>
+              <a:t>Wikimedia Commons</a:t>
+            </a:r>
+            <a:r>
+              <a:rPr/>
+              <a:t>, CC BY-SA 3.0.</a:t>
+            </a:r>
+          </a:p>
+        </p:txBody>
+      </p:sp>
+    </p:spTree>
+  </p:cSld>
+</p:sld>
+</file>
+
+<file path=ppt/slides/slide14.xml><?xml version="1.0" encoding="utf-8"?>
+<p:sld xmlns:a="http://schemas.openxmlformats.org/drawingml/2006/main" xmlns:r="http://schemas.openxmlformats.org/officeDocument/2006/relationships" xmlns:p="http://schemas.openxmlformats.org/presentationml/2006/main">
+  <p:cSld>
+    <p:spTree>
+      <p:nvGrpSpPr>
+        <p:cNvPr id="1" name=""/>
+        <p:cNvGrpSpPr/>
+        <p:nvPr/>
+      </p:nvGrpSpPr>
+      <p:grpSpPr>
+        <a:xfrm>
+          <a:off x="0" y="0"/>
+          <a:ext cx="0" cy="0"/>
+          <a:chOff x="0" y="0"/>
+          <a:chExt cx="0" cy="0"/>
+        </a:xfrm>
+      </p:grpSpPr>
+      <p:sp>
+        <p:nvSpPr>
+          <p:cNvPr id="3" name="Content Placeholder 2"/>
+          <p:cNvSpPr>
+            <a:spLocks noGrp="1"/>
+          </p:cNvSpPr>
+          <p:nvPr>
+            <p:ph idx="1"/>
+          </p:nvPr>
+        </p:nvSpPr>
+        <p:spPr/>
+        <p:txBody>
+          <a:bodyPr/>
+          <a:lstStyle/>
+          <a:p>
+            <a:pPr lvl="0" indent="0" marL="0">
+              <a:spcBef>
+                <a:spcPts val="3000"/>
+              </a:spcBef>
+              <a:buNone/>
+            </a:pPr>
+            <a:r>
+              <a:rPr b="1"/>
+              <a:t>What About Human Lives?</a:t>
+            </a:r>
+          </a:p>
+          <a:p>
+            <a:pPr lvl="0" indent="0" marL="0">
+              <a:buNone/>
+            </a:pPr>
+            <a:r>
+              <a:rPr/>
+              <a:t>The 1953 flood killed 1,800 people. Material losses were 1.5–2 billion guilders. At ~100,000 guilders per life lost, the economic framing seems inadequate.</a:t>
+            </a:r>
+          </a:p>
+          <a:p>
+            <a:pPr lvl="0" indent="0" marL="0">
+              <a:buNone/>
+            </a:pPr>
+            <a:r>
+              <a:rPr/>
+              <a:t>van Dantzig’s approach: look at what the state </a:t>
+            </a:r>
+            <a:r>
+              <a:rPr i="1"/>
+              <a:t>actually spends</a:t>
+            </a:r>
+            <a:r>
+              <a:rPr/>
+              <a:t> to save lives in other domains (railway safety, factory regulations) to derive an implicit value.</a:t>
+            </a:r>
+          </a:p>
+          <a:p>
+            <a:pPr lvl="0" indent="0" marL="1270000">
+              <a:buNone/>
+            </a:pPr>
+            <a:r>
+              <a:rPr sz="2000"/>
+              <a:t>“It does not make sense to increase the dikes by an extra centimeter to account for the value of human lives.”</a:t>
+            </a:r>
+          </a:p>
+          <a:p>
+            <a:pPr lvl="0" indent="0" marL="0">
+              <a:buNone/>
+            </a:pPr>
+            <a:r>
+              <a:rPr/>
+              <a:t>But the dikes should be higher than pure material-loss optimization suggests.</a:t>
+            </a:r>
+          </a:p>
+        </p:txBody>
+      </p:sp>
+    </p:spTree>
+  </p:cSld>
+</p:sld>
+</file>
+
+<file path=ppt/slides/slide15.xml><?xml version="1.0" encoding="UTF-8"?><p:sld xmlns:a="http://schemas.openxmlformats.org/drawingml/2006/main" xmlns:r="http://schemas.openxmlformats.org/officeDocument/2006/relationships" xmlns:p="http://schemas.openxmlformats.org/presentationml/2006/main"><p:cSld><p:spTree><p:nvGrpSpPr><p:cNvPr id="1" name="" /><p:cNvGrpSpPr /><p:nvPr /></p:nvGrpSpPr><p:grpSpPr><a:xfrm><a:off x="0" y="0" /><a:ext cx="0" cy="0" /><a:chOff x="0" y="0" /><a:chExt cx="0" cy="0" /></a:xfrm></p:grpSpPr><p:sp><p:nvSpPr><p:cNvPr id="2" name="Title 1" /><p:cNvSpPr><a:spLocks noGrp="1" /></p:cNvSpPr><p:nvPr><p:ph type="title" /></p:nvPr></p:nvSpPr><p:spPr><a:xfrm><a:off x="457201" y="204787" /><a:ext cx="3008313" cy="871538" /></a:xfrm></p:spPr><p:txBody><a:bodyPr /><a:lstStyle /><a:p><a:pPr lvl="0" indent="0" marL="0"><a:buNone /></a:pPr><a:r><a:rPr /><a:t>Optimization and Policy Search</a:t></a:r></a:p></p:txBody></p:sp><mc:AlternateContent xmlns:mc="http://schemas.openxmlformats.org/markup-compatibility/2006"><mc:Choice xmlns:a14="http://schemas.microsoft.com/office/drawing/2010/main" Requires="a14"><p:sp><p:nvSpPr><p:cNvPr id="4" name="Text Placeholder 3" /><p:cNvSpPr><a:spLocks noGrp="1" /></p:cNvSpPr><p:nvPr><p:ph idx="2" sz="half" type="body" /></p:nvPr></p:nvSpPr><p:spPr /><p:txBody><a:bodyPr /><a:lstStyle /><a:p><a:pPr lvl="0" indent="0" marL="0"><a:buNone /></a:pPr><a:r><a:rPr /><a:t>van Dantzig used optimization to inform an engineering design decision. Let’s formalize the general framework.</a:t></a:r></a:p><a:p><a:pPr lvl="0" indent="0" marL="0"><a:spcBef><a:spcPts val="3000" /></a:spcBef><a:buNone /></a:pPr><a:r><a:rPr b="1" /><a:t>Optimization Fundamentals</a:t></a:r></a:p><a:p><a:pPr lvl="0" indent="0" marL="0"><a:buNone /></a:pPr><a:r><a:rPr /><a:t>Every optimization problem has the same mathematical structure:</a:t></a:r></a:p><a:p><a:pPr lvl="0" indent="0" marL="0"><a:buNone /></a:pPr><a14:m><m:oMathPara xmlns:m="http://schemas.openxmlformats.org/officeDocument/2006/math"><m:oMathParaPr><m:jc m:val="center" /></m:oMathParaPr><m:oMath><m:m><m:mPr><m:baseJc m:val="center" /><m:plcHide m:val="on" /><m:mcs><m:mc><m:mcPr><m:mcJc m:val="right" /><m:count m:val="1" /></m:mcPr></m:mc><m:mc><m:mcPr><m:mcJc m:val="left" /><m:count m:val="1" /></m:mcPr></m:mc><m:mc><m:mcPr><m:mcJc m:val="right" /><m:count m:val="1" /></m:mcPr></m:mc></m:mcs></m:mPr><m:mr><m:e><m:limLow><m:e><m:r><m:rPr><m:sty m:val="p" /></m:rPr><m:t>min</m:t></m:r></m:e><m:lim><m:r><m:rPr><m:sty m:val="b" /></m:rPr><m:t>x</m:t></m:r></m:lim></m:limLow><m:r><m:t> </m:t></m:r></m:e><m:e><m:r><m:t>f</m:t></m:r><m:d><m:dPr><m:begChr m:val="(" /><m:sepChr m:val="" /><m:endChr m:val=")" /><m:grow /></m:dPr><m:e><m:r><m:rPr><m:sty m:val="b" /></m:rPr><m:t>x</m:t></m:r></m:e></m:d></m:e></m:mr><m:mr><m:e><m:r><m:rPr><m:nor /><m:sty m:val="p" /></m:rPr><m:t>subject to</m:t></m:r><m:r><m:t> </m:t></m:r></m:e><m:e><m:sSub><m:e><m:r><m:t>g</m:t></m:r></m:e><m:sub><m:r><m:t>j</m:t></m:r></m:sub></m:sSub><m:d><m:dPr><m:begChr m:val="(" /><m:sepChr m:val="" /><m:endChr m:val=")" /><m:grow /></m:dPr><m:e><m:r><m:rPr><m:sty m:val="b" /></m:rPr><m:t>x</m:t></m:r></m:e></m:d><m:r><m:rPr><m:sty m:val="p" /></m:rPr><m:t>≤</m:t></m:r><m:r><m:t>0</m:t></m:r><m:r><m:rPr><m:sty m:val="p" /></m:rPr><m:t>,</m:t></m:r></m:e><m:e><m:r><m:t>j</m:t></m:r><m:r><m:rPr><m:sty m:val="p" /></m:rPr><m:t>=</m:t></m:r><m:r><m:t>1</m:t></m:r><m:r><m:rPr><m:sty m:val="p" /></m:rPr><m:t>,</m:t></m:r><m:r><m:rPr><m:sty m:val="p" /></m:rPr><m:t>…</m:t></m:r><m:r><m:rPr><m:sty m:val="p" /></m:rPr><m:t>,</m:t></m:r><m:r><m:t>J</m:t></m:r></m:e></m:mr><m:mr><m:e /><m:e><m:sSub><m:e><m:r><m:t>h</m:t></m:r></m:e><m:sub><m:r><m:t>k</m:t></m:r></m:sub></m:sSub><m:d><m:dPr><m:begChr m:val="(" /><m:sepChr m:val="" /><m:endChr m:val=")" /><m:grow /></m:dPr><m:e><m:r><m:rPr><m:sty m:val="b" /></m:rPr><m:t>x</m:t></m:r></m:e></m:d><m:r><m:rPr><m:sty m:val="p" /></m:rPr><m:t>=</m:t></m:r><m:r><m:t>0</m:t></m:r><m:r><m:rPr><m:sty m:val="p" /></m:rPr><m:t>,</m:t></m:r></m:e><m:e><m:r><m:t>k</m:t></m:r><m:r><m:rPr><m:sty m:val="p" /></m:rPr><m:t>=</m:t></m:r><m:r><m:t>1</m:t></m:r><m:r><m:rPr><m:sty m:val="p" /></m:rPr><m:t>,</m:t></m:r><m:r><m:rPr><m:sty m:val="p" /></m:rPr><m:t>…</m:t></m:r><m:r><m:rPr><m:sty m:val="p" /></m:rPr><m:t>,</m:t></m:r><m:r><m:t>K</m:t></m:r></m:e></m:mr></m:m></m:oMath></m:oMathPara></a14:m></a:p></p:txBody></p:sp></mc:Choice></mc:AlternateContent><p:graphicFrame><p:nvGraphicFramePr><p:cNvPr id="6" name="Content Placeholder 5" /><p:cNvGraphicFramePr><a:graphicFrameLocks noGrp="1" /></p:cNvGraphicFramePr><p:nvPr><p:ph idx="1" /></p:nvPr></p:nvGraphicFramePr><p:xfrm><a:off x="3568700" y="203200" /><a:ext cx="5105400" cy="4381500" /></p:xfrm><a:graphic><a:graphicData uri="http://schemas.openxmlformats.org/drawingml/2006/table"><a:tbl><a:tblPr firstRow="1" bandRow="1"><a:tableStyleId>{5C22544A-7EE6-4342-B048-85BDC9FD1C3A}</a:tableStyleId></a:tblPr><a:tblGrid><a:gridCol w="1701800" /><a:gridCol w="1701800" /><a:gridCol w="1701800" /></a:tblGrid><a:tr h="0"><a:tc><a:txBody><a:bodyPr /><a:lstStyle /><a:p><a:pPr lvl="0" indent="0" marL="0" algn="l"><a:buNone /></a:pPr><a:r><a:rPr /><a:t>Notation</a:t></a:r></a:p></a:txBody><a:tcPr /></a:tc><a:tc><a:txBody><a:bodyPr /><a:lstStyle /><a:p><a:pPr lvl="0" indent="0" marL="0" algn="l"><a:buNone /></a:pPr><a:r><a:rPr /><a:t>Meaning</a:t></a:r></a:p></a:txBody><a:tcPr /></a:tc><a:tc><a:txBody><a:bodyPr /><a:lstStyle /><a:p><a:pPr lvl="0" indent="0" marL="0" algn="l"><a:buNone /></a:pPr><a:r><a:rPr /><a:t>van Dantzig</a:t></a:r></a:p></a:txBody><a:tcPr /></a:tc></a:tr><a:tr h="0"><a:tc><a:txBody><a:bodyPr /><a:lstStyle /><a:p><a:pPr lvl="0" indent="0" marL="0" algn="l"><a:buNone /></a:pPr><a14:m><m:oMath xmlns:m="http://schemas.openxmlformats.org/officeDocument/2006/math"><m:r><m:rPr><m:sty m:val="b" /></m:rPr><m:t>x</m:t></m:r></m:oMath></a14:m></a:p></a:txBody></a:tc><a:tc><a:txBody><a:bodyPr /><a:lstStyle /><a:p><a:pPr lvl="0" indent="0" marL="0" algn="l"><a:buNone /></a:pPr><a:r><a:rPr /><a:t>Decision variables</a:t></a:r></a:p></a:txBody></a:tc><a:tc><a:txBody><a:bodyPr /><a:lstStyle /><a:p><a:pPr lvl="0" indent="0" marL="0" algn="l"><a:buNone /></a:pPr><a14:m><m:oMath xmlns:m="http://schemas.openxmlformats.org/officeDocument/2006/math"><m:r><m:t>X</m:t></m:r></m:oMath></a14:m><a:r><a:rPr /><a:t> = dike heightening</a:t></a:r></a:p></a:txBody></a:tc></a:tr><a:tr h="0"><a:tc><a:txBody><a:bodyPr /><a:lstStyle /><a:p><a:pPr lvl="0" indent="0" marL="0" algn="l"><a:buNone /></a:pPr><a14:m><m:oMath xmlns:m="http://schemas.openxmlformats.org/officeDocument/2006/math"><m:r><m:t>f</m:t></m:r><m:d><m:dPr><m:begChr m:val="(" /><m:sepChr m:val="" /><m:endChr m:val=")" /><m:grow /></m:dPr><m:e><m:r><m:rPr><m:sty m:val="b" /></m:rPr><m:t>x</m:t></m:r></m:e></m:d></m:oMath></a14:m></a:p></a:txBody></a:tc><a:tc><a:txBody><a:bodyPr /><a:lstStyle /><a:p><a:pPr lvl="0" indent="0" marL="0" algn="l"><a:buNone /></a:pPr><a:r><a:rPr /><a:t>Objective function</a:t></a:r></a:p></a:txBody></a:tc><a:tc><a:txBody><a:bodyPr /><a:lstStyle /><a:p><a:pPr lvl="0" indent="0" marL="0" algn="l"><a:buNone /></a:pPr><a:r><a:rPr /><a:t>Total cost </a:t></a:r><a14:m><m:oMath xmlns:m="http://schemas.openxmlformats.org/officeDocument/2006/math"><m:r><m:t>I</m:t></m:r><m:d><m:dPr><m:begChr m:val="(" /><m:sepChr m:val="" /><m:endChr m:val=")" /><m:grow /></m:dPr><m:e><m:r><m:t>X</m:t></m:r></m:e></m:d><m:r><m:rPr><m:sty m:val="p" /></m:rPr><m:t>+</m:t></m:r><m:r><m:t>L</m:t></m:r><m:d><m:dPr><m:begChr m:val="(" /><m:sepChr m:val="" /><m:endChr m:val=")" /><m:grow /></m:dPr><m:e><m:r><m:t>X</m:t></m:r></m:e></m:d></m:oMath></a14:m></a:p></a:txBody></a:tc></a:tr><a:tr h="0"><a:tc><a:txBody><a:bodyPr /><a:lstStyle /><a:p><a:pPr lvl="0" indent="0" marL="0" algn="l"><a:buNone /></a:pPr><a14:m><m:oMath xmlns:m="http://schemas.openxmlformats.org/officeDocument/2006/math"><m:sSub><m:e><m:r><m:t>g</m:t></m:r></m:e><m:sub><m:r><m:t>j</m:t></m:r></m:sub></m:sSub><m:r><m:rPr><m:sty m:val="p" /></m:rPr><m:t>≤</m:t></m:r><m:r><m:t>0</m:t></m:r></m:oMath></a14:m></a:p></a:txBody></a:tc><a:tc><a:txBody><a:bodyPr /><a:lstStyle /><a:p><a:pPr lvl="0" indent="0" marL="0" algn="l"><a:buNone /></a:pPr><a:r><a:rPr /><a:t>Constraints</a:t></a:r></a:p></a:txBody></a:tc><a:tc><a:txBody><a:bodyPr /><a:lstStyle /><a:p><a:pPr lvl="0" indent="0" marL="0" algn="l"><a:buNone /></a:pPr><a14:m><m:oMath xmlns:m="http://schemas.openxmlformats.org/officeDocument/2006/math"><m:r><m:t>X</m:t></m:r><m:r><m:rPr><m:sty m:val="p" /></m:rPr><m:t>≥</m:t></m:r><m:r><m:t>0</m:t></m:r></m:oMath></a14:m></a:p></a:txBody></a:tc></a:tr></a:tbl></a:graphicData></a:graphic></p:graphicFrame></p:spTree></p:cSld></p:sld>
+</file>
+
+<file path=ppt/slides/slide16.xml><?xml version="1.0" encoding="UTF-8"?><p:sld xmlns:a="http://schemas.openxmlformats.org/drawingml/2006/main" xmlns:r="http://schemas.openxmlformats.org/officeDocument/2006/relationships" xmlns:p="http://schemas.openxmlformats.org/presentationml/2006/main"><p:cSld><p:spTree><p:nvGrpSpPr><p:cNvPr id="1" name="" /><p:cNvGrpSpPr /><p:nvPr /></p:nvGrpSpPr><p:grpSpPr><a:xfrm><a:off x="0" y="0" /><a:ext cx="0" cy="0" /><a:chOff x="0" y="0" /><a:chExt cx="0" cy="0" /></a:xfrm></p:grpSpPr><mc:AlternateContent xmlns:mc="http://schemas.openxmlformats.org/markup-compatibility/2006"><mc:Choice xmlns:a14="http://schemas.microsoft.com/office/drawing/2010/main" Requires="a14"><p:sp><p:nvSpPr><p:cNvPr id="4" name="Text Placeholder 3" /><p:cNvSpPr><a:spLocks noGrp="1" /></p:cNvSpPr><p:nvPr><p:ph idx="2" sz="half" type="body" /></p:nvPr></p:nvSpPr><p:spPr /><p:txBody><a:bodyPr /><a:lstStyle /><a:p><a:pPr lvl="0" indent="0" marL="0"><a:spcBef><a:spcPts val="3000" /></a:spcBef><a:buNone /></a:pPr><a:r><a:rPr b="1" /><a:t>Stochastic Optimization: How Uncertainty Enters</a:t></a:r></a:p><a:p><a:pPr lvl="0" indent="0" marL="0"><a:buNone /></a:pPr><a:r><a:rPr /><a:t>van Dantzig averaged over flood uncertainty analytically. More generally, when the objective or constraints depend on uncertain quantities </a:t></a:r><a14:m><m:oMath xmlns:m="http://schemas.openxmlformats.org/officeDocument/2006/math"><m:r><m:rPr><m:sty m:val="b" /></m:rPr><m:t>θ</m:t></m:r></m:oMath></a14:m><a:r><a:rPr /><a:t>:</a:t></a:r></a:p></p:txBody></p:sp></mc:Choice></mc:AlternateContent><p:graphicFrame><p:nvGraphicFramePr><p:cNvPr id="6" name="Content Placeholder 5" /><p:cNvGraphicFramePr><a:graphicFrameLocks noGrp="1" /></p:cNvGraphicFramePr><p:nvPr><p:ph idx="1" /></p:nvPr></p:nvGraphicFramePr><p:xfrm><a:off x="3568700" y="203200" /><a:ext cx="5105400" cy="4381500" /></p:xfrm><a:graphic><a:graphicData uri="http://schemas.openxmlformats.org/drawingml/2006/table"><a:tbl><a:tblPr firstRow="1" bandRow="1"><a:tableStyleId>{5C22544A-7EE6-4342-B048-85BDC9FD1C3A}</a:tableStyleId></a:tblPr><a:tblGrid><a:gridCol w="1701800" /><a:gridCol w="1701800" /><a:gridCol w="1701800" /></a:tblGrid><a:tr h="0"><a:tc><a:txBody><a:bodyPr /><a:lstStyle /><a:p><a:pPr lvl="0" indent="0" marL="0" algn="l"><a:buNone /></a:pPr><a:r><a:rPr /><a:t>Approach</a:t></a:r></a:p></a:txBody><a:tcPr /></a:tc><a:tc><a:txBody><a:bodyPr /><a:lstStyle /><a:p><a:pPr lvl="0" indent="0" marL="0" algn="l"><a:buNone /></a:pPr><a:r><a:rPr /><a:t>Formulation</a:t></a:r></a:p></a:txBody><a:tcPr /></a:tc><a:tc><a:txBody><a:bodyPr /><a:lstStyle /><a:p><a:pPr lvl="0" indent="0" marL="0" algn="l"><a:buNone /></a:pPr><a:r><a:rPr /><a:t>Plain English</a:t></a:r></a:p></a:txBody><a:tcPr /></a:tc></a:tr><a:tr h="0"><a:tc><a:txBody><a:bodyPr /><a:lstStyle /><a:p><a:pPr lvl="0" indent="0" marL="0" algn="l"><a:buNone /></a:pPr><a:r><a:rPr /><a:t>Expected value</a:t></a:r></a:p></a:txBody></a:tc><a:tc><a:txBody><a:bodyPr /><a:lstStyle /><a:p><a:pPr lvl="0" indent="0" marL="0" algn="l"><a:buNone /></a:pPr><a14:m><m:oMath xmlns:m="http://schemas.openxmlformats.org/officeDocument/2006/math"><m:sSub><m:e><m:r><m:rPr><m:sty m:val="p" /></m:rPr><m:t>min</m:t></m:r></m:e><m:sub><m:r><m:rPr><m:sty m:val="b" /></m:rPr><m:t>x</m:t></m:r></m:sub></m:sSub><m:r><m:t> </m:t></m:r><m:r><m:rPr><m:sty m:val="p" /><m:scr m:val="double-struck" /></m:rPr><m:t>E</m:t></m:r><m:d><m:dPr><m:begChr m:val="[" /><m:sepChr m:val="" /><m:endChr m:val="]" /><m:grow /></m:dPr><m:e><m:r><m:t>f</m:t></m:r><m:d><m:dPr><m:begChr m:val="(" /><m:sepChr m:val="" /><m:endChr m:val=")" /><m:grow /></m:dPr><m:e><m:r><m:rPr><m:sty m:val="b" /></m:rPr><m:t>x</m:t></m:r><m:r><m:rPr><m:sty m:val="p" /></m:rPr><m:t>,</m:t></m:r><m:r><m:rPr><m:sty m:val="b" /></m:rPr><m:t>θ</m:t></m:r></m:e></m:d></m:e></m:d></m:oMath></a14:m></a:p></a:txBody></a:tc><a:tc><a:txBody><a:bodyPr /><a:lstStyle /><a:p><a:pPr lvl="0" indent="0" marL="0" algn="l"><a:buNone /></a:pPr><a:r><a:rPr /><a:t>Minimize the average outcome</a:t></a:r></a:p></a:txBody></a:tc></a:tr><a:tr h="0"><a:tc><a:txBody><a:bodyPr /><a:lstStyle /><a:p><a:pPr lvl="0" indent="0" marL="0" algn="l"><a:buNone /></a:pPr><a:r><a:rPr /><a:t>Chance constraint</a:t></a:r></a:p></a:txBody></a:tc><a:tc><a:txBody><a:bodyPr /><a:lstStyle /><a:p><a:pPr lvl="0" indent="0" marL="0" algn="l"><a:buNone /></a:pPr><a14:m><m:oMath xmlns:m="http://schemas.openxmlformats.org/officeDocument/2006/math"><m:r><m:rPr><m:sty m:val="p" /></m:rPr><m:t>Pr</m:t></m:r><m:d><m:dPr><m:begChr m:val="[" /><m:sepChr m:val="" /><m:endChr m:val="]" /><m:grow /></m:dPr><m:e><m:r><m:t>g</m:t></m:r><m:d><m:dPr><m:begChr m:val="(" /><m:sepChr m:val="" /><m:endChr m:val=")" /><m:grow /></m:dPr><m:e><m:r><m:rPr><m:sty m:val="b" /></m:rPr><m:t>x</m:t></m:r><m:r><m:rPr><m:sty m:val="p" /></m:rPr><m:t>,</m:t></m:r><m:r><m:rPr><m:sty m:val="b" /></m:rPr><m:t>θ</m:t></m:r></m:e></m:d><m:r><m:rPr><m:sty m:val="p" /></m:rPr><m:t>≤</m:t></m:r><m:r><m:t>0</m:t></m:r></m:e></m:d><m:r><m:rPr><m:sty m:val="p" /></m:rPr><m:t>≥</m:t></m:r><m:r><m:t>1</m:t></m:r><m:r><m:rPr><m:sty m:val="p" /></m:rPr><m:t>−</m:t></m:r><m:r><m:t>ϵ</m:t></m:r></m:oMath></a14:m></a:p></a:txBody></a:tc><a:tc><a:txBody><a:bodyPr /><a:lstStyle /><a:p><a:pPr lvl="0" indent="0" marL="0" algn="l"><a:buNone /></a:pPr><a:r><a:rPr /><a:t>Meet constraints with high probability</a:t></a:r></a:p></a:txBody></a:tc></a:tr><a:tr h="0"><a:tc><a:txBody><a:bodyPr /><a:lstStyle /><a:p><a:pPr lvl="0" indent="0" marL="0" algn="l"><a:buNone /></a:pPr><a:r><a:rPr /><a:t>Robust</a:t></a:r></a:p></a:txBody></a:tc><a:tc><a:txBody><a:bodyPr /><a:lstStyle /><a:p><a:pPr lvl="0" indent="0" marL="0" algn="l"><a:buNone /></a:pPr><a14:m><m:oMath xmlns:m="http://schemas.openxmlformats.org/officeDocument/2006/math"><m:sSub><m:e><m:r><m:rPr><m:sty m:val="p" /></m:rPr><m:t>min</m:t></m:r></m:e><m:sub><m:r><m:rPr><m:sty m:val="b" /></m:rPr><m:t>x</m:t></m:r></m:sub></m:sSub><m:sSub><m:e><m:r><m:rPr><m:sty m:val="p" /></m:rPr><m:t>max</m:t></m:r></m:e><m:sub><m:r><m:rPr><m:sty m:val="b" /></m:rPr><m:t>θ</m:t></m:r></m:sub></m:sSub><m:r><m:t>f</m:t></m:r><m:d><m:dPr><m:begChr m:val="(" /><m:sepChr m:val="" /><m:endChr m:val=")" /><m:grow /></m:dPr><m:e><m:r><m:rPr><m:sty m:val="b" /></m:rPr><m:t>x</m:t></m:r><m:r><m:rPr><m:sty m:val="p" /></m:rPr><m:t>,</m:t></m:r><m:r><m:rPr><m:sty m:val="b" /></m:rPr><m:t>θ</m:t></m:r></m:e></m:d></m:oMath></a14:m></a:p></a:txBody></a:tc><a:tc><a:txBody><a:bodyPr /><a:lstStyle /><a:p><a:pPr lvl="0" indent="0" marL="0" algn="l"><a:buNone /></a:pPr><a:r><a:rPr /><a:t>Minimize the worst case</a:t></a:r></a:p></a:txBody></a:tc></a:tr></a:tbl></a:graphicData></a:graphic></p:graphicFrame></p:spTree></p:cSld></p:sld>
+</file>
+
+<file path=ppt/slides/slide17.xml><?xml version="1.0" encoding="utf-8"?>
+<p:sld xmlns:a="http://schemas.openxmlformats.org/drawingml/2006/main" xmlns:r="http://schemas.openxmlformats.org/officeDocument/2006/relationships" xmlns:p="http://schemas.openxmlformats.org/presentationml/2006/main">
+  <p:cSld>
+    <p:spTree>
+      <p:nvGrpSpPr>
+        <p:cNvPr id="1" name=""/>
+        <p:cNvGrpSpPr/>
+        <p:nvPr/>
+      </p:nvGrpSpPr>
+      <p:grpSpPr>
+        <a:xfrm>
+          <a:off x="0" y="0"/>
+          <a:ext cx="0" cy="0"/>
+          <a:chOff x="0" y="0"/>
+          <a:chExt cx="0" cy="0"/>
+        </a:xfrm>
+      </p:grpSpPr>
+      <mc:AlternateContent xmlns:mc="http://schemas.openxmlformats.org/markup-compatibility/2006">
+        <mc:Choice xmlns:a14="http://schemas.microsoft.com/office/drawing/2010/main" Requires="a14">
+          <p:sp>
+            <p:nvSpPr>
+              <p:cNvPr id="3" name="Content Placeholder 2"/>
+              <p:cNvSpPr>
+                <a:spLocks noGrp="1"/>
+              </p:cNvSpPr>
+              <p:nvPr>
+                <p:ph idx="1"/>
+              </p:nvPr>
+            </p:nvSpPr>
+            <p:spPr/>
+            <p:txBody>
+              <a:bodyPr/>
+              <a:lstStyle/>
+              <a:p>
+                <a:pPr lvl="0" indent="0" marL="0">
+                  <a:buNone/>
+                </a:pPr>
+                <a:r>
+                  <a:rPr/>
+                  <a:t>van Dantzig used </a:t>
+                </a:r>
+                <a:r>
+                  <a:rPr b="1"/>
+                  <a:t>expected value</a:t>
+                </a:r>
+                <a:r>
+                  <a:rPr/>
+                  <a:t> for losses and </a:t>
+                </a:r>
+                <a:r>
+                  <a:rPr b="1"/>
+                  <a:t>robust</a:t>
+                </a:r>
+                <a:r>
+                  <a:rPr/>
+                  <a:t> (“safe side”) for parameters — decades before “robust optimization” had a name.</a:t>
+                </a:r>
+              </a:p>
+              <a:p>
+                <a:pPr lvl="0" indent="0" marL="0">
+                  <a:spcBef>
+                    <a:spcPts val="3000"/>
+                  </a:spcBef>
+                  <a:buNone/>
+                </a:pPr>
+                <a:r>
+                  <a:rPr b="1"/>
+                  <a:t>Classes of Optimization Algorithms</a:t>
+                </a:r>
+              </a:p>
+              <a:p>
+                <a:pPr lvl="0" indent="0" marL="0">
+                  <a:buNone/>
+                </a:pPr>
+                <a:r>
+                  <a:rPr/>
+                  <a:t>The choice of algorithm depends on what structure is available in </a:t>
+                </a:r>
+                <a14:m>
+                  <m:oMath xmlns:m="http://schemas.openxmlformats.org/officeDocument/2006/math">
+                    <m:r>
+                      <m:t>f</m:t>
+                    </m:r>
+                    <m:d>
+                      <m:dPr>
+                        <m:begChr m:val="("/>
+                        <m:sepChr m:val=""/>
+                        <m:endChr m:val=")"/>
+                        <m:grow/>
+                      </m:dPr>
+                      <m:e>
+                        <m:r>
+                          <m:rPr>
+                            <m:sty m:val="b"/>
+                          </m:rPr>
+                          <m:t>x</m:t>
+                        </m:r>
+                      </m:e>
+                    </m:d>
+                  </m:oMath>
+                </a14:m>
+                <a:r>
+                  <a:rPr/>
+                  <a:t>:</a:t>
+                </a:r>
+              </a:p>
+              <a:p>
+                <a:pPr lvl="0" indent="0" marL="0">
+                  <a:buNone/>
+                </a:pPr>
+                <a:r>
+                  <a:rPr b="1"/>
+                  <a:t>The less structure you can exploit, the more computation you need.</a:t>
+                </a:r>
+              </a:p>
+              <a:p>
+                <a:pPr lvl="0" indent="0" marL="0">
+                  <a:spcBef>
+                    <a:spcPts val="3000"/>
+                  </a:spcBef>
+                  <a:buNone/>
+                </a:pPr>
+                <a:r>
+                  <a:rPr b="1"/>
+                  <a:t>Optimization vs. Policy Search</a:t>
+                </a:r>
+              </a:p>
+              <a:p>
+                <a:pPr lvl="0" indent="0" marL="0">
+                  <a:buNone/>
+                </a:pPr>
+                <a:r>
+                  <a:rPr/>
+                  <a:t>“Optimization” implies we found THE optimal answer. But it’s only optimal within our model and assumptions.</a:t>
+                </a:r>
+              </a:p>
+              <a:p>
+                <a:pPr lvl="0" indent="0" marL="0">
+                  <a:buNone/>
+                </a:pPr>
+                <a:r>
+                  <a:rPr/>
+                  <a:t>I prefer the term </a:t>
+                </a:r>
+                <a:r>
+                  <a:rPr b="1"/>
+                  <a:t>policy search</a:t>
+                </a:r>
+                <a:r>
+                  <a:rPr/>
+                  <a:t>: using computers to suggest promising alternatives.</a:t>
+                </a:r>
+              </a:p>
+              <a:p>
+                <a:pPr lvl="0"/>
+                <a:r>
+                  <a:rPr/>
+                  <a:t>van Dantzig’s answer was optimal — in a model with binary damage and exponential floods</a:t>
+                </a:r>
+              </a:p>
+              <a:p>
+                <a:pPr lvl="0"/>
+                <a:r>
+                  <a:rPr/>
+                  <a:t>In practice, a set of good options to evaluate beats a single “optimal” answer</a:t>
+                </a:r>
+              </a:p>
+            </p:txBody>
+          </p:sp>
+        </mc:Choice>
+      </mc:AlternateContent>
+    </p:spTree>
+  </p:cSld>
+  <p:timing>
+    <p:tnLst>
+      <p:par>
+        <p:cTn id="1" dur="indefinite" restart="never" nodeType="tmRoot">
+          <p:childTnLst>
+            <p:seq concurrent="1" nextAc="seek">
+              <p:cTn id="2" dur="indefinite" nodeType="mainSeq">
+                <p:childTnLst>
+                  <p:par>
+                    <p:cTn id="3" fill="hold">
+                      <p:stCondLst>
+                        <p:cond delay="indefinite"/>
+                      </p:stCondLst>
+                      <p:childTnLst>
+                        <p:par>
+                          <p:cTn id="4" fill="hold">
+                            <p:stCondLst>
+                              <p:cond delay="0"/>
+                            </p:stCondLst>
+                            <p:childTnLst>
+                              <p:par>
+                                <p:cTn id="5" presetID="1" presetClass="entr" presetSubtype="0" fill="hold" grpId="0" nodeType="clickEffect">
+                                  <p:stCondLst>
+                                    <p:cond delay="0"/>
+                                  </p:stCondLst>
+                                  <p:childTnLst>
+                                    <p:set>
+                                      <p:cBhvr>
+                                        <p:cTn id="6" dur="1" fill="hold">
+                                          <p:stCondLst>
+                                            <p:cond delay="0"/>
+                                          </p:stCondLst>
+                                        </p:cTn>
+                                        <p:tgtEl>
+                                          <p:spTgt spid="3">
+                                            <p:txEl>
+                                              <p:pRg st="7" end="7"/>
+                                            </p:txEl>
+                                          </p:spTgt>
+                                        </p:tgtEl>
+                                        <p:attrNameLst>
+                                          <p:attrName>style.visibility</p:attrName>
+                                        </p:attrNameLst>
+                                      </p:cBhvr>
+                                      <p:to>
+                                        <p:strVal val="visible"/>
+                                      </p:to>
+                                    </p:set>
+                                  </p:childTnLst>
+                                </p:cTn>
+                              </p:par>
+                            </p:childTnLst>
+                          </p:cTn>
+                        </p:par>
+                      </p:childTnLst>
+                    </p:cTn>
+                  </p:par>
+                  <p:par>
+                    <p:cTn id="7" fill="hold">
+                      <p:stCondLst>
+                        <p:cond delay="indefinite"/>
+                      </p:stCondLst>
+                      <p:childTnLst>
+                        <p:par>
+                          <p:cTn id="8" fill="hold">
+                            <p:stCondLst>
+                              <p:cond delay="0"/>
+                            </p:stCondLst>
+                            <p:childTnLst>
+                              <p:par>
+                                <p:cTn id="9" presetID="1" presetClass="entr" presetSubtype="0" fill="hold" grpId="0" nodeType="clickEffect">
+                                  <p:stCondLst>
+                                    <p:cond delay="0"/>
+                                  </p:stCondLst>
+                                  <p:childTnLst>
+                                    <p:set>
+                                      <p:cBhvr>
+                                        <p:cTn id="10" dur="1" fill="hold">
+                                          <p:stCondLst>
+                                            <p:cond delay="0"/>
+                                          </p:stCondLst>
+                                        </p:cTn>
+                                        <p:tgtEl>
+                                          <p:spTgt spid="3">
+                                            <p:txEl>
+                                              <p:pRg st="8" end="8"/>
+                                            </p:txEl>
+                                          </p:spTgt>
+                                        </p:tgtEl>
+                                        <p:attrNameLst>
+                                          <p:attrName>style.visibility</p:attrName>
+                                        </p:attrNameLst>
+                                      </p:cBhvr>
+                                      <p:to>
+                                        <p:strVal val="visible"/>
+                                      </p:to>
+                                    </p:set>
+                                  </p:childTnLst>
+                                </p:cTn>
+                              </p:par>
+                            </p:childTnLst>
+                          </p:cTn>
+                        </p:par>
+                      </p:childTnLst>
+                    </p:cTn>
+                  </p:par>
+                </p:childTnLst>
+              </p:cTn>
+              <p:prevCondLst>
+                <p:cond evt="onPrev" delay="0">
+                  <p:tgtEl>
+                    <p:sldTgt/>
+                  </p:tgtEl>
+                </p:cond>
+              </p:prevCondLst>
+              <p:nextCondLst>
+                <p:cond evt="onNext" delay="0">
+                  <p:tgtEl>
+                    <p:sldTgt/>
+                  </p:tgtEl>
+                </p:cond>
+              </p:nextCondLst>
+            </p:seq>
+          </p:childTnLst>
+        </p:cTn>
+      </p:par>
+    </p:tnLst>
+    <p:bldLst>
+      <p:bldP spid="3" grpId="0" uiExpand="1" build="p"/>
+    </p:bldLst>
+  </p:timing>
+</p:sld>
+</file>
+
+<file path=ppt/slides/slide18.xml><?xml version="1.0" encoding="utf-8"?>
+<p:sld xmlns:a="http://schemas.openxmlformats.org/drawingml/2006/main" xmlns:r="http://schemas.openxmlformats.org/officeDocument/2006/relationships" xmlns:p="http://schemas.openxmlformats.org/presentationml/2006/main">
+  <p:cSld>
+    <p:spTree>
+      <p:nvGrpSpPr>
+        <p:cNvPr id="1" name=""/>
+        <p:cNvGrpSpPr/>
+        <p:nvPr/>
+      </p:nvGrpSpPr>
+      <p:grpSpPr>
+        <a:xfrm>
+          <a:off x="0" y="0"/>
+          <a:ext cx="0" cy="0"/>
+          <a:chOff x="0" y="0"/>
+          <a:chExt cx="0" cy="0"/>
+        </a:xfrm>
+      </p:grpSpPr>
+      <p:sp>
+        <p:nvSpPr>
+          <p:cNvPr id="2" name="Title 1"/>
+          <p:cNvSpPr>
+            <a:spLocks noGrp="1"/>
+          </p:cNvSpPr>
+          <p:nvPr>
+            <p:ph type="title"/>
+          </p:nvPr>
+        </p:nvSpPr>
+        <p:spPr/>
+        <p:txBody>
+          <a:bodyPr/>
+          <a:lstStyle/>
+          <a:p>
+            <a:pPr lvl="0" indent="0" marL="0">
+              <a:buNone/>
+            </a:pPr>
+            <a:r>
+              <a:rPr/>
+              <a:t>Evaluating Optimization Claims</a:t>
+            </a:r>
+          </a:p>
+        </p:txBody>
+      </p:sp>
+      <p:sp>
+        <p:nvSpPr>
+          <p:cNvPr id="3" name="Content Placeholder 2"/>
+          <p:cNvSpPr>
+            <a:spLocks noGrp="1"/>
+          </p:cNvSpPr>
+          <p:nvPr>
+            <p:ph idx="1"/>
+          </p:nvPr>
+        </p:nvSpPr>
+        <p:spPr/>
+        <p:txBody>
+          <a:bodyPr/>
+          <a:lstStyle/>
+          <a:p>
+            <a:pPr lvl="0" indent="0" marL="0">
+              <a:spcBef>
+                <a:spcPts val="3000"/>
+              </a:spcBef>
+              <a:buNone/>
+            </a:pPr>
+            <a:r>
+              <a:rPr b="1"/>
+              <a:t>Four Key Questions</a:t>
+            </a:r>
+          </a:p>
+          <a:p>
+            <a:pPr lvl="0" indent="0" marL="0">
+              <a:buNone/>
+            </a:pPr>
+            <a:r>
+              <a:rPr/>
+              <a:t>When someone presents an “optimal” solution:</a:t>
+            </a:r>
+          </a:p>
+          <a:p>
+            <a:pPr lvl="0" indent="-342900" marL="342900">
+              <a:buAutoNum type="arabicPeriod"/>
+            </a:pPr>
+            <a:r>
+              <a:rPr b="1"/>
+              <a:t>Decision variables:</a:t>
+            </a:r>
+            <a:r>
+              <a:rPr/>
+              <a:t> What levers are we pulling? What was left out?</a:t>
+            </a:r>
+          </a:p>
+          <a:p>
+            <a:pPr lvl="0" indent="-342900" marL="342900">
+              <a:buAutoNum type="arabicPeriod"/>
+            </a:pPr>
+            <a:r>
+              <a:rPr b="1"/>
+              <a:t>Objective:</a:t>
+            </a:r>
+            <a:r>
+              <a:rPr/>
+              <a:t> What are we optimizing? Whose costs and benefits count? What isn’t monetized?</a:t>
+            </a:r>
+          </a:p>
+          <a:p>
+            <a:pPr lvl="0" indent="-342900" marL="342900">
+              <a:buAutoNum type="arabicPeriod"/>
+            </a:pPr>
+            <a:r>
+              <a:rPr b="1"/>
+              <a:t>Constraints:</a:t>
+            </a:r>
+            <a:r>
+              <a:rPr/>
+              <a:t> Are these real physical limits or modeling assumptions?</a:t>
+            </a:r>
+          </a:p>
+          <a:p>
+            <a:pPr lvl="0" indent="-342900" marL="342900">
+              <a:buAutoNum type="arabicPeriod"/>
+            </a:pPr>
+            <a:r>
+              <a:rPr b="1"/>
+              <a:t>Scenarios:</a:t>
+            </a:r>
+            <a:r>
+              <a:rPr/>
+              <a:t> Over what states of the world is this “optimal”? One scenario, a few, or a full representation of uncertainty?</a:t>
+            </a:r>
+          </a:p>
+          <a:p>
+            <a:pPr lvl="0" indent="0" marL="0">
+              <a:spcBef>
+                <a:spcPts val="3000"/>
+              </a:spcBef>
+              <a:buNone/>
+            </a:pPr>
+            <a:r>
+              <a:rPr b="1"/>
+              <a:t>What’s Next</a:t>
+            </a:r>
+          </a:p>
+          <a:p>
+            <a:pPr lvl="0"/>
+            <a:r>
+              <a:rPr b="1"/>
+              <a:t>Wednesday:</a:t>
+            </a:r>
+            <a:r>
+              <a:rPr/>
+              <a:t> Exam 1 (covers Weeks 1–4)</a:t>
+            </a:r>
+          </a:p>
+          <a:p>
+            <a:pPr lvl="0"/>
+            <a:r>
+              <a:rPr b="1"/>
+              <a:t>Friday:</a:t>
+            </a:r>
+            <a:r>
+              <a:rPr/>
+              <a:t> Lab 5 — Policy search with ICOW</a:t>
+            </a:r>
+          </a:p>
+          <a:p>
+            <a:pPr lvl="0"/>
+            <a:r>
+              <a:rPr b="1"/>
+              <a:t>Coming up in Module 2:</a:t>
+            </a:r>
+            <a:r>
+              <a:rPr/>
+              <a:t> sensitivity analysis, value of information, robustness — all about what happens when your model assumptions are wrong</a:t>
+            </a:r>
+          </a:p>
+          <a:p>
+            <a:pPr lvl="0" indent="0" marL="0">
+              <a:spcBef>
+                <a:spcPts val="3000"/>
+              </a:spcBef>
+              <a:buNone/>
+            </a:pPr>
+            <a:r>
+              <a:rPr b="1"/>
+              <a:t>References</a:t>
+            </a:r>
+          </a:p>
+          <a:p>
+            <a:pPr lvl="0" indent="0" marL="0">
+              <a:buNone/>
+            </a:pPr>
+            <a:r>
+              <a:rPr/>
+              <a:t>Dantzig, D. van. 1956. “Economic Decision Problems for Flood Prevention.” </a:t>
+            </a:r>
+            <a:r>
+              <a:rPr i="1"/>
+              <a:t>Econometrica</a:t>
+            </a:r>
+            <a:r>
+              <a:rPr/>
+              <a:t> 24 (3): 276–87. </a:t>
+            </a:r>
+            <a:r>
+              <a:rPr>
+                <a:hlinkClick r:id="rId3"/>
+              </a:rPr>
+              <a:t>https://doi.org/10.2307/1911632</a:t>
+            </a:r>
+            <a:r>
+              <a:rPr/>
+              <a:t>.</a:t>
             </a:r>
           </a:p>
         </p:txBody>
@@ -3209,6 +7469,31 @@
       </p:grpSpPr>
       <p:sp>
         <p:nvSpPr>
+          <p:cNvPr id="2" name="Title 1"/>
+          <p:cNvSpPr>
+            <a:spLocks noGrp="1"/>
+          </p:cNvSpPr>
+          <p:nvPr>
+            <p:ph type="title"/>
+          </p:nvPr>
+        </p:nvSpPr>
+        <p:spPr/>
+        <p:txBody>
+          <a:bodyPr/>
+          <a:lstStyle/>
+          <a:p>
+            <a:pPr lvl="0" indent="0" marL="0">
+              <a:buNone/>
+            </a:pPr>
+            <a:r>
+              <a:rPr/>
+              <a:t>The 1953 North Sea Flood</a:t>
+            </a:r>
+          </a:p>
+        </p:txBody>
+      </p:sp>
+      <p:sp>
+        <p:nvSpPr>
           <p:cNvPr id="3" name="Content Placeholder 2"/>
           <p:cNvSpPr>
             <a:spLocks noGrp="1"/>
@@ -3223,15 +7508,14 @@
           <a:lstStyle/>
           <a:p>
             <a:pPr lvl="0" indent="0" marL="0">
+              <a:spcBef>
+                <a:spcPts val="3000"/>
+              </a:spcBef>
               <a:buNone/>
             </a:pPr>
             <a:r>
               <a:rPr b="1"/>
-              <a:t>Draft Material:</a:t>
-            </a:r>
-            <a:r>
-              <a:rPr/>
-              <a:t> This content is under development and subject to change.</a:t>
+              <a:t>February 1, 1953</a:t>
             </a:r>
           </a:p>
         </p:txBody>
@@ -3258,52 +7542,116 @@
           <a:chExt cx="0" cy="0"/>
         </a:xfrm>
       </p:grpSpPr>
-      <p:sp>
-        <p:nvSpPr>
-          <p:cNvPr id="2" name="Title 1"/>
-          <p:cNvSpPr>
-            <a:spLocks noGrp="1"/>
-          </p:cNvSpPr>
-          <p:nvPr>
-            <p:ph type="title"/>
-          </p:nvPr>
-        </p:nvSpPr>
-        <p:spPr/>
-        <p:txBody>
-          <a:bodyPr/>
-          <a:lstStyle/>
-          <a:p>
-            <a:pPr lvl="0" indent="0" marL="0">
+      <p:pic>
+        <p:nvPicPr>
+          <p:cNvPr descr="watersnoodramp-1953.gif" id="0" name="Picture 1"/>
+          <p:cNvPicPr>
+            <a:picLocks noGrp="1" noChangeAspect="1"/>
+          </p:cNvPicPr>
+          <p:nvPr/>
+        </p:nvPicPr>
+        <p:blipFill>
+          <a:blip r:embed="rId2"/>
+          <a:stretch>
+            <a:fillRect/>
+          </a:stretch>
+        </p:blipFill>
+        <p:spPr bwMode="auto">
+          <a:xfrm>
+            <a:off x="457200" y="1295400"/>
+            <a:ext cx="4038600" cy="2692400"/>
+          </a:xfrm>
+          <a:prstGeom prst="rect">
+            <a:avLst/>
+          </a:prstGeom>
+          <a:noFill/>
+          <a:ln w="9525">
+            <a:noFill/>
+            <a:headEnd/>
+            <a:tailEnd/>
+          </a:ln>
+        </p:spPr>
+      </p:pic>
+      <p:sp>
+        <p:nvSpPr>
+          <p:cNvPr id="1" name="TextBox 3"/>
+          <p:cNvSpPr txBox="1"/>
+          <p:nvPr/>
+        </p:nvSpPr>
+        <p:spPr>
+          <a:xfrm>
+            <a:off x="457200" y="4076700"/>
+            <a:ext cx="4038600" cy="508000"/>
+          </a:xfrm>
+          <a:prstGeom prst="rect">
+            <a:avLst/>
+          </a:prstGeom>
+          <a:noFill/>
+        </p:spPr>
+        <p:txBody>
+          <a:bodyPr/>
+          <a:lstStyle/>
+          <a:p>
+            <a:pPr lvl="0" indent="0" marL="0" algn="ctr">
               <a:buNone/>
             </a:pPr>
             <a:r>
               <a:rPr/>
-              <a:t>Preparation</a:t>
-            </a:r>
-          </a:p>
-        </p:txBody>
-      </p:sp>
-      <p:sp>
-        <p:nvSpPr>
-          <p:cNvPr id="3" name="Content Placeholder 2"/>
-          <p:cNvSpPr>
-            <a:spLocks noGrp="1"/>
-          </p:cNvSpPr>
-          <p:nvPr>
-            <p:ph idx="1"/>
-          </p:nvPr>
-        </p:nvSpPr>
-        <p:spPr/>
-        <p:txBody>
-          <a:bodyPr/>
-          <a:lstStyle/>
-          <a:p>
-            <a:pPr lvl="0" indent="0" marL="0">
-              <a:buNone/>
-            </a:pPr>
+              <a:t>Flooding in the Netherlands, 1953. Source: </a:t>
+            </a:r>
+            <a:r>
+              <a:rPr>
+                <a:hlinkClick r:id="rId3"/>
+              </a:rPr>
+              <a:t>Wikimedia Commons</a:t>
+            </a:r>
             <a:r>
               <a:rPr/>
-              <a:t>Read a part of van Dantzig (1956) and then we will revisit it in the reading.</a:t>
+              <a:t>, public domain.</a:t>
+            </a:r>
+          </a:p>
+        </p:txBody>
+      </p:sp>
+      <p:sp>
+        <p:nvSpPr>
+          <p:cNvPr id="4" name="Content Placeholder 3"/>
+          <p:cNvSpPr>
+            <a:spLocks noGrp="1"/>
+          </p:cNvSpPr>
+          <p:nvPr>
+            <p:ph idx="2" sz="half"/>
+          </p:nvPr>
+        </p:nvSpPr>
+        <p:spPr/>
+        <p:txBody>
+          <a:bodyPr/>
+          <a:lstStyle/>
+          <a:p>
+            <a:pPr lvl="0"/>
+            <a:r>
+              <a:rPr/>
+              <a:t>1,800+ people killed</a:t>
+            </a:r>
+          </a:p>
+          <a:p>
+            <a:pPr lvl="0"/>
+            <a:r>
+              <a:rPr/>
+              <a:t>150,000 hectares flooded</a:t>
+            </a:r>
+          </a:p>
+          <a:p>
+            <a:pPr lvl="0"/>
+            <a:r>
+              <a:rPr/>
+              <a:t>9,000 buildings destroyed</a:t>
+            </a:r>
+          </a:p>
+          <a:p>
+            <a:pPr lvl="0"/>
+            <a:r>
+              <a:rPr/>
+              <a:t>Economic loss: 1.5–2 billion guilders</a:t>
             </a:r>
           </a:p>
         </p:txBody>
@@ -3332,12 +7680,12 @@
       </p:grpSpPr>
       <p:sp>
         <p:nvSpPr>
-          <p:cNvPr id="2" name="Title 1"/>
-          <p:cNvSpPr>
-            <a:spLocks noGrp="1"/>
-          </p:cNvSpPr>
-          <p:nvPr>
-            <p:ph type="title"/>
+          <p:cNvPr id="4" name="Text Placeholder 3"/>
+          <p:cNvSpPr>
+            <a:spLocks noGrp="1"/>
+          </p:cNvSpPr>
+          <p:nvPr>
+            <p:ph idx="2" sz="half" type="body"/>
           </p:nvPr>
         </p:nvSpPr>
         <p:spPr/>
@@ -3350,32 +7698,168 @@
             </a:pPr>
             <a:r>
               <a:rPr/>
-              <a:t>Coming Soon</a:t>
-            </a:r>
-          </a:p>
-        </p:txBody>
-      </p:sp>
-      <p:sp>
-        <p:nvSpPr>
-          <p:cNvPr id="3" name="Content Placeholder 2"/>
-          <p:cNvSpPr>
-            <a:spLocks noGrp="1"/>
-          </p:cNvSpPr>
-          <p:nvPr>
-            <p:ph idx="1"/>
-          </p:nvPr>
-        </p:nvSpPr>
-        <p:spPr/>
-        <p:txBody>
-          <a:bodyPr/>
-          <a:lstStyle/>
+              <a:t>The Dutch government forms the </a:t>
+            </a:r>
+            <a:r>
+              <a:rPr b="1"/>
+              <a:t>Delta Commission</a:t>
+            </a:r>
+            <a:r>
+              <a:rPr/>
+              <a:t>. Their charge: </a:t>
+            </a:r>
+            <a:r>
+              <a:rPr i="1"/>
+              <a:t>make sure this never happens again.</a:t>
+            </a:r>
+          </a:p>
           <a:p>
             <a:pPr lvl="0" indent="0" marL="0">
+              <a:spcBef>
+                <a:spcPts val="3000"/>
+              </a:spcBef>
               <a:buNone/>
             </a:pPr>
             <a:r>
+              <a:rPr b="1"/>
+              <a:t>“How High Should We Build the Dikes?”</a:t>
+            </a:r>
+          </a:p>
+          <a:p>
+            <a:pPr lvl="0" indent="0" marL="0">
+              <a:buNone/>
+            </a:pPr>
+            <a:r>
               <a:rPr/>
-              <a:t>This lecture is under development.</a:t>
+              <a:t>Historical approach: build to the height of the highest observed flood.</a:t>
+            </a:r>
+          </a:p>
+          <a:p>
+            <a:pPr lvl="0" indent="0" marL="0">
+              <a:buNone/>
+            </a:pPr>
+            <a:r>
+              <a:rPr b="1"/>
+              <a:t>Problem:</a:t>
+            </a:r>
+            <a:r>
+              <a:rPr/>
+              <a:t> there is </a:t>
+            </a:r>
+            <a:r>
+              <a:rPr b="1"/>
+              <a:t>no upper limit</a:t>
+            </a:r>
+            <a:r>
+              <a:rPr/>
+              <a:t> to flood height — every height has a positive exceedance probability.</a:t>
+            </a:r>
+          </a:p>
+          <a:p>
+            <a:pPr lvl="0"/>
+            <a:r>
+              <a:rPr/>
+              <a:t>Higher dikes cost more money to build</a:t>
+            </a:r>
+          </a:p>
+          <a:p>
+            <a:pPr lvl="0"/>
+            <a:r>
+              <a:rPr/>
+              <a:t>Lower dikes mean more expected flood damage</a:t>
+            </a:r>
+          </a:p>
+          <a:p>
+            <a:pPr lvl="0" indent="0" marL="0">
+              <a:buNone/>
+            </a:pPr>
+            <a:r>
+              <a:rPr b="1"/>
+              <a:t>The question:</a:t>
+            </a:r>
+            <a:r>
+              <a:rPr/>
+              <a:t> what is the </a:t>
+            </a:r>
+            <a:r>
+              <a:rPr i="1"/>
+              <a:t>right</a:t>
+            </a:r>
+            <a:r>
+              <a:rPr/>
+              <a:t> height?</a:t>
+            </a:r>
+          </a:p>
+          <a:p>
+            <a:pPr lvl="0" indent="0" marL="0">
+              <a:spcBef>
+                <a:spcPts val="3000"/>
+              </a:spcBef>
+              <a:buNone/>
+            </a:pPr>
+            <a:r>
+              <a:rPr b="1"/>
+              <a:t>Review: Our System Dynamics Notation</a:t>
+            </a:r>
+          </a:p>
+        </p:txBody>
+      </p:sp>
+      <p:pic>
+        <p:nvPicPr>
+          <p:cNvPr descr="bayes-rdm-I.png" id="0" name="Picture 1"/>
+          <p:cNvPicPr>
+            <a:picLocks noGrp="1" noChangeAspect="1"/>
+          </p:cNvPicPr>
+          <p:nvPr/>
+        </p:nvPicPr>
+        <p:blipFill>
+          <a:blip r:embed="rId3"/>
+          <a:stretch>
+            <a:fillRect/>
+          </a:stretch>
+        </p:blipFill>
+        <p:spPr bwMode="auto">
+          <a:xfrm>
+            <a:off x="3568700" y="977900"/>
+            <a:ext cx="5105400" cy="2324100"/>
+          </a:xfrm>
+          <a:prstGeom prst="rect">
+            <a:avLst/>
+          </a:prstGeom>
+          <a:noFill/>
+          <a:ln w="9525">
+            <a:noFill/>
+            <a:headEnd/>
+            <a:tailEnd/>
+          </a:ln>
+        </p:spPr>
+      </p:pic>
+      <p:sp>
+        <p:nvSpPr>
+          <p:cNvPr id="1" name="TextBox 3"/>
+          <p:cNvSpPr txBox="1"/>
+          <p:nvPr/>
+        </p:nvSpPr>
+        <p:spPr>
+          <a:xfrm>
+            <a:off x="3568700" y="4076700"/>
+            <a:ext cx="5105400" cy="508000"/>
+          </a:xfrm>
+          <a:prstGeom prst="rect">
+            <a:avLst/>
+          </a:prstGeom>
+          <a:noFill/>
+        </p:spPr>
+        <p:txBody>
+          <a:bodyPr/>
+          <a:lstStyle/>
+          <a:p>
+            <a:pPr lvl="0" indent="0" marL="0" algn="ctr">
+              <a:buNone/>
+            </a:pPr>
+            <a:r>
+              <a:rPr/>
+              <a:t>Figure 1: Notation for our system dynamics. Where does optimization fit?</a:t>
             </a:r>
           </a:p>
         </p:txBody>
@@ -3404,6 +7888,346 @@
       </p:grpSpPr>
       <p:sp>
         <p:nvSpPr>
+          <p:cNvPr id="3" name="Content Placeholder 2"/>
+          <p:cNvSpPr>
+            <a:spLocks noGrp="1"/>
+          </p:cNvSpPr>
+          <p:nvPr>
+            <p:ph idx="1"/>
+          </p:nvPr>
+        </p:nvSpPr>
+        <p:spPr/>
+        <p:txBody>
+          <a:bodyPr/>
+          <a:lstStyle/>
+          <a:p>
+            <a:pPr lvl="0" indent="0" marL="0">
+              <a:spcBef>
+                <a:spcPts val="3000"/>
+              </a:spcBef>
+              <a:buNone/>
+            </a:pPr>
+            <a:r>
+              <a:rPr b="1"/>
+              <a:t>Structure of an Optimization Problem</a:t>
+            </a:r>
+          </a:p>
+          <a:p>
+            <a:pPr lvl="0" indent="0" marL="0">
+              <a:buNone/>
+            </a:pPr>
+            <a:r>
+              <a:rPr/>
+              <a:t>Every optimization problem has four components:</a:t>
+            </a:r>
+          </a:p>
+          <a:p>
+            <a:pPr lvl="0" indent="-342900" marL="342900">
+              <a:buAutoNum type="arabicPeriod"/>
+            </a:pPr>
+            <a:r>
+              <a:rPr b="1"/>
+              <a:t>Decision variables:</a:t>
+            </a:r>
+            <a:r>
+              <a:rPr/>
+              <a:t> What can we control?</a:t>
+            </a:r>
+          </a:p>
+          <a:p>
+            <a:pPr lvl="0" indent="-342900" marL="342900">
+              <a:buAutoNum type="arabicPeriod"/>
+            </a:pPr>
+            <a:r>
+              <a:rPr b="1"/>
+              <a:t>Objective function:</a:t>
+            </a:r>
+            <a:r>
+              <a:rPr/>
+              <a:t> What are we trying to minimize or maximize?</a:t>
+            </a:r>
+          </a:p>
+          <a:p>
+            <a:pPr lvl="0" indent="-342900" marL="342900">
+              <a:buAutoNum type="arabicPeriod"/>
+            </a:pPr>
+            <a:r>
+              <a:rPr b="1"/>
+              <a:t>Constraints:</a:t>
+            </a:r>
+            <a:r>
+              <a:rPr/>
+              <a:t> What limits our choices?</a:t>
+            </a:r>
+          </a:p>
+          <a:p>
+            <a:pPr lvl="0" indent="-342900" marL="342900">
+              <a:buAutoNum type="arabicPeriod"/>
+            </a:pPr>
+            <a:r>
+              <a:rPr b="1"/>
+              <a:t>Scenarios / states of the world:</a:t>
+            </a:r>
+            <a:r>
+              <a:rPr/>
+              <a:t> What uncertainties affect the outcome?</a:t>
+            </a:r>
+          </a:p>
+        </p:txBody>
+      </p:sp>
+    </p:spTree>
+  </p:cSld>
+  <p:timing>
+    <p:tnLst>
+      <p:par>
+        <p:cTn id="1" dur="indefinite" restart="never" nodeType="tmRoot">
+          <p:childTnLst>
+            <p:seq concurrent="1" nextAc="seek">
+              <p:cTn id="2" dur="indefinite" nodeType="mainSeq">
+                <p:childTnLst>
+                  <p:par>
+                    <p:cTn id="3" fill="hold">
+                      <p:stCondLst>
+                        <p:cond delay="indefinite"/>
+                      </p:stCondLst>
+                      <p:childTnLst>
+                        <p:par>
+                          <p:cTn id="4" fill="hold">
+                            <p:stCondLst>
+                              <p:cond delay="0"/>
+                            </p:stCondLst>
+                            <p:childTnLst>
+                              <p:par>
+                                <p:cTn id="5" presetID="1" presetClass="entr" presetSubtype="0" fill="hold" grpId="0" nodeType="clickEffect">
+                                  <p:stCondLst>
+                                    <p:cond delay="0"/>
+                                  </p:stCondLst>
+                                  <p:childTnLst>
+                                    <p:set>
+                                      <p:cBhvr>
+                                        <p:cTn id="6" dur="1" fill="hold">
+                                          <p:stCondLst>
+                                            <p:cond delay="0"/>
+                                          </p:stCondLst>
+                                        </p:cTn>
+                                        <p:tgtEl>
+                                          <p:spTgt spid="3">
+                                            <p:txEl>
+                                              <p:pRg st="2" end="2"/>
+                                            </p:txEl>
+                                          </p:spTgt>
+                                        </p:tgtEl>
+                                        <p:attrNameLst>
+                                          <p:attrName>style.visibility</p:attrName>
+                                        </p:attrNameLst>
+                                      </p:cBhvr>
+                                      <p:to>
+                                        <p:strVal val="visible"/>
+                                      </p:to>
+                                    </p:set>
+                                  </p:childTnLst>
+                                </p:cTn>
+                              </p:par>
+                            </p:childTnLst>
+                          </p:cTn>
+                        </p:par>
+                      </p:childTnLst>
+                    </p:cTn>
+                  </p:par>
+                  <p:par>
+                    <p:cTn id="7" fill="hold">
+                      <p:stCondLst>
+                        <p:cond delay="indefinite"/>
+                      </p:stCondLst>
+                      <p:childTnLst>
+                        <p:par>
+                          <p:cTn id="8" fill="hold">
+                            <p:stCondLst>
+                              <p:cond delay="0"/>
+                            </p:stCondLst>
+                            <p:childTnLst>
+                              <p:par>
+                                <p:cTn id="9" presetID="1" presetClass="entr" presetSubtype="0" fill="hold" grpId="0" nodeType="clickEffect">
+                                  <p:stCondLst>
+                                    <p:cond delay="0"/>
+                                  </p:stCondLst>
+                                  <p:childTnLst>
+                                    <p:set>
+                                      <p:cBhvr>
+                                        <p:cTn id="10" dur="1" fill="hold">
+                                          <p:stCondLst>
+                                            <p:cond delay="0"/>
+                                          </p:stCondLst>
+                                        </p:cTn>
+                                        <p:tgtEl>
+                                          <p:spTgt spid="3">
+                                            <p:txEl>
+                                              <p:pRg st="3" end="3"/>
+                                            </p:txEl>
+                                          </p:spTgt>
+                                        </p:tgtEl>
+                                        <p:attrNameLst>
+                                          <p:attrName>style.visibility</p:attrName>
+                                        </p:attrNameLst>
+                                      </p:cBhvr>
+                                      <p:to>
+                                        <p:strVal val="visible"/>
+                                      </p:to>
+                                    </p:set>
+                                  </p:childTnLst>
+                                </p:cTn>
+                              </p:par>
+                            </p:childTnLst>
+                          </p:cTn>
+                        </p:par>
+                      </p:childTnLst>
+                    </p:cTn>
+                  </p:par>
+                  <p:par>
+                    <p:cTn id="11" fill="hold">
+                      <p:stCondLst>
+                        <p:cond delay="indefinite"/>
+                      </p:stCondLst>
+                      <p:childTnLst>
+                        <p:par>
+                          <p:cTn id="12" fill="hold">
+                            <p:stCondLst>
+                              <p:cond delay="0"/>
+                            </p:stCondLst>
+                            <p:childTnLst>
+                              <p:par>
+                                <p:cTn id="13" presetID="1" presetClass="entr" presetSubtype="0" fill="hold" grpId="0" nodeType="clickEffect">
+                                  <p:stCondLst>
+                                    <p:cond delay="0"/>
+                                  </p:stCondLst>
+                                  <p:childTnLst>
+                                    <p:set>
+                                      <p:cBhvr>
+                                        <p:cTn id="14" dur="1" fill="hold">
+                                          <p:stCondLst>
+                                            <p:cond delay="0"/>
+                                          </p:stCondLst>
+                                        </p:cTn>
+                                        <p:tgtEl>
+                                          <p:spTgt spid="3">
+                                            <p:txEl>
+                                              <p:pRg st="4" end="4"/>
+                                            </p:txEl>
+                                          </p:spTgt>
+                                        </p:tgtEl>
+                                        <p:attrNameLst>
+                                          <p:attrName>style.visibility</p:attrName>
+                                        </p:attrNameLst>
+                                      </p:cBhvr>
+                                      <p:to>
+                                        <p:strVal val="visible"/>
+                                      </p:to>
+                                    </p:set>
+                                  </p:childTnLst>
+                                </p:cTn>
+                              </p:par>
+                            </p:childTnLst>
+                          </p:cTn>
+                        </p:par>
+                      </p:childTnLst>
+                    </p:cTn>
+                  </p:par>
+                  <p:par>
+                    <p:cTn id="15" fill="hold">
+                      <p:stCondLst>
+                        <p:cond delay="indefinite"/>
+                      </p:stCondLst>
+                      <p:childTnLst>
+                        <p:par>
+                          <p:cTn id="16" fill="hold">
+                            <p:stCondLst>
+                              <p:cond delay="0"/>
+                            </p:stCondLst>
+                            <p:childTnLst>
+                              <p:par>
+                                <p:cTn id="17" presetID="1" presetClass="entr" presetSubtype="0" fill="hold" grpId="0" nodeType="clickEffect">
+                                  <p:stCondLst>
+                                    <p:cond delay="0"/>
+                                  </p:stCondLst>
+                                  <p:childTnLst>
+                                    <p:set>
+                                      <p:cBhvr>
+                                        <p:cTn id="18" dur="1" fill="hold">
+                                          <p:stCondLst>
+                                            <p:cond delay="0"/>
+                                          </p:stCondLst>
+                                        </p:cTn>
+                                        <p:tgtEl>
+                                          <p:spTgt spid="3">
+                                            <p:txEl>
+                                              <p:pRg st="5" end="5"/>
+                                            </p:txEl>
+                                          </p:spTgt>
+                                        </p:tgtEl>
+                                        <p:attrNameLst>
+                                          <p:attrName>style.visibility</p:attrName>
+                                        </p:attrNameLst>
+                                      </p:cBhvr>
+                                      <p:to>
+                                        <p:strVal val="visible"/>
+                                      </p:to>
+                                    </p:set>
+                                  </p:childTnLst>
+                                </p:cTn>
+                              </p:par>
+                            </p:childTnLst>
+                          </p:cTn>
+                        </p:par>
+                      </p:childTnLst>
+                    </p:cTn>
+                  </p:par>
+                </p:childTnLst>
+              </p:cTn>
+              <p:prevCondLst>
+                <p:cond evt="onPrev" delay="0">
+                  <p:tgtEl>
+                    <p:sldTgt/>
+                  </p:tgtEl>
+                </p:cond>
+              </p:prevCondLst>
+              <p:nextCondLst>
+                <p:cond evt="onNext" delay="0">
+                  <p:tgtEl>
+                    <p:sldTgt/>
+                  </p:tgtEl>
+                </p:cond>
+              </p:nextCondLst>
+            </p:seq>
+          </p:childTnLst>
+        </p:cTn>
+      </p:par>
+    </p:tnLst>
+    <p:bldLst>
+      <p:bldP spid="3" grpId="0" uiExpand="1" build="p"/>
+    </p:bldLst>
+  </p:timing>
+</p:sld>
+</file>
+
+<file path=ppt/slides/slide6.xml><?xml version="1.0" encoding="utf-8"?>
+<p:sld xmlns:a="http://schemas.openxmlformats.org/drawingml/2006/main" xmlns:r="http://schemas.openxmlformats.org/officeDocument/2006/relationships" xmlns:p="http://schemas.openxmlformats.org/presentationml/2006/main">
+  <p:cSld>
+    <p:spTree>
+      <p:nvGrpSpPr>
+        <p:cNvPr id="1" name=""/>
+        <p:cNvGrpSpPr/>
+        <p:nvPr/>
+      </p:nvGrpSpPr>
+      <p:grpSpPr>
+        <a:xfrm>
+          <a:off x="0" y="0"/>
+          <a:ext cx="0" cy="0"/>
+          <a:chOff x="0" y="0"/>
+          <a:chExt cx="0" cy="0"/>
+        </a:xfrm>
+      </p:grpSpPr>
+      <p:sp>
+        <p:nvSpPr>
           <p:cNvPr id="2" name="Title 1"/>
           <p:cNvSpPr>
             <a:spLocks noGrp="1"/>
@@ -3422,7 +8246,7 @@
             </a:pPr>
             <a:r>
               <a:rPr/>
-              <a:t>References</a:t>
+              <a:t>van Dantzig’s Simple Model</a:t>
             </a:r>
           </a:p>
         </p:txBody>
@@ -3443,11 +8267,121 @@
           <a:lstStyle/>
           <a:p>
             <a:pPr lvl="0" indent="0" marL="0">
+              <a:spcBef>
+                <a:spcPts val="3000"/>
+              </a:spcBef>
               <a:buNone/>
             </a:pPr>
             <a:r>
+              <a:rPr b="1"/>
+              <a:t>Historical Context</a:t>
+            </a:r>
+          </a:p>
+        </p:txBody>
+      </p:sp>
+    </p:spTree>
+  </p:cSld>
+</p:sld>
+</file>
+
+<file path=ppt/slides/slide7.xml><?xml version="1.0" encoding="utf-8"?>
+<p:sld xmlns:a="http://schemas.openxmlformats.org/drawingml/2006/main" xmlns:r="http://schemas.openxmlformats.org/officeDocument/2006/relationships" xmlns:p="http://schemas.openxmlformats.org/presentationml/2006/main">
+  <p:cSld>
+    <p:spTree>
+      <p:nvGrpSpPr>
+        <p:cNvPr id="1" name=""/>
+        <p:cNvGrpSpPr/>
+        <p:nvPr/>
+      </p:nvGrpSpPr>
+      <p:grpSpPr>
+        <a:xfrm>
+          <a:off x="0" y="0"/>
+          <a:ext cx="0" cy="0"/>
+          <a:chOff x="0" y="0"/>
+          <a:chExt cx="0" cy="0"/>
+        </a:xfrm>
+      </p:grpSpPr>
+      <p:pic>
+        <p:nvPicPr>
+          <p:cNvPr descr="van-dantzig-paper.png" id="0" name="Picture 1"/>
+          <p:cNvPicPr>
+            <a:picLocks noGrp="1" noChangeAspect="1"/>
+          </p:cNvPicPr>
+          <p:nvPr/>
+        </p:nvPicPr>
+        <p:blipFill>
+          <a:blip r:embed="rId3"/>
+          <a:stretch>
+            <a:fillRect/>
+          </a:stretch>
+        </p:blipFill>
+        <p:spPr bwMode="auto">
+          <a:xfrm>
+            <a:off x="1447800" y="1193800"/>
+            <a:ext cx="2044700" cy="2882900"/>
+          </a:xfrm>
+          <a:prstGeom prst="rect">
+            <a:avLst/>
+          </a:prstGeom>
+          <a:noFill/>
+          <a:ln w="9525">
+            <a:noFill/>
+            <a:headEnd/>
+            <a:tailEnd/>
+          </a:ln>
+        </p:spPr>
+      </p:pic>
+      <p:sp>
+        <p:nvSpPr>
+          <p:cNvPr id="1" name="TextBox 3"/>
+          <p:cNvSpPr txBox="1"/>
+          <p:nvPr/>
+        </p:nvSpPr>
+        <p:spPr>
+          <a:xfrm>
+            <a:off x="457200" y="4076700"/>
+            <a:ext cx="4038600" cy="508000"/>
+          </a:xfrm>
+          <a:prstGeom prst="rect">
+            <a:avLst/>
+          </a:prstGeom>
+          <a:noFill/>
+        </p:spPr>
+        <p:txBody>
+          <a:bodyPr/>
+          <a:lstStyle/>
+          <a:p>
+            <a:pPr lvl="0" indent="0" marL="0" algn="ctr">
+              <a:buNone/>
+            </a:pPr>
+            <a:r>
               <a:rPr/>
-              <a:t>Dantzig, D. van. 1956. “Economic Decision Problems for Flood Prevention.” </a:t>
+              <a:t>First page of van Dantzig (1956).</a:t>
+            </a:r>
+          </a:p>
+        </p:txBody>
+      </p:sp>
+      <p:sp>
+        <p:nvSpPr>
+          <p:cNvPr id="4" name="Content Placeholder 3"/>
+          <p:cNvSpPr>
+            <a:spLocks noGrp="1"/>
+          </p:cNvSpPr>
+          <p:nvPr>
+            <p:ph idx="2" sz="half"/>
+          </p:nvPr>
+        </p:nvSpPr>
+        <p:spPr/>
+        <p:txBody>
+          <a:bodyPr/>
+          <a:lstStyle/>
+          <a:p>
+            <a:pPr lvl="0" indent="0" marL="0">
+              <a:buNone/>
+            </a:pPr>
+            <a:r>
+              <a:rPr/>
+              <a:t>Published in </a:t>
             </a:r>
             <a:r>
               <a:rPr i="1"/>
@@ -3455,21 +8389,398 @@
             </a:r>
             <a:r>
               <a:rPr/>
-              <a:t> 24 (3): 276–87. </a:t>
-            </a:r>
-            <a:r>
-              <a:rPr>
-                <a:hlinkClick r:id="rId2"/>
-              </a:rPr>
-              <a:t>https://doi.org/10.2307/1911632</a:t>
-            </a:r>
+              <a:t>, 1956.</a:t>
+            </a:r>
+          </a:p>
+          <a:p>
+            <a:pPr lvl="0" indent="0" marL="0">
+              <a:buNone/>
+            </a:pPr>
             <a:r>
               <a:rPr/>
-              <a:t>.</a:t>
-            </a:r>
-          </a:p>
-        </p:txBody>
-      </p:sp>
+              <a:t>Models always trade off realism for tractability — they answer questions and inform decisions, not provide a 1:1 map of the real world.</a:t>
+            </a:r>
+          </a:p>
+          <a:p>
+            <a:pPr lvl="0" indent="0" marL="0">
+              <a:buNone/>
+            </a:pPr>
+            <a:r>
+              <a:rPr/>
+              <a:t>With no computers available, van Dantzig needed a </a:t>
+            </a:r>
+            <a:r>
+              <a:rPr b="1"/>
+              <a:t>closed-form solution</a:t>
+            </a:r>
+            <a:r>
+              <a:rPr/>
+              <a:t> — so every assumption was chosen to keep the math tractable.</a:t>
+            </a:r>
+          </a:p>
+        </p:txBody>
+      </p:sp>
+    </p:spTree>
+  </p:cSld>
+</p:sld>
+</file>
+
+<file path=ppt/slides/slide8.xml><?xml version="1.0" encoding="utf-8"?>
+<p:sld xmlns:a="http://schemas.openxmlformats.org/drawingml/2006/main" xmlns:r="http://schemas.openxmlformats.org/officeDocument/2006/relationships" xmlns:p="http://schemas.openxmlformats.org/presentationml/2006/main">
+  <p:cSld>
+    <p:spTree>
+      <p:nvGrpSpPr>
+        <p:cNvPr id="1" name=""/>
+        <p:cNvGrpSpPr/>
+        <p:nvPr/>
+      </p:nvGrpSpPr>
+      <p:grpSpPr>
+        <a:xfrm>
+          <a:off x="0" y="0"/>
+          <a:ext cx="0" cy="0"/>
+          <a:chOff x="0" y="0"/>
+          <a:chExt cx="0" cy="0"/>
+        </a:xfrm>
+      </p:grpSpPr>
+      <p:sp>
+        <p:nvSpPr>
+          <p:cNvPr id="3" name="Content Placeholder 2"/>
+          <p:cNvSpPr>
+            <a:spLocks noGrp="1"/>
+          </p:cNvSpPr>
+          <p:nvPr>
+            <p:ph idx="1"/>
+          </p:nvPr>
+        </p:nvSpPr>
+        <p:spPr/>
+        <p:txBody>
+          <a:bodyPr/>
+          <a:lstStyle/>
+          <a:p>
+            <a:pPr lvl="0" indent="0" marL="0">
+              <a:spcBef>
+                <a:spcPts val="3000"/>
+              </a:spcBef>
+              <a:buNone/>
+            </a:pPr>
+            <a:r>
+              <a:rPr b="1"/>
+              <a:t>Flood Exceedance Probability</a:t>
+            </a:r>
+          </a:p>
+        </p:txBody>
+      </p:sp>
+    </p:spTree>
+  </p:cSld>
+</p:sld>
+</file>
+
+<file path=ppt/slides/slide9.xml><?xml version="1.0" encoding="utf-8"?>
+<p:sld xmlns:a="http://schemas.openxmlformats.org/drawingml/2006/main" xmlns:r="http://schemas.openxmlformats.org/officeDocument/2006/relationships" xmlns:p="http://schemas.openxmlformats.org/presentationml/2006/main">
+  <p:cSld>
+    <p:spTree>
+      <p:nvGrpSpPr>
+        <p:cNvPr id="1" name=""/>
+        <p:cNvGrpSpPr/>
+        <p:nvPr/>
+      </p:nvGrpSpPr>
+      <p:grpSpPr>
+        <a:xfrm>
+          <a:off x="0" y="0"/>
+          <a:ext cx="0" cy="0"/>
+          <a:chOff x="0" y="0"/>
+          <a:chExt cx="0" cy="0"/>
+        </a:xfrm>
+      </p:grpSpPr>
+      <p:pic>
+        <p:nvPicPr>
+          <p:cNvPr descr="van-dantzig-fig1.png" id="0" name="Picture 1"/>
+          <p:cNvPicPr>
+            <a:picLocks noGrp="1" noChangeAspect="1"/>
+          </p:cNvPicPr>
+          <p:nvPr/>
+        </p:nvPicPr>
+        <p:blipFill>
+          <a:blip r:embed="rId3"/>
+          <a:stretch>
+            <a:fillRect/>
+          </a:stretch>
+        </p:blipFill>
+        <p:spPr bwMode="auto">
+          <a:xfrm>
+            <a:off x="457200" y="1244600"/>
+            <a:ext cx="4038600" cy="2781300"/>
+          </a:xfrm>
+          <a:prstGeom prst="rect">
+            <a:avLst/>
+          </a:prstGeom>
+          <a:noFill/>
+          <a:ln w="9525">
+            <a:noFill/>
+            <a:headEnd/>
+            <a:tailEnd/>
+          </a:ln>
+        </p:spPr>
+      </p:pic>
+      <p:sp>
+        <p:nvSpPr>
+          <p:cNvPr id="1" name="TextBox 3"/>
+          <p:cNvSpPr txBox="1"/>
+          <p:nvPr/>
+        </p:nvSpPr>
+        <p:spPr>
+          <a:xfrm>
+            <a:off x="457200" y="4076700"/>
+            <a:ext cx="4038600" cy="508000"/>
+          </a:xfrm>
+          <a:prstGeom prst="rect">
+            <a:avLst/>
+          </a:prstGeom>
+          <a:noFill/>
+        </p:spPr>
+        <p:txBody>
+          <a:bodyPr/>
+          <a:lstStyle/>
+          <a:p>
+            <a:pPr lvl="0" indent="0" marL="0" algn="ctr">
+              <a:buNone/>
+            </a:pPr>
+            <a:r>
+              <a:rPr/>
+              <a:t>van Dantzig’s Figure 1: exceedance probability vs. high tide height at Hook of Holland. Note the 1953 event marked as an outlier. Source: van Dantzig (1956).</a:t>
+            </a:r>
+          </a:p>
+        </p:txBody>
+      </p:sp>
+      <mc:AlternateContent xmlns:mc="http://schemas.openxmlformats.org/markup-compatibility/2006">
+        <mc:Choice xmlns:a14="http://schemas.microsoft.com/office/drawing/2010/main" Requires="a14">
+          <p:sp>
+            <p:nvSpPr>
+              <p:cNvPr id="4" name="Content Placeholder 3"/>
+              <p:cNvSpPr>
+                <a:spLocks noGrp="1"/>
+              </p:cNvSpPr>
+              <p:nvPr>
+                <p:ph idx="2" sz="half"/>
+              </p:nvPr>
+            </p:nvSpPr>
+            <p:spPr/>
+            <p:txBody>
+              <a:bodyPr/>
+              <a:lstStyle/>
+              <a:p>
+                <a:pPr lvl="0" indent="0" marL="0">
+                  <a:buNone/>
+                </a:pPr>
+                <a:r>
+                  <a:rPr/>
+                  <a:t>Assumed </a:t>
+                </a:r>
+                <a:r>
+                  <a:rPr b="1"/>
+                  <a:t>exponential</a:t>
+                </a:r>
+                <a:r>
+                  <a:rPr/>
+                  <a:t> exceedance probability:</a:t>
+                </a:r>
+              </a:p>
+              <a:p>
+                <a:pPr lvl="0" indent="0" marL="0">
+                  <a:buNone/>
+                </a:pPr>
+                <a14:m>
+                  <m:oMathPara xmlns:m="http://schemas.openxmlformats.org/officeDocument/2006/math">
+                    <m:oMathParaPr>
+                      <m:jc m:val="center"/>
+                    </m:oMathParaPr>
+                    <m:oMath>
+                      <m:r>
+                        <m:t>p</m:t>
+                      </m:r>
+                      <m:d>
+                        <m:dPr>
+                          <m:begChr m:val="("/>
+                          <m:sepChr m:val=""/>
+                          <m:endChr m:val=")"/>
+                          <m:grow/>
+                        </m:dPr>
+                        <m:e>
+                          <m:r>
+                            <m:t>h</m:t>
+                          </m:r>
+                        </m:e>
+                      </m:d>
+                      <m:r>
+                        <m:rPr>
+                          <m:sty m:val="p"/>
+                        </m:rPr>
+                        <m:t>=</m:t>
+                      </m:r>
+                      <m:sSub>
+                        <m:e>
+                          <m:r>
+                            <m:t>p</m:t>
+                          </m:r>
+                        </m:e>
+                        <m:sub>
+                          <m:r>
+                            <m:t>0</m:t>
+                          </m:r>
+                        </m:sub>
+                      </m:sSub>
+                      <m:r>
+                        <m:t> </m:t>
+                      </m:r>
+                      <m:sSup>
+                        <m:e>
+                          <m:r>
+                            <m:t>e</m:t>
+                          </m:r>
+                        </m:e>
+                        <m:sup>
+                          <m:r>
+                            <m:rPr>
+                              <m:sty m:val="p"/>
+                            </m:rPr>
+                            <m:t>−</m:t>
+                          </m:r>
+                          <m:r>
+                            <m:t>α</m:t>
+                          </m:r>
+                          <m:d>
+                            <m:dPr>
+                              <m:begChr m:val="("/>
+                              <m:sepChr m:val=""/>
+                              <m:endChr m:val=")"/>
+                              <m:grow/>
+                            </m:dPr>
+                            <m:e>
+                              <m:r>
+                                <m:t>h</m:t>
+                              </m:r>
+                              <m:r>
+                                <m:rPr>
+                                  <m:sty m:val="p"/>
+                                </m:rPr>
+                                <m:t>−</m:t>
+                              </m:r>
+                              <m:sSub>
+                                <m:e>
+                                  <m:r>
+                                    <m:t>H</m:t>
+                                  </m:r>
+                                </m:e>
+                                <m:sub>
+                                  <m:r>
+                                    <m:t>0</m:t>
+                                  </m:r>
+                                </m:sub>
+                              </m:sSub>
+                            </m:e>
+                          </m:d>
+                        </m:sup>
+                      </m:sSup>
+                    </m:oMath>
+                  </m:oMathPara>
+                </a14:m>
+              </a:p>
+              <a:p>
+                <a:pPr lvl="0"/>
+                <a14:m>
+                  <m:oMath xmlns:m="http://schemas.openxmlformats.org/officeDocument/2006/math">
+                    <m:r>
+                      <m:t>h</m:t>
+                    </m:r>
+                  </m:oMath>
+                </a14:m>
+                <a:r>
+                  <a:rPr/>
+                  <a:t> = water height</a:t>
+                </a:r>
+              </a:p>
+              <a:p>
+                <a:pPr lvl="0"/>
+                <a14:m>
+                  <m:oMath xmlns:m="http://schemas.openxmlformats.org/officeDocument/2006/math">
+                    <m:sSub>
+                      <m:e>
+                        <m:r>
+                          <m:t>H</m:t>
+                        </m:r>
+                      </m:e>
+                      <m:sub>
+                        <m:r>
+                          <m:t>0</m:t>
+                        </m:r>
+                      </m:sub>
+                    </m:sSub>
+                  </m:oMath>
+                </a14:m>
+                <a:r>
+                  <a:rPr/>
+                  <a:t> = current dike height</a:t>
+                </a:r>
+              </a:p>
+              <a:p>
+                <a:pPr lvl="0"/>
+                <a14:m>
+                  <m:oMath xmlns:m="http://schemas.openxmlformats.org/officeDocument/2006/math">
+                    <m:sSub>
+                      <m:e>
+                        <m:r>
+                          <m:t>p</m:t>
+                        </m:r>
+                      </m:e>
+                      <m:sub>
+                        <m:r>
+                          <m:t>0</m:t>
+                        </m:r>
+                      </m:sub>
+                    </m:sSub>
+                  </m:oMath>
+                </a14:m>
+                <a:r>
+                  <a:rPr/>
+                  <a:t> = current exceedance probability</a:t>
+                </a:r>
+              </a:p>
+              <a:p>
+                <a:pPr lvl="0"/>
+                <a14:m>
+                  <m:oMath xmlns:m="http://schemas.openxmlformats.org/officeDocument/2006/math">
+                    <m:r>
+                      <m:t>α</m:t>
+                    </m:r>
+                  </m:oMath>
+                </a14:m>
+                <a:r>
+                  <a:rPr/>
+                  <a:t> = shape parameter</a:t>
+                </a:r>
+              </a:p>
+              <a:p>
+                <a:pPr lvl="0" indent="0" marL="0">
+                  <a:buNone/>
+                </a:pPr>
+                <a:r>
+                  <a:rPr/>
+                  <a:t>The straight line on the log plot is the exponential fit.</a:t>
+                </a:r>
+              </a:p>
+              <a:p>
+                <a:pPr lvl="0" indent="0" marL="0">
+                  <a:buNone/>
+                </a:pPr>
+                <a:r>
+                  <a:rPr/>
+                  <a:t>Why exponential? Because it makes the integral tractable.</a:t>
+                </a:r>
+              </a:p>
+            </p:txBody>
+          </p:sp>
+        </mc:Choice>
+      </mc:AlternateContent>
     </p:spTree>
   </p:cSld>
 </p:sld>

--- a/lectures/week-06/index.pptx
+++ b/lectures/week-06/index.pptx
@@ -4862,7 +4862,7 @@
             <a:br/>
             <a:r>
               <a:rPr/>
-              <a:t>Dr. James Doss-Gollin</a:t>
+              <a:t>James Doss-Gollin</a:t>
             </a:r>
           </a:p>
         </p:txBody>

--- a/lectures/week-06/index.pptx
+++ b/lectures/week-06/index.pptx
@@ -5137,19 +5137,21 @@
                       <m:r>
                         <m:t>I</m:t>
                       </m:r>
-                      <m:d>
-                        <m:dPr>
-                          <m:begChr m:val="("/>
-                          <m:sepChr m:val=""/>
-                          <m:endChr m:val=")"/>
-                          <m:grow/>
-                        </m:dPr>
-                        <m:e>
-                          <m:r>
-                            <m:t>X</m:t>
-                          </m:r>
-                        </m:e>
-                      </m:d>
+                      <m:r>
+                        <m:rPr>
+                          <m:sty m:val="p"/>
+                        </m:rPr>
+                        <m:t>(</m:t>
+                      </m:r>
+                      <m:r>
+                        <m:t>X</m:t>
+                      </m:r>
+                      <m:r>
+                        <m:rPr>
+                          <m:sty m:val="p"/>
+                        </m:rPr>
+                        <m:t>)</m:t>
+                      </m:r>
                       <m:r>
                         <m:rPr>
                           <m:sty m:val="p"/>
@@ -5299,19 +5301,21 @@
                       <m:r>
                         <m:t>L</m:t>
                       </m:r>
-                      <m:d>
-                        <m:dPr>
-                          <m:begChr m:val="("/>
-                          <m:sepChr m:val=""/>
-                          <m:endChr m:val=")"/>
-                          <m:grow/>
-                        </m:dPr>
-                        <m:e>
-                          <m:r>
-                            <m:t>X</m:t>
-                          </m:r>
-                        </m:e>
-                      </m:d>
+                      <m:r>
+                        <m:rPr>
+                          <m:sty m:val="p"/>
+                        </m:rPr>
+                        <m:t>(</m:t>
+                      </m:r>
+                      <m:r>
+                        <m:t>X</m:t>
+                      </m:r>
+                      <m:r>
+                        <m:rPr>
+                          <m:sty m:val="p"/>
+                        </m:rPr>
+                        <m:t>)</m:t>
+                      </m:r>
                       <m:r>
                         <m:rPr>
                           <m:sty m:val="p"/>
@@ -5431,19 +5435,21 @@
                         </m:rPr>
                         <m:t>Total</m:t>
                       </m:r>
-                      <m:d>
-                        <m:dPr>
-                          <m:begChr m:val="("/>
-                          <m:sepChr m:val=""/>
-                          <m:endChr m:val=")"/>
-                          <m:grow/>
-                        </m:dPr>
-                        <m:e>
-                          <m:r>
-                            <m:t>X</m:t>
-                          </m:r>
-                        </m:e>
-                      </m:d>
+                      <m:r>
+                        <m:rPr>
+                          <m:sty m:val="p"/>
+                        </m:rPr>
+                        <m:t>(</m:t>
+                      </m:r>
+                      <m:r>
+                        <m:t>X</m:t>
+                      </m:r>
+                      <m:r>
+                        <m:rPr>
+                          <m:sty m:val="p"/>
+                        </m:rPr>
+                        <m:t>)</m:t>
+                      </m:r>
                       <m:r>
                         <m:rPr>
                           <m:sty m:val="p"/>
@@ -5632,7 +5638,9 @@
         <p:nvSpPr>
           <p:cNvPr id="1" name="TextBox 3"/>
           <p:cNvSpPr txBox="1"/>
-          <p:nvPr/>
+          <p:nvPr>
+            <p:ph idx="1"/>
+          </p:nvPr>
         </p:nvSpPr>
         <p:spPr>
           <a:xfrm>
@@ -6143,15 +6151,21 @@
                       <m:jc m:val="center"/>
                     </m:oMathParaPr>
                     <m:oMath>
-                      <m:r>
-                        <m:t>δ</m:t>
-                      </m:r>
-                      <m:r>
-                        <m:rPr>
-                          <m:sty m:val="p"/>
-                        </m:rPr>
-                        <m:t>′</m:t>
-                      </m:r>
+                      <m:sSup>
+                        <m:e>
+                          <m:r>
+                            <m:t>δ</m:t>
+                          </m:r>
+                        </m:e>
+                        <m:sup>
+                          <m:r>
+                            <m:rPr>
+                              <m:sty m:val="p"/>
+                            </m:rPr>
+                            <m:t>′</m:t>
+                          </m:r>
+                        </m:sup>
+                      </m:sSup>
                       <m:r>
                         <m:rPr>
                           <m:sty m:val="p"/>
@@ -6256,15 +6270,21 @@
                 </a:r>
                 <a14:m>
                   <m:oMath xmlns:m="http://schemas.openxmlformats.org/officeDocument/2006/math">
-                    <m:r>
-                      <m:t>δ</m:t>
-                    </m:r>
-                    <m:r>
-                      <m:rPr>
-                        <m:sty m:val="p"/>
-                      </m:rPr>
-                      <m:t>′</m:t>
-                    </m:r>
+                    <m:sSup>
+                      <m:e>
+                        <m:r>
+                          <m:t>δ</m:t>
+                        </m:r>
+                      </m:e>
+                      <m:sup>
+                        <m:r>
+                          <m:rPr>
+                            <m:sty m:val="p"/>
+                          </m:rPr>
+                          <m:t>′</m:t>
+                        </m:r>
+                      </m:sup>
+                    </m:sSup>
                     <m:r>
                       <m:rPr>
                         <m:sty m:val="p"/>
@@ -6608,15 +6628,21 @@
                 </a:r>
                 <a14:m>
                   <m:oMath xmlns:m="http://schemas.openxmlformats.org/officeDocument/2006/math">
-                    <m:r>
-                      <m:t>δ</m:t>
-                    </m:r>
-                    <m:r>
-                      <m:rPr>
-                        <m:sty m:val="p"/>
-                      </m:rPr>
-                      <m:t>′</m:t>
-                    </m:r>
+                    <m:sSup>
+                      <m:e>
+                        <m:r>
+                          <m:t>δ</m:t>
+                        </m:r>
+                      </m:e>
+                      <m:sup>
+                        <m:r>
+                          <m:rPr>
+                            <m:sty m:val="p"/>
+                          </m:rPr>
+                          <m:t>′</m:t>
+                        </m:r>
+                      </m:sup>
+                    </m:sSup>
                   </m:oMath>
                 </a14:m>
                 <a:r>
@@ -6782,7 +6808,9 @@
         <p:nvSpPr>
           <p:cNvPr id="1" name="TextBox 3"/>
           <p:cNvSpPr txBox="1"/>
-          <p:nvPr/>
+          <p:nvPr>
+            <p:ph idx="1"/>
+          </p:nvPr>
         </p:nvSpPr>
         <p:spPr>
           <a:xfrm>
@@ -6917,10 +6945,10 @@
 </p:sld>
 </file>
 
-<file path=ppt/slides/slide15.xml><?xml version="1.0" encoding="UTF-8"?><p:sld xmlns:a="http://schemas.openxmlformats.org/drawingml/2006/main" xmlns:r="http://schemas.openxmlformats.org/officeDocument/2006/relationships" xmlns:p="http://schemas.openxmlformats.org/presentationml/2006/main"><p:cSld><p:spTree><p:nvGrpSpPr><p:cNvPr id="1" name="" /><p:cNvGrpSpPr /><p:nvPr /></p:nvGrpSpPr><p:grpSpPr><a:xfrm><a:off x="0" y="0" /><a:ext cx="0" cy="0" /><a:chOff x="0" y="0" /><a:chExt cx="0" cy="0" /></a:xfrm></p:grpSpPr><p:sp><p:nvSpPr><p:cNvPr id="2" name="Title 1" /><p:cNvSpPr><a:spLocks noGrp="1" /></p:cNvSpPr><p:nvPr><p:ph type="title" /></p:nvPr></p:nvSpPr><p:spPr><a:xfrm><a:off x="457201" y="204787" /><a:ext cx="3008313" cy="871538" /></a:xfrm></p:spPr><p:txBody><a:bodyPr /><a:lstStyle /><a:p><a:pPr lvl="0" indent="0" marL="0"><a:buNone /></a:pPr><a:r><a:rPr /><a:t>Optimization and Policy Search</a:t></a:r></a:p></p:txBody></p:sp><mc:AlternateContent xmlns:mc="http://schemas.openxmlformats.org/markup-compatibility/2006"><mc:Choice xmlns:a14="http://schemas.microsoft.com/office/drawing/2010/main" Requires="a14"><p:sp><p:nvSpPr><p:cNvPr id="4" name="Text Placeholder 3" /><p:cNvSpPr><a:spLocks noGrp="1" /></p:cNvSpPr><p:nvPr><p:ph idx="2" sz="half" type="body" /></p:nvPr></p:nvSpPr><p:spPr /><p:txBody><a:bodyPr /><a:lstStyle /><a:p><a:pPr lvl="0" indent="0" marL="0"><a:buNone /></a:pPr><a:r><a:rPr /><a:t>van Dantzig used optimization to inform an engineering design decision. Let’s formalize the general framework.</a:t></a:r></a:p><a:p><a:pPr lvl="0" indent="0" marL="0"><a:spcBef><a:spcPts val="3000" /></a:spcBef><a:buNone /></a:pPr><a:r><a:rPr b="1" /><a:t>Optimization Fundamentals</a:t></a:r></a:p><a:p><a:pPr lvl="0" indent="0" marL="0"><a:buNone /></a:pPr><a:r><a:rPr /><a:t>Every optimization problem has the same mathematical structure:</a:t></a:r></a:p><a:p><a:pPr lvl="0" indent="0" marL="0"><a:buNone /></a:pPr><a14:m><m:oMathPara xmlns:m="http://schemas.openxmlformats.org/officeDocument/2006/math"><m:oMathParaPr><m:jc m:val="center" /></m:oMathParaPr><m:oMath><m:m><m:mPr><m:baseJc m:val="center" /><m:plcHide m:val="on" /><m:mcs><m:mc><m:mcPr><m:mcJc m:val="right" /><m:count m:val="1" /></m:mcPr></m:mc><m:mc><m:mcPr><m:mcJc m:val="left" /><m:count m:val="1" /></m:mcPr></m:mc><m:mc><m:mcPr><m:mcJc m:val="right" /><m:count m:val="1" /></m:mcPr></m:mc></m:mcs></m:mPr><m:mr><m:e><m:limLow><m:e><m:r><m:rPr><m:sty m:val="p" /></m:rPr><m:t>min</m:t></m:r></m:e><m:lim><m:r><m:rPr><m:sty m:val="b" /></m:rPr><m:t>x</m:t></m:r></m:lim></m:limLow><m:r><m:t> </m:t></m:r></m:e><m:e><m:r><m:t>f</m:t></m:r><m:d><m:dPr><m:begChr m:val="(" /><m:sepChr m:val="" /><m:endChr m:val=")" /><m:grow /></m:dPr><m:e><m:r><m:rPr><m:sty m:val="b" /></m:rPr><m:t>x</m:t></m:r></m:e></m:d></m:e></m:mr><m:mr><m:e><m:r><m:rPr><m:nor /><m:sty m:val="p" /></m:rPr><m:t>subject to</m:t></m:r><m:r><m:t> </m:t></m:r></m:e><m:e><m:sSub><m:e><m:r><m:t>g</m:t></m:r></m:e><m:sub><m:r><m:t>j</m:t></m:r></m:sub></m:sSub><m:d><m:dPr><m:begChr m:val="(" /><m:sepChr m:val="" /><m:endChr m:val=")" /><m:grow /></m:dPr><m:e><m:r><m:rPr><m:sty m:val="b" /></m:rPr><m:t>x</m:t></m:r></m:e></m:d><m:r><m:rPr><m:sty m:val="p" /></m:rPr><m:t>≤</m:t></m:r><m:r><m:t>0</m:t></m:r><m:r><m:rPr><m:sty m:val="p" /></m:rPr><m:t>,</m:t></m:r></m:e><m:e><m:r><m:t>j</m:t></m:r><m:r><m:rPr><m:sty m:val="p" /></m:rPr><m:t>=</m:t></m:r><m:r><m:t>1</m:t></m:r><m:r><m:rPr><m:sty m:val="p" /></m:rPr><m:t>,</m:t></m:r><m:r><m:rPr><m:sty m:val="p" /></m:rPr><m:t>…</m:t></m:r><m:r><m:rPr><m:sty m:val="p" /></m:rPr><m:t>,</m:t></m:r><m:r><m:t>J</m:t></m:r></m:e></m:mr><m:mr><m:e /><m:e><m:sSub><m:e><m:r><m:t>h</m:t></m:r></m:e><m:sub><m:r><m:t>k</m:t></m:r></m:sub></m:sSub><m:d><m:dPr><m:begChr m:val="(" /><m:sepChr m:val="" /><m:endChr m:val=")" /><m:grow /></m:dPr><m:e><m:r><m:rPr><m:sty m:val="b" /></m:rPr><m:t>x</m:t></m:r></m:e></m:d><m:r><m:rPr><m:sty m:val="p" /></m:rPr><m:t>=</m:t></m:r><m:r><m:t>0</m:t></m:r><m:r><m:rPr><m:sty m:val="p" /></m:rPr><m:t>,</m:t></m:r></m:e><m:e><m:r><m:t>k</m:t></m:r><m:r><m:rPr><m:sty m:val="p" /></m:rPr><m:t>=</m:t></m:r><m:r><m:t>1</m:t></m:r><m:r><m:rPr><m:sty m:val="p" /></m:rPr><m:t>,</m:t></m:r><m:r><m:rPr><m:sty m:val="p" /></m:rPr><m:t>…</m:t></m:r><m:r><m:rPr><m:sty m:val="p" /></m:rPr><m:t>,</m:t></m:r><m:r><m:t>K</m:t></m:r></m:e></m:mr></m:m></m:oMath></m:oMathPara></a14:m></a:p></p:txBody></p:sp></mc:Choice></mc:AlternateContent><p:graphicFrame><p:nvGraphicFramePr><p:cNvPr id="6" name="Content Placeholder 5" /><p:cNvGraphicFramePr><a:graphicFrameLocks noGrp="1" /></p:cNvGraphicFramePr><p:nvPr><p:ph idx="1" /></p:nvPr></p:nvGraphicFramePr><p:xfrm><a:off x="3568700" y="203200" /><a:ext cx="5105400" cy="4381500" /></p:xfrm><a:graphic><a:graphicData uri="http://schemas.openxmlformats.org/drawingml/2006/table"><a:tbl><a:tblPr firstRow="1" bandRow="1"><a:tableStyleId>{5C22544A-7EE6-4342-B048-85BDC9FD1C3A}</a:tableStyleId></a:tblPr><a:tblGrid><a:gridCol w="1701800" /><a:gridCol w="1701800" /><a:gridCol w="1701800" /></a:tblGrid><a:tr h="0"><a:tc><a:txBody><a:bodyPr /><a:lstStyle /><a:p><a:pPr lvl="0" indent="0" marL="0" algn="l"><a:buNone /></a:pPr><a:r><a:rPr /><a:t>Notation</a:t></a:r></a:p></a:txBody><a:tcPr /></a:tc><a:tc><a:txBody><a:bodyPr /><a:lstStyle /><a:p><a:pPr lvl="0" indent="0" marL="0" algn="l"><a:buNone /></a:pPr><a:r><a:rPr /><a:t>Meaning</a:t></a:r></a:p></a:txBody><a:tcPr /></a:tc><a:tc><a:txBody><a:bodyPr /><a:lstStyle /><a:p><a:pPr lvl="0" indent="0" marL="0" algn="l"><a:buNone /></a:pPr><a:r><a:rPr /><a:t>van Dantzig</a:t></a:r></a:p></a:txBody><a:tcPr /></a:tc></a:tr><a:tr h="0"><a:tc><a:txBody><a:bodyPr /><a:lstStyle /><a:p><a:pPr lvl="0" indent="0" marL="0" algn="l"><a:buNone /></a:pPr><a14:m><m:oMath xmlns:m="http://schemas.openxmlformats.org/officeDocument/2006/math"><m:r><m:rPr><m:sty m:val="b" /></m:rPr><m:t>x</m:t></m:r></m:oMath></a14:m></a:p></a:txBody></a:tc><a:tc><a:txBody><a:bodyPr /><a:lstStyle /><a:p><a:pPr lvl="0" indent="0" marL="0" algn="l"><a:buNone /></a:pPr><a:r><a:rPr /><a:t>Decision variables</a:t></a:r></a:p></a:txBody></a:tc><a:tc><a:txBody><a:bodyPr /><a:lstStyle /><a:p><a:pPr lvl="0" indent="0" marL="0" algn="l"><a:buNone /></a:pPr><a14:m><m:oMath xmlns:m="http://schemas.openxmlformats.org/officeDocument/2006/math"><m:r><m:t>X</m:t></m:r></m:oMath></a14:m><a:r><a:rPr /><a:t> = dike heightening</a:t></a:r></a:p></a:txBody></a:tc></a:tr><a:tr h="0"><a:tc><a:txBody><a:bodyPr /><a:lstStyle /><a:p><a:pPr lvl="0" indent="0" marL="0" algn="l"><a:buNone /></a:pPr><a14:m><m:oMath xmlns:m="http://schemas.openxmlformats.org/officeDocument/2006/math"><m:r><m:t>f</m:t></m:r><m:d><m:dPr><m:begChr m:val="(" /><m:sepChr m:val="" /><m:endChr m:val=")" /><m:grow /></m:dPr><m:e><m:r><m:rPr><m:sty m:val="b" /></m:rPr><m:t>x</m:t></m:r></m:e></m:d></m:oMath></a14:m></a:p></a:txBody></a:tc><a:tc><a:txBody><a:bodyPr /><a:lstStyle /><a:p><a:pPr lvl="0" indent="0" marL="0" algn="l"><a:buNone /></a:pPr><a:r><a:rPr /><a:t>Objective function</a:t></a:r></a:p></a:txBody></a:tc><a:tc><a:txBody><a:bodyPr /><a:lstStyle /><a:p><a:pPr lvl="0" indent="0" marL="0" algn="l"><a:buNone /></a:pPr><a:r><a:rPr /><a:t>Total cost </a:t></a:r><a14:m><m:oMath xmlns:m="http://schemas.openxmlformats.org/officeDocument/2006/math"><m:r><m:t>I</m:t></m:r><m:d><m:dPr><m:begChr m:val="(" /><m:sepChr m:val="" /><m:endChr m:val=")" /><m:grow /></m:dPr><m:e><m:r><m:t>X</m:t></m:r></m:e></m:d><m:r><m:rPr><m:sty m:val="p" /></m:rPr><m:t>+</m:t></m:r><m:r><m:t>L</m:t></m:r><m:d><m:dPr><m:begChr m:val="(" /><m:sepChr m:val="" /><m:endChr m:val=")" /><m:grow /></m:dPr><m:e><m:r><m:t>X</m:t></m:r></m:e></m:d></m:oMath></a14:m></a:p></a:txBody></a:tc></a:tr><a:tr h="0"><a:tc><a:txBody><a:bodyPr /><a:lstStyle /><a:p><a:pPr lvl="0" indent="0" marL="0" algn="l"><a:buNone /></a:pPr><a14:m><m:oMath xmlns:m="http://schemas.openxmlformats.org/officeDocument/2006/math"><m:sSub><m:e><m:r><m:t>g</m:t></m:r></m:e><m:sub><m:r><m:t>j</m:t></m:r></m:sub></m:sSub><m:r><m:rPr><m:sty m:val="p" /></m:rPr><m:t>≤</m:t></m:r><m:r><m:t>0</m:t></m:r></m:oMath></a14:m></a:p></a:txBody></a:tc><a:tc><a:txBody><a:bodyPr /><a:lstStyle /><a:p><a:pPr lvl="0" indent="0" marL="0" algn="l"><a:buNone /></a:pPr><a:r><a:rPr /><a:t>Constraints</a:t></a:r></a:p></a:txBody></a:tc><a:tc><a:txBody><a:bodyPr /><a:lstStyle /><a:p><a:pPr lvl="0" indent="0" marL="0" algn="l"><a:buNone /></a:pPr><a14:m><m:oMath xmlns:m="http://schemas.openxmlformats.org/officeDocument/2006/math"><m:r><m:t>X</m:t></m:r><m:r><m:rPr><m:sty m:val="p" /></m:rPr><m:t>≥</m:t></m:r><m:r><m:t>0</m:t></m:r></m:oMath></a14:m></a:p></a:txBody></a:tc></a:tr></a:tbl></a:graphicData></a:graphic></p:graphicFrame></p:spTree></p:cSld></p:sld>
+<file path=ppt/slides/slide15.xml><?xml version="1.0" encoding="UTF-8"?><p:sld xmlns:a="http://schemas.openxmlformats.org/drawingml/2006/main" xmlns:r="http://schemas.openxmlformats.org/officeDocument/2006/relationships" xmlns:p="http://schemas.openxmlformats.org/presentationml/2006/main"><p:cSld><p:spTree><p:nvGrpSpPr><p:cNvPr id="1" name="" /><p:cNvGrpSpPr /><p:nvPr /></p:nvGrpSpPr><p:grpSpPr><a:xfrm><a:off x="0" y="0" /><a:ext cx="0" cy="0" /><a:chOff x="0" y="0" /><a:chExt cx="0" cy="0" /></a:xfrm></p:grpSpPr><p:sp><p:nvSpPr><p:cNvPr id="2" name="Title 1" /><p:cNvSpPr><a:spLocks noGrp="1" /></p:cNvSpPr><p:nvPr><p:ph type="title" /></p:nvPr></p:nvSpPr><p:spPr><a:xfrm><a:off x="457201" y="204787" /><a:ext cx="3008313" cy="871538" /></a:xfrm></p:spPr><p:txBody><a:bodyPr /><a:lstStyle /><a:p><a:pPr lvl="0" indent="0" marL="0"><a:buNone /></a:pPr><a:r><a:rPr /><a:t>Optimization and Policy Search</a:t></a:r></a:p></p:txBody></p:sp><mc:AlternateContent xmlns:mc="http://schemas.openxmlformats.org/markup-compatibility/2006"><mc:Choice xmlns:a14="http://schemas.microsoft.com/office/drawing/2010/main" Requires="a14"><p:sp><p:nvSpPr><p:cNvPr id="4" name="Text Placeholder 3" /><p:cNvSpPr><a:spLocks noGrp="1" /></p:cNvSpPr><p:nvPr><p:ph idx="2" sz="half" type="body" /></p:nvPr></p:nvSpPr><p:spPr /><p:txBody><a:bodyPr /><a:lstStyle /><a:p><a:pPr lvl="0" indent="0" marL="0"><a:buNone /></a:pPr><a:r><a:rPr /><a:t>van Dantzig used optimization to inform an engineering design decision. Let’s formalize the general framework.</a:t></a:r></a:p><a:p><a:pPr lvl="0" indent="0" marL="0"><a:spcBef><a:spcPts val="3000" /></a:spcBef><a:buNone /></a:pPr><a:r><a:rPr b="1" /><a:t>Optimization Fundamentals</a:t></a:r></a:p><a:p><a:pPr lvl="0" indent="0" marL="0"><a:buNone /></a:pPr><a:r><a:rPr /><a:t>Every optimization problem has the same mathematical structure:</a:t></a:r></a:p><a:p><a:pPr lvl="0" indent="0" marL="0"><a:buNone /></a:pPr><a14:m><m:oMathPara xmlns:m="http://schemas.openxmlformats.org/officeDocument/2006/math"><m:oMathParaPr><m:jc m:val="center" /></m:oMathParaPr><m:oMath><m:m><m:mPr><m:baseJc m:val="center" /><m:plcHide m:val="on" /><m:mcs><m:mc><m:mcPr><m:mcJc m:val="right" /><m:count m:val="1" /></m:mcPr></m:mc><m:mc><m:mcPr><m:mcJc m:val="left" /><m:count m:val="1" /></m:mcPr></m:mc><m:mc><m:mcPr><m:mcJc m:val="right" /><m:count m:val="1" /></m:mcPr></m:mc></m:mcs></m:mPr><m:mr><m:e><m:limLow><m:e><m:r><m:rPr><m:sty m:val="p" /></m:rPr><m:t>min</m:t></m:r></m:e><m:lim><m:r><m:rPr><m:sty m:val="b" /></m:rPr><m:t>x</m:t></m:r></m:lim></m:limLow><m:r><m:t> </m:t></m:r></m:e><m:e><m:r><m:t>f</m:t></m:r><m:r><m:rPr><m:sty m:val="p" /></m:rPr><m:t>(</m:t></m:r><m:r><m:rPr><m:sty m:val="b" /></m:rPr><m:t>x</m:t></m:r><m:r><m:rPr><m:sty m:val="p" /></m:rPr><m:t>)</m:t></m:r></m:e></m:mr><m:mr><m:e><m:r><m:rPr><m:nor /><m:sty m:val="p" /></m:rPr><m:t>subject to</m:t></m:r><m:r><m:t> </m:t></m:r></m:e><m:e><m:sSub><m:e><m:r><m:t>g</m:t></m:r></m:e><m:sub><m:r><m:t>j</m:t></m:r></m:sub></m:sSub><m:r><m:rPr><m:sty m:val="p" /></m:rPr><m:t>(</m:t></m:r><m:r><m:rPr><m:sty m:val="b" /></m:rPr><m:t>x</m:t></m:r><m:r><m:rPr><m:sty m:val="p" /></m:rPr><m:t>)</m:t></m:r><m:r><m:rPr><m:sty m:val="p" /></m:rPr><m:t>≤</m:t></m:r><m:r><m:t>0</m:t></m:r><m:r><m:rPr><m:sty m:val="p" /></m:rPr><m:t>,</m:t></m:r></m:e><m:e><m:r><m:t>j</m:t></m:r><m:r><m:rPr><m:sty m:val="p" /></m:rPr><m:t>=</m:t></m:r><m:r><m:t>1</m:t></m:r><m:r><m:rPr><m:sty m:val="p" /></m:rPr><m:t>,</m:t></m:r><m:r><m:rPr><m:sty m:val="p" /></m:rPr><m:t>…</m:t></m:r><m:r><m:rPr><m:sty m:val="p" /></m:rPr><m:t>,</m:t></m:r><m:r><m:t>J</m:t></m:r></m:e></m:mr><m:mr><m:e /><m:e><m:sSub><m:e><m:r><m:t>h</m:t></m:r></m:e><m:sub><m:r><m:t>k</m:t></m:r></m:sub></m:sSub><m:r><m:rPr><m:sty m:val="p" /></m:rPr><m:t>(</m:t></m:r><m:r><m:rPr><m:sty m:val="b" /></m:rPr><m:t>x</m:t></m:r><m:r><m:rPr><m:sty m:val="p" /></m:rPr><m:t>)</m:t></m:r><m:r><m:rPr><m:sty m:val="p" /></m:rPr><m:t>=</m:t></m:r><m:r><m:t>0</m:t></m:r><m:r><m:rPr><m:sty m:val="p" /></m:rPr><m:t>,</m:t></m:r></m:e><m:e><m:r><m:t>k</m:t></m:r><m:r><m:rPr><m:sty m:val="p" /></m:rPr><m:t>=</m:t></m:r><m:r><m:t>1</m:t></m:r><m:r><m:rPr><m:sty m:val="p" /></m:rPr><m:t>,</m:t></m:r><m:r><m:rPr><m:sty m:val="p" /></m:rPr><m:t>…</m:t></m:r><m:r><m:rPr><m:sty m:val="p" /></m:rPr><m:t>,</m:t></m:r><m:r><m:t>K</m:t></m:r></m:e></m:mr></m:m></m:oMath></m:oMathPara></a14:m></a:p></p:txBody></p:sp></mc:Choice></mc:AlternateContent><p:graphicFrame><p:nvGraphicFramePr><p:cNvPr id="6" name="Content Placeholder 5" /><p:cNvGraphicFramePr><a:graphicFrameLocks noGrp="1" /></p:cNvGraphicFramePr><p:nvPr><p:ph idx="1" /></p:nvPr></p:nvGraphicFramePr><p:xfrm><a:off x="3568700" y="203200" /><a:ext cx="5105400" cy="4381500" /></p:xfrm><a:graphic><a:graphicData uri="http://schemas.openxmlformats.org/drawingml/2006/table"><a:tbl><a:tblPr firstRow="1" bandRow="1"><a:tableStyleId>{5C22544A-7EE6-4342-B048-85BDC9FD1C3A}</a:tableStyleId></a:tblPr><a:tblGrid><a:gridCol w="1701800" /><a:gridCol w="1701800" /><a:gridCol w="1701800" /></a:tblGrid><a:tr h="0"><a:tc><a:txBody><a:bodyPr /><a:lstStyle /><a:p><a:pPr lvl="0" indent="0" marL="0" algn="l"><a:buNone /></a:pPr><a:r><a:rPr /><a:t>Notation</a:t></a:r></a:p></a:txBody><a:tcPr /></a:tc><a:tc><a:txBody><a:bodyPr /><a:lstStyle /><a:p><a:pPr lvl="0" indent="0" marL="0" algn="l"><a:buNone /></a:pPr><a:r><a:rPr /><a:t>Meaning</a:t></a:r></a:p></a:txBody><a:tcPr /></a:tc><a:tc><a:txBody><a:bodyPr /><a:lstStyle /><a:p><a:pPr lvl="0" indent="0" marL="0" algn="l"><a:buNone /></a:pPr><a:r><a:rPr /><a:t>van Dantzig</a:t></a:r></a:p></a:txBody><a:tcPr /></a:tc></a:tr><a:tr h="0"><a:tc><a:txBody><a:bodyPr /><a:lstStyle /><a:p><a:pPr lvl="0" indent="0" marL="0" algn="l"><a:buNone /></a:pPr><a14:m><m:oMath xmlns:m="http://schemas.openxmlformats.org/officeDocument/2006/math"><m:r><m:rPr><m:sty m:val="b" /></m:rPr><m:t>x</m:t></m:r></m:oMath></a14:m></a:p></a:txBody></a:tc><a:tc><a:txBody><a:bodyPr /><a:lstStyle /><a:p><a:pPr lvl="0" indent="0" marL="0" algn="l"><a:buNone /></a:pPr><a:r><a:rPr /><a:t>Decision variables</a:t></a:r></a:p></a:txBody></a:tc><a:tc><a:txBody><a:bodyPr /><a:lstStyle /><a:p><a:pPr lvl="0" indent="0" marL="0" algn="l"><a:buNone /></a:pPr><a14:m><m:oMath xmlns:m="http://schemas.openxmlformats.org/officeDocument/2006/math"><m:r><m:t>X</m:t></m:r></m:oMath></a14:m><a:r><a:rPr /><a:t> = dike heightening</a:t></a:r></a:p></a:txBody></a:tc></a:tr><a:tr h="0"><a:tc><a:txBody><a:bodyPr /><a:lstStyle /><a:p><a:pPr lvl="0" indent="0" marL="0" algn="l"><a:buNone /></a:pPr><a14:m><m:oMath xmlns:m="http://schemas.openxmlformats.org/officeDocument/2006/math"><m:r><m:t>f</m:t></m:r><m:r><m:rPr><m:sty m:val="p" /></m:rPr><m:t>(</m:t></m:r><m:r><m:rPr><m:sty m:val="b" /></m:rPr><m:t>x</m:t></m:r><m:r><m:rPr><m:sty m:val="p" /></m:rPr><m:t>)</m:t></m:r></m:oMath></a14:m></a:p></a:txBody></a:tc><a:tc><a:txBody><a:bodyPr /><a:lstStyle /><a:p><a:pPr lvl="0" indent="0" marL="0" algn="l"><a:buNone /></a:pPr><a:r><a:rPr /><a:t>Objective function</a:t></a:r></a:p></a:txBody></a:tc><a:tc><a:txBody><a:bodyPr /><a:lstStyle /><a:p><a:pPr lvl="0" indent="0" marL="0" algn="l"><a:buNone /></a:pPr><a:r><a:rPr /><a:t>Total cost </a:t></a:r><a14:m><m:oMath xmlns:m="http://schemas.openxmlformats.org/officeDocument/2006/math"><m:r><m:t>I</m:t></m:r><m:r><m:rPr><m:sty m:val="p" /></m:rPr><m:t>(</m:t></m:r><m:r><m:t>X</m:t></m:r><m:r><m:rPr><m:sty m:val="p" /></m:rPr><m:t>)</m:t></m:r><m:r><m:rPr><m:sty m:val="p" /></m:rPr><m:t>+</m:t></m:r><m:r><m:t>L</m:t></m:r><m:r><m:rPr><m:sty m:val="p" /></m:rPr><m:t>(</m:t></m:r><m:r><m:t>X</m:t></m:r><m:r><m:rPr><m:sty m:val="p" /></m:rPr><m:t>)</m:t></m:r></m:oMath></a14:m></a:p></a:txBody></a:tc></a:tr><a:tr h="0"><a:tc><a:txBody><a:bodyPr /><a:lstStyle /><a:p><a:pPr lvl="0" indent="0" marL="0" algn="l"><a:buNone /></a:pPr><a14:m><m:oMath xmlns:m="http://schemas.openxmlformats.org/officeDocument/2006/math"><m:sSub><m:e><m:r><m:t>g</m:t></m:r></m:e><m:sub><m:r><m:t>j</m:t></m:r></m:sub></m:sSub><m:r><m:rPr><m:sty m:val="p" /></m:rPr><m:t>≤</m:t></m:r><m:r><m:t>0</m:t></m:r></m:oMath></a14:m></a:p></a:txBody></a:tc><a:tc><a:txBody><a:bodyPr /><a:lstStyle /><a:p><a:pPr lvl="0" indent="0" marL="0" algn="l"><a:buNone /></a:pPr><a:r><a:rPr /><a:t>Constraints</a:t></a:r></a:p></a:txBody></a:tc><a:tc><a:txBody><a:bodyPr /><a:lstStyle /><a:p><a:pPr lvl="0" indent="0" marL="0" algn="l"><a:buNone /></a:pPr><a14:m><m:oMath xmlns:m="http://schemas.openxmlformats.org/officeDocument/2006/math"><m:r><m:t>X</m:t></m:r><m:r><m:rPr><m:sty m:val="p" /></m:rPr><m:t>≥</m:t></m:r><m:r><m:t>0</m:t></m:r></m:oMath></a14:m></a:p></a:txBody></a:tc></a:tr></a:tbl></a:graphicData></a:graphic></p:graphicFrame></p:spTree></p:cSld></p:sld>
 </file>
 
-<file path=ppt/slides/slide16.xml><?xml version="1.0" encoding="UTF-8"?><p:sld xmlns:a="http://schemas.openxmlformats.org/drawingml/2006/main" xmlns:r="http://schemas.openxmlformats.org/officeDocument/2006/relationships" xmlns:p="http://schemas.openxmlformats.org/presentationml/2006/main"><p:cSld><p:spTree><p:nvGrpSpPr><p:cNvPr id="1" name="" /><p:cNvGrpSpPr /><p:nvPr /></p:nvGrpSpPr><p:grpSpPr><a:xfrm><a:off x="0" y="0" /><a:ext cx="0" cy="0" /><a:chOff x="0" y="0" /><a:chExt cx="0" cy="0" /></a:xfrm></p:grpSpPr><mc:AlternateContent xmlns:mc="http://schemas.openxmlformats.org/markup-compatibility/2006"><mc:Choice xmlns:a14="http://schemas.microsoft.com/office/drawing/2010/main" Requires="a14"><p:sp><p:nvSpPr><p:cNvPr id="4" name="Text Placeholder 3" /><p:cNvSpPr><a:spLocks noGrp="1" /></p:cNvSpPr><p:nvPr><p:ph idx="2" sz="half" type="body" /></p:nvPr></p:nvSpPr><p:spPr /><p:txBody><a:bodyPr /><a:lstStyle /><a:p><a:pPr lvl="0" indent="0" marL="0"><a:spcBef><a:spcPts val="3000" /></a:spcBef><a:buNone /></a:pPr><a:r><a:rPr b="1" /><a:t>Stochastic Optimization: How Uncertainty Enters</a:t></a:r></a:p><a:p><a:pPr lvl="0" indent="0" marL="0"><a:buNone /></a:pPr><a:r><a:rPr /><a:t>van Dantzig averaged over flood uncertainty analytically. More generally, when the objective or constraints depend on uncertain quantities </a:t></a:r><a14:m><m:oMath xmlns:m="http://schemas.openxmlformats.org/officeDocument/2006/math"><m:r><m:rPr><m:sty m:val="b" /></m:rPr><m:t>θ</m:t></m:r></m:oMath></a14:m><a:r><a:rPr /><a:t>:</a:t></a:r></a:p></p:txBody></p:sp></mc:Choice></mc:AlternateContent><p:graphicFrame><p:nvGraphicFramePr><p:cNvPr id="6" name="Content Placeholder 5" /><p:cNvGraphicFramePr><a:graphicFrameLocks noGrp="1" /></p:cNvGraphicFramePr><p:nvPr><p:ph idx="1" /></p:nvPr></p:nvGraphicFramePr><p:xfrm><a:off x="3568700" y="203200" /><a:ext cx="5105400" cy="4381500" /></p:xfrm><a:graphic><a:graphicData uri="http://schemas.openxmlformats.org/drawingml/2006/table"><a:tbl><a:tblPr firstRow="1" bandRow="1"><a:tableStyleId>{5C22544A-7EE6-4342-B048-85BDC9FD1C3A}</a:tableStyleId></a:tblPr><a:tblGrid><a:gridCol w="1701800" /><a:gridCol w="1701800" /><a:gridCol w="1701800" /></a:tblGrid><a:tr h="0"><a:tc><a:txBody><a:bodyPr /><a:lstStyle /><a:p><a:pPr lvl="0" indent="0" marL="0" algn="l"><a:buNone /></a:pPr><a:r><a:rPr /><a:t>Approach</a:t></a:r></a:p></a:txBody><a:tcPr /></a:tc><a:tc><a:txBody><a:bodyPr /><a:lstStyle /><a:p><a:pPr lvl="0" indent="0" marL="0" algn="l"><a:buNone /></a:pPr><a:r><a:rPr /><a:t>Formulation</a:t></a:r></a:p></a:txBody><a:tcPr /></a:tc><a:tc><a:txBody><a:bodyPr /><a:lstStyle /><a:p><a:pPr lvl="0" indent="0" marL="0" algn="l"><a:buNone /></a:pPr><a:r><a:rPr /><a:t>Plain English</a:t></a:r></a:p></a:txBody><a:tcPr /></a:tc></a:tr><a:tr h="0"><a:tc><a:txBody><a:bodyPr /><a:lstStyle /><a:p><a:pPr lvl="0" indent="0" marL="0" algn="l"><a:buNone /></a:pPr><a:r><a:rPr /><a:t>Expected value</a:t></a:r></a:p></a:txBody></a:tc><a:tc><a:txBody><a:bodyPr /><a:lstStyle /><a:p><a:pPr lvl="0" indent="0" marL="0" algn="l"><a:buNone /></a:pPr><a14:m><m:oMath xmlns:m="http://schemas.openxmlformats.org/officeDocument/2006/math"><m:sSub><m:e><m:r><m:rPr><m:sty m:val="p" /></m:rPr><m:t>min</m:t></m:r></m:e><m:sub><m:r><m:rPr><m:sty m:val="b" /></m:rPr><m:t>x</m:t></m:r></m:sub></m:sSub><m:r><m:t> </m:t></m:r><m:r><m:rPr><m:sty m:val="p" /><m:scr m:val="double-struck" /></m:rPr><m:t>E</m:t></m:r><m:d><m:dPr><m:begChr m:val="[" /><m:sepChr m:val="" /><m:endChr m:val="]" /><m:grow /></m:dPr><m:e><m:r><m:t>f</m:t></m:r><m:d><m:dPr><m:begChr m:val="(" /><m:sepChr m:val="" /><m:endChr m:val=")" /><m:grow /></m:dPr><m:e><m:r><m:rPr><m:sty m:val="b" /></m:rPr><m:t>x</m:t></m:r><m:r><m:rPr><m:sty m:val="p" /></m:rPr><m:t>,</m:t></m:r><m:r><m:rPr><m:sty m:val="b" /></m:rPr><m:t>θ</m:t></m:r></m:e></m:d></m:e></m:d></m:oMath></a14:m></a:p></a:txBody></a:tc><a:tc><a:txBody><a:bodyPr /><a:lstStyle /><a:p><a:pPr lvl="0" indent="0" marL="0" algn="l"><a:buNone /></a:pPr><a:r><a:rPr /><a:t>Minimize the average outcome</a:t></a:r></a:p></a:txBody></a:tc></a:tr><a:tr h="0"><a:tc><a:txBody><a:bodyPr /><a:lstStyle /><a:p><a:pPr lvl="0" indent="0" marL="0" algn="l"><a:buNone /></a:pPr><a:r><a:rPr /><a:t>Chance constraint</a:t></a:r></a:p></a:txBody></a:tc><a:tc><a:txBody><a:bodyPr /><a:lstStyle /><a:p><a:pPr lvl="0" indent="0" marL="0" algn="l"><a:buNone /></a:pPr><a14:m><m:oMath xmlns:m="http://schemas.openxmlformats.org/officeDocument/2006/math"><m:r><m:rPr><m:sty m:val="p" /></m:rPr><m:t>Pr</m:t></m:r><m:d><m:dPr><m:begChr m:val="[" /><m:sepChr m:val="" /><m:endChr m:val="]" /><m:grow /></m:dPr><m:e><m:r><m:t>g</m:t></m:r><m:d><m:dPr><m:begChr m:val="(" /><m:sepChr m:val="" /><m:endChr m:val=")" /><m:grow /></m:dPr><m:e><m:r><m:rPr><m:sty m:val="b" /></m:rPr><m:t>x</m:t></m:r><m:r><m:rPr><m:sty m:val="p" /></m:rPr><m:t>,</m:t></m:r><m:r><m:rPr><m:sty m:val="b" /></m:rPr><m:t>θ</m:t></m:r></m:e></m:d><m:r><m:rPr><m:sty m:val="p" /></m:rPr><m:t>≤</m:t></m:r><m:r><m:t>0</m:t></m:r></m:e></m:d><m:r><m:rPr><m:sty m:val="p" /></m:rPr><m:t>≥</m:t></m:r><m:r><m:t>1</m:t></m:r><m:r><m:rPr><m:sty m:val="p" /></m:rPr><m:t>−</m:t></m:r><m:r><m:t>ϵ</m:t></m:r></m:oMath></a14:m></a:p></a:txBody></a:tc><a:tc><a:txBody><a:bodyPr /><a:lstStyle /><a:p><a:pPr lvl="0" indent="0" marL="0" algn="l"><a:buNone /></a:pPr><a:r><a:rPr /><a:t>Meet constraints with high probability</a:t></a:r></a:p></a:txBody></a:tc></a:tr><a:tr h="0"><a:tc><a:txBody><a:bodyPr /><a:lstStyle /><a:p><a:pPr lvl="0" indent="0" marL="0" algn="l"><a:buNone /></a:pPr><a:r><a:rPr /><a:t>Robust</a:t></a:r></a:p></a:txBody></a:tc><a:tc><a:txBody><a:bodyPr /><a:lstStyle /><a:p><a:pPr lvl="0" indent="0" marL="0" algn="l"><a:buNone /></a:pPr><a14:m><m:oMath xmlns:m="http://schemas.openxmlformats.org/officeDocument/2006/math"><m:sSub><m:e><m:r><m:rPr><m:sty m:val="p" /></m:rPr><m:t>min</m:t></m:r></m:e><m:sub><m:r><m:rPr><m:sty m:val="b" /></m:rPr><m:t>x</m:t></m:r></m:sub></m:sSub><m:sSub><m:e><m:r><m:rPr><m:sty m:val="p" /></m:rPr><m:t>max</m:t></m:r></m:e><m:sub><m:r><m:rPr><m:sty m:val="b" /></m:rPr><m:t>θ</m:t></m:r></m:sub></m:sSub><m:r><m:t>f</m:t></m:r><m:d><m:dPr><m:begChr m:val="(" /><m:sepChr m:val="" /><m:endChr m:val=")" /><m:grow /></m:dPr><m:e><m:r><m:rPr><m:sty m:val="b" /></m:rPr><m:t>x</m:t></m:r><m:r><m:rPr><m:sty m:val="p" /></m:rPr><m:t>,</m:t></m:r><m:r><m:rPr><m:sty m:val="b" /></m:rPr><m:t>θ</m:t></m:r></m:e></m:d></m:oMath></a14:m></a:p></a:txBody></a:tc><a:tc><a:txBody><a:bodyPr /><a:lstStyle /><a:p><a:pPr lvl="0" indent="0" marL="0" algn="l"><a:buNone /></a:pPr><a:r><a:rPr /><a:t>Minimize the worst case</a:t></a:r></a:p></a:txBody></a:tc></a:tr></a:tbl></a:graphicData></a:graphic></p:graphicFrame></p:spTree></p:cSld></p:sld>
+<file path=ppt/slides/slide16.xml><?xml version="1.0" encoding="UTF-8"?><p:sld xmlns:a="http://schemas.openxmlformats.org/drawingml/2006/main" xmlns:r="http://schemas.openxmlformats.org/officeDocument/2006/relationships" xmlns:p="http://schemas.openxmlformats.org/presentationml/2006/main"><p:cSld><p:spTree><p:nvGrpSpPr><p:cNvPr id="1" name="" /><p:cNvGrpSpPr /><p:nvPr /></p:nvGrpSpPr><p:grpSpPr><a:xfrm><a:off x="0" y="0" /><a:ext cx="0" cy="0" /><a:chOff x="0" y="0" /><a:chExt cx="0" cy="0" /></a:xfrm></p:grpSpPr><mc:AlternateContent xmlns:mc="http://schemas.openxmlformats.org/markup-compatibility/2006"><mc:Choice xmlns:a14="http://schemas.microsoft.com/office/drawing/2010/main" Requires="a14"><p:sp><p:nvSpPr><p:cNvPr id="4" name="Text Placeholder 3" /><p:cNvSpPr><a:spLocks noGrp="1" /></p:cNvSpPr><p:nvPr><p:ph idx="2" sz="half" type="body" /></p:nvPr></p:nvSpPr><p:spPr /><p:txBody><a:bodyPr /><a:lstStyle /><a:p><a:pPr lvl="0" indent="0" marL="0"><a:spcBef><a:spcPts val="3000" /></a:spcBef><a:buNone /></a:pPr><a:r><a:rPr b="1" /><a:t>Stochastic Optimization: How Uncertainty Enters</a:t></a:r></a:p><a:p><a:pPr lvl="0" indent="0" marL="0"><a:buNone /></a:pPr><a:r><a:rPr /><a:t>van Dantzig averaged over flood uncertainty analytically. More generally, when the objective or constraints depend on uncertain quantities </a:t></a:r><a14:m><m:oMath xmlns:m="http://schemas.openxmlformats.org/officeDocument/2006/math"><m:r><m:rPr><m:sty m:val="b" /></m:rPr><m:t>θ</m:t></m:r></m:oMath></a14:m><a:r><a:rPr /><a:t>:</a:t></a:r></a:p></p:txBody></p:sp></mc:Choice></mc:AlternateContent><p:graphicFrame><p:nvGraphicFramePr><p:cNvPr id="6" name="Content Placeholder 5" /><p:cNvGraphicFramePr><a:graphicFrameLocks noGrp="1" /></p:cNvGraphicFramePr><p:nvPr><p:ph idx="1" /></p:nvPr></p:nvGraphicFramePr><p:xfrm><a:off x="3568700" y="203200" /><a:ext cx="5105400" cy="4381500" /></p:xfrm><a:graphic><a:graphicData uri="http://schemas.openxmlformats.org/drawingml/2006/table"><a:tbl><a:tblPr firstRow="1" bandRow="1"><a:tableStyleId>{5C22544A-7EE6-4342-B048-85BDC9FD1C3A}</a:tableStyleId></a:tblPr><a:tblGrid><a:gridCol w="1701800" /><a:gridCol w="1701800" /><a:gridCol w="1701800" /></a:tblGrid><a:tr h="0"><a:tc><a:txBody><a:bodyPr /><a:lstStyle /><a:p><a:pPr lvl="0" indent="0" marL="0" algn="l"><a:buNone /></a:pPr><a:r><a:rPr /><a:t>Approach</a:t></a:r></a:p></a:txBody><a:tcPr /></a:tc><a:tc><a:txBody><a:bodyPr /><a:lstStyle /><a:p><a:pPr lvl="0" indent="0" marL="0" algn="l"><a:buNone /></a:pPr><a:r><a:rPr /><a:t>Formulation</a:t></a:r></a:p></a:txBody><a:tcPr /></a:tc><a:tc><a:txBody><a:bodyPr /><a:lstStyle /><a:p><a:pPr lvl="0" indent="0" marL="0" algn="l"><a:buNone /></a:pPr><a:r><a:rPr /><a:t>Plain English</a:t></a:r></a:p></a:txBody><a:tcPr /></a:tc></a:tr><a:tr h="0"><a:tc><a:txBody><a:bodyPr /><a:lstStyle /><a:p><a:pPr lvl="0" indent="0" marL="0" algn="l"><a:buNone /></a:pPr><a:r><a:rPr /><a:t>Expected value</a:t></a:r></a:p></a:txBody></a:tc><a:tc><a:txBody><a:bodyPr /><a:lstStyle /><a:p><a:pPr lvl="0" indent="0" marL="0" algn="l"><a:buNone /></a:pPr><a14:m><m:oMath xmlns:m="http://schemas.openxmlformats.org/officeDocument/2006/math"><m:sSub><m:e><m:r><m:rPr><m:sty m:val="p" /></m:rPr><m:t>min</m:t></m:r></m:e><m:sub><m:r><m:rPr><m:sty m:val="b" /></m:rPr><m:t>x</m:t></m:r></m:sub></m:sSub><m:r><m:t> </m:t></m:r><m:r><m:rPr><m:scr m:val="double-struck" /><m:sty m:val="p" /></m:rPr><m:t>E</m:t></m:r><m:r><m:rPr><m:sty m:val="p" /></m:rPr><m:t>[</m:t></m:r><m:r><m:t>f</m:t></m:r><m:r><m:rPr><m:sty m:val="p" /></m:rPr><m:t>(</m:t></m:r><m:r><m:rPr><m:sty m:val="b" /></m:rPr><m:t>x</m:t></m:r><m:r><m:rPr><m:sty m:val="p" /></m:rPr><m:t>,</m:t></m:r><m:r><m:rPr><m:sty m:val="b" /></m:rPr><m:t>θ</m:t></m:r><m:r><m:rPr><m:sty m:val="p" /></m:rPr><m:t>)</m:t></m:r><m:r><m:rPr><m:sty m:val="p" /></m:rPr><m:t>]</m:t></m:r></m:oMath></a14:m></a:p></a:txBody></a:tc><a:tc><a:txBody><a:bodyPr /><a:lstStyle /><a:p><a:pPr lvl="0" indent="0" marL="0" algn="l"><a:buNone /></a:pPr><a:r><a:rPr /><a:t>Minimize the average outcome</a:t></a:r></a:p></a:txBody></a:tc></a:tr><a:tr h="0"><a:tc><a:txBody><a:bodyPr /><a:lstStyle /><a:p><a:pPr lvl="0" indent="0" marL="0" algn="l"><a:buNone /></a:pPr><a:r><a:rPr /><a:t>Chance constraint</a:t></a:r></a:p></a:txBody></a:tc><a:tc><a:txBody><a:bodyPr /><a:lstStyle /><a:p><a:pPr lvl="0" indent="0" marL="0" algn="l"><a:buNone /></a:pPr><a14:m><m:oMath xmlns:m="http://schemas.openxmlformats.org/officeDocument/2006/math"><m:r><m:rPr><m:sty m:val="p" /></m:rPr><m:t>Pr</m:t></m:r><m:r><m:rPr><m:sty m:val="p" /></m:rPr><m:t>[</m:t></m:r><m:r><m:t>g</m:t></m:r><m:r><m:rPr><m:sty m:val="p" /></m:rPr><m:t>(</m:t></m:r><m:r><m:rPr><m:sty m:val="b" /></m:rPr><m:t>x</m:t></m:r><m:r><m:rPr><m:sty m:val="p" /></m:rPr><m:t>,</m:t></m:r><m:r><m:rPr><m:sty m:val="b" /></m:rPr><m:t>θ</m:t></m:r><m:r><m:rPr><m:sty m:val="p" /></m:rPr><m:t>)</m:t></m:r><m:r><m:rPr><m:sty m:val="p" /></m:rPr><m:t>≤</m:t></m:r><m:r><m:t>0</m:t></m:r><m:r><m:rPr><m:sty m:val="p" /></m:rPr><m:t>]</m:t></m:r><m:r><m:rPr><m:sty m:val="p" /></m:rPr><m:t>≥</m:t></m:r><m:r><m:t>1</m:t></m:r><m:r><m:rPr><m:sty m:val="p" /></m:rPr><m:t>−</m:t></m:r><m:r><m:t>ϵ</m:t></m:r></m:oMath></a14:m></a:p></a:txBody></a:tc><a:tc><a:txBody><a:bodyPr /><a:lstStyle /><a:p><a:pPr lvl="0" indent="0" marL="0" algn="l"><a:buNone /></a:pPr><a:r><a:rPr /><a:t>Meet constraints with high probability</a:t></a:r></a:p></a:txBody></a:tc></a:tr><a:tr h="0"><a:tc><a:txBody><a:bodyPr /><a:lstStyle /><a:p><a:pPr lvl="0" indent="0" marL="0" algn="l"><a:buNone /></a:pPr><a:r><a:rPr /><a:t>Robust</a:t></a:r></a:p></a:txBody></a:tc><a:tc><a:txBody><a:bodyPr /><a:lstStyle /><a:p><a:pPr lvl="0" indent="0" marL="0" algn="l"><a:buNone /></a:pPr><a14:m><m:oMath xmlns:m="http://schemas.openxmlformats.org/officeDocument/2006/math"><m:sSub><m:e><m:r><m:rPr><m:sty m:val="p" /></m:rPr><m:t>min</m:t></m:r></m:e><m:sub><m:r><m:rPr><m:sty m:val="b" /></m:rPr><m:t>x</m:t></m:r></m:sub></m:sSub><m:sSub><m:e><m:r><m:rPr><m:sty m:val="p" /></m:rPr><m:t>max</m:t></m:r></m:e><m:sub><m:r><m:rPr><m:sty m:val="b" /></m:rPr><m:t>θ</m:t></m:r></m:sub></m:sSub><m:r><m:t>f</m:t></m:r><m:r><m:rPr><m:sty m:val="p" /></m:rPr><m:t>(</m:t></m:r><m:r><m:rPr><m:sty m:val="b" /></m:rPr><m:t>x</m:t></m:r><m:r><m:rPr><m:sty m:val="p" /></m:rPr><m:t>,</m:t></m:r><m:r><m:rPr><m:sty m:val="b" /></m:rPr><m:t>θ</m:t></m:r><m:r><m:rPr><m:sty m:val="p" /></m:rPr><m:t>)</m:t></m:r></m:oMath></a14:m></a:p></a:txBody></a:tc><a:tc><a:txBody><a:bodyPr /><a:lstStyle /><a:p><a:pPr lvl="0" indent="0" marL="0" algn="l"><a:buNone /></a:pPr><a:r><a:rPr /><a:t>Minimize the worst case</a:t></a:r></a:p></a:txBody></a:tc></a:tr></a:tbl></a:graphicData></a:graphic></p:graphicFrame></p:spTree></p:cSld></p:sld>
 </file>
 
 <file path=ppt/slides/slide17.xml><?xml version="1.0" encoding="utf-8"?>
@@ -7006,22 +7034,24 @@
                     <m:r>
                       <m:t>f</m:t>
                     </m:r>
-                    <m:d>
-                      <m:dPr>
-                        <m:begChr m:val="("/>
-                        <m:sepChr m:val=""/>
-                        <m:endChr m:val=")"/>
-                        <m:grow/>
-                      </m:dPr>
-                      <m:e>
-                        <m:r>
-                          <m:rPr>
-                            <m:sty m:val="b"/>
-                          </m:rPr>
-                          <m:t>x</m:t>
-                        </m:r>
-                      </m:e>
-                    </m:d>
+                    <m:r>
+                      <m:rPr>
+                        <m:sty m:val="p"/>
+                      </m:rPr>
+                      <m:t>(</m:t>
+                    </m:r>
+                    <m:r>
+                      <m:rPr>
+                        <m:sty m:val="b"/>
+                      </m:rPr>
+                      <m:t>x</m:t>
+                    </m:r>
+                    <m:r>
+                      <m:rPr>
+                        <m:sty m:val="p"/>
+                      </m:rPr>
+                      <m:t>)</m:t>
+                    </m:r>
                   </m:oMath>
                 </a14:m>
                 <a:r>
@@ -7558,8 +7588,8 @@
         </p:blipFill>
         <p:spPr bwMode="auto">
           <a:xfrm>
-            <a:off x="457200" y="1295400"/>
-            <a:ext cx="4038600" cy="2692400"/>
+            <a:off x="685800" y="1193800"/>
+            <a:ext cx="3581400" cy="2882900"/>
           </a:xfrm>
           <a:prstGeom prst="rect">
             <a:avLst/>
@@ -7576,7 +7606,9 @@
         <p:nvSpPr>
           <p:cNvPr id="1" name="TextBox 3"/>
           <p:cNvSpPr txBox="1"/>
-          <p:nvPr/>
+          <p:nvPr>
+            <p:ph idx="1"/>
+          </p:nvPr>
         </p:nvSpPr>
         <p:spPr>
           <a:xfrm>
@@ -7838,7 +7870,9 @@
         <p:nvSpPr>
           <p:cNvPr id="1" name="TextBox 3"/>
           <p:cNvSpPr txBox="1"/>
-          <p:nvPr/>
+          <p:nvPr>
+            <p:ph idx="1"/>
+          </p:nvPr>
         </p:nvSpPr>
         <p:spPr>
           <a:xfrm>
@@ -8335,7 +8369,9 @@
         <p:nvSpPr>
           <p:cNvPr id="1" name="TextBox 3"/>
           <p:cNvSpPr txBox="1"/>
-          <p:nvPr/>
+          <p:nvPr>
+            <p:ph idx="1"/>
+          </p:nvPr>
         </p:nvSpPr>
         <p:spPr>
           <a:xfrm>
@@ -8526,7 +8562,9 @@
         <p:nvSpPr>
           <p:cNvPr id="1" name="TextBox 3"/>
           <p:cNvSpPr txBox="1"/>
-          <p:nvPr/>
+          <p:nvPr>
+            <p:ph idx="1"/>
+          </p:nvPr>
         </p:nvSpPr>
         <p:spPr>
           <a:xfrm>
@@ -8598,19 +8636,21 @@
                       <m:r>
                         <m:t>p</m:t>
                       </m:r>
-                      <m:d>
-                        <m:dPr>
-                          <m:begChr m:val="("/>
-                          <m:sepChr m:val=""/>
-                          <m:endChr m:val=")"/>
-                          <m:grow/>
-                        </m:dPr>
-                        <m:e>
-                          <m:r>
-                            <m:t>h</m:t>
-                          </m:r>
-                        </m:e>
-                      </m:d>
+                      <m:r>
+                        <m:rPr>
+                          <m:sty m:val="p"/>
+                        </m:rPr>
+                        <m:t>(</m:t>
+                      </m:r>
+                      <m:r>
+                        <m:t>h</m:t>
+                      </m:r>
+                      <m:r>
+                        <m:rPr>
+                          <m:sty m:val="p"/>
+                        </m:rPr>
+                        <m:t>)</m:t>
+                      </m:r>
                       <m:r>
                         <m:rPr>
                           <m:sty m:val="p"/>
@@ -8648,37 +8688,39 @@
                           <m:r>
                             <m:t>α</m:t>
                           </m:r>
-                          <m:d>
-                            <m:dPr>
-                              <m:begChr m:val="("/>
-                              <m:sepChr m:val=""/>
-                              <m:endChr m:val=")"/>
-                              <m:grow/>
-                            </m:dPr>
+                          <m:r>
+                            <m:rPr>
+                              <m:sty m:val="p"/>
+                            </m:rPr>
+                            <m:t>(</m:t>
+                          </m:r>
+                          <m:r>
+                            <m:t>h</m:t>
+                          </m:r>
+                          <m:r>
+                            <m:rPr>
+                              <m:sty m:val="p"/>
+                            </m:rPr>
+                            <m:t>−</m:t>
+                          </m:r>
+                          <m:sSub>
                             <m:e>
                               <m:r>
-                                <m:t>h</m:t>
+                                <m:t>H</m:t>
                               </m:r>
+                            </m:e>
+                            <m:sub>
                               <m:r>
-                                <m:rPr>
-                                  <m:sty m:val="p"/>
-                                </m:rPr>
-                                <m:t>−</m:t>
+                                <m:t>0</m:t>
                               </m:r>
-                              <m:sSub>
-                                <m:e>
-                                  <m:r>
-                                    <m:t>H</m:t>
-                                  </m:r>
-                                </m:e>
-                                <m:sub>
-                                  <m:r>
-                                    <m:t>0</m:t>
-                                  </m:r>
-                                </m:sub>
-                              </m:sSub>
-                            </m:e>
-                          </m:d>
+                            </m:sub>
+                          </m:sSub>
+                          <m:r>
+                            <m:rPr>
+                              <m:sty m:val="p"/>
+                            </m:rPr>
+                            <m:t>)</m:t>
+                          </m:r>
                         </m:sup>
                       </m:sSup>
                     </m:oMath>
